--- a/课件/C2/C2-A-05/C2-A-05.pptx
+++ b/课件/C2/C2-A-05/C2-A-05.pptx
@@ -1,32 +1,32 @@
 
 <file path=ppt/presentation.xml><?xml version="1.0" encoding="utf-8"?>
-<p:presentation xmlns:a="http://schemas.openxmlformats.org/drawingml/2006/main" xmlns:r="http://schemas.openxmlformats.org/officeDocument/2006/relationships" xmlns:p="http://schemas.openxmlformats.org/presentationml/2006/main" saveSubsetFonts="1" autoCompressPictures="0">
+<p:presentation xmlns:a="http://schemas.openxmlformats.org/drawingml/2006/main" xmlns:r="http://schemas.openxmlformats.org/officeDocument/2006/relationships" xmlns:p="http://schemas.openxmlformats.org/presentationml/2006/main" autoCompressPictures="0">
   <p:sldMasterIdLst>
     <p:sldMasterId id="2147483648" r:id="rId1"/>
   </p:sldMasterIdLst>
+  <p:notesMasterIdLst>
+    <p:notesMasterId r:id="rId4"/>
+  </p:notesMasterIdLst>
   <p:sldIdLst>
-    <p:sldId id="256" r:id="rId2"/>
-    <p:sldId id="257" r:id="rId3"/>
-    <p:sldId id="258" r:id="rId4"/>
-    <p:sldId id="259" r:id="rId5"/>
-    <p:sldId id="260" r:id="rId6"/>
-    <p:sldId id="261" r:id="rId7"/>
-    <p:sldId id="262" r:id="rId8"/>
-    <p:sldId id="263" r:id="rId9"/>
-    <p:sldId id="264" r:id="rId10"/>
-    <p:sldId id="265" r:id="rId11"/>
-    <p:sldId id="266" r:id="rId12"/>
-    <p:sldId id="267" r:id="rId13"/>
-    <p:sldId id="268" r:id="rId14"/>
-    <p:sldId id="269" r:id="rId15"/>
-    <p:sldId id="270" r:id="rId16"/>
-    <p:sldId id="271" r:id="rId17"/>
+    <p:sldId id="256" r:id="rId3"/>
+    <p:sldId id="257" r:id="rId5"/>
+    <p:sldId id="258" r:id="rId6"/>
+    <p:sldId id="259" r:id="rId7"/>
+    <p:sldId id="260" r:id="rId8"/>
+    <p:sldId id="261" r:id="rId9"/>
+    <p:sldId id="262" r:id="rId10"/>
+    <p:sldId id="263" r:id="rId11"/>
+    <p:sldId id="264" r:id="rId12"/>
+    <p:sldId id="265" r:id="rId13"/>
+    <p:sldId id="266" r:id="rId14"/>
+    <p:sldId id="267" r:id="rId15"/>
+    <p:sldId id="268" r:id="rId16"/>
+    <p:sldId id="269" r:id="rId17"/>
+    <p:sldId id="270" r:id="rId18"/>
+    <p:sldId id="271" r:id="rId19"/>
   </p:sldIdLst>
-  <p:notesMasterIdLst>
-    <p:notesMasterId r:id="rId18"/>
-  </p:notesMasterIdLst>
-  <p:sldSz cx="12191695" cy="6858000"/>
-  <p:notesSz cx="6858000" cy="12191695"/>
+  <p:sldSz cx="12191365" cy="6858000"/>
+  <p:notesSz cx="6858000" cy="12191365"/>
   <p:defaultTextStyle>
     <a:lvl1pPr marL="0" algn="l" defTabSz="914400" rtl="0" eaLnBrk="1" latinLnBrk="0" hangingPunct="1">
       <a:defRPr sz="1800" kern="1200">
@@ -204,7 +204,6 @@
           <a:p>
             <a:fld id="{5282F153-3F37-0F45-9E97-73ACFA13230C}" type="datetimeFigureOut">
               <a:rPr lang="en-US"/>
-              <a:t>7/23/19</a:t>
             </a:fld>
             <a:endParaRPr lang="en-US"/>
           </a:p>
@@ -271,6 +270,7 @@
               <a:rPr lang="en-US"/>
               <a:t>Click to edit Master text styles</a:t>
             </a:r>
+            <a:endParaRPr lang="en-US"/>
           </a:p>
           <a:p>
             <a:pPr lvl="1"/>
@@ -278,6 +278,7 @@
               <a:rPr lang="en-US"/>
               <a:t>Second level</a:t>
             </a:r>
+            <a:endParaRPr lang="en-US"/>
           </a:p>
           <a:p>
             <a:pPr lvl="2"/>
@@ -285,6 +286,7 @@
               <a:rPr lang="en-US"/>
               <a:t>Third level</a:t>
             </a:r>
+            <a:endParaRPr lang="en-US"/>
           </a:p>
           <a:p>
             <a:pPr lvl="3"/>
@@ -292,6 +294,7 @@
               <a:rPr lang="en-US"/>
               <a:t>Fourth level</a:t>
             </a:r>
+            <a:endParaRPr lang="en-US"/>
           </a:p>
           <a:p>
             <a:pPr lvl="4"/>
@@ -299,6 +302,7 @@
               <a:rPr lang="en-US"/>
               <a:t>Fifth level</a:t>
             </a:r>
+            <a:endParaRPr lang="en-US"/>
           </a:p>
         </p:txBody>
       </p:sp>
@@ -362,18 +366,12 @@
           <a:p>
             <a:fld id="{CE5E9CC1-C706-0F49-92D6-E571CC5EEA8F}" type="slidenum">
               <a:rPr lang="en-US"/>
-              <a:t>‹#›</a:t>
             </a:fld>
             <a:endParaRPr lang="en-US"/>
           </a:p>
         </p:txBody>
       </p:sp>
     </p:spTree>
-    <p:extLst>
-      <p:ext uri="{BB962C8B-B14F-4D97-AF65-F5344CB8AC3E}">
-        <p14:creationId xmlns:p14="http://schemas.microsoft.com/office/powerpoint/2010/main" val="1024086991"/>
-      </p:ext>
-    </p:extLst>
   </p:cSld>
   <p:clrMap bg1="lt1" tx1="dk1" bg2="lt2" tx2="dk2" accent1="accent1" accent2="accent2" accent3="accent3" accent4="accent4" accent5="accent5" accent6="accent6" hlink="hlink" folHlink="folHlink"/>
   <p:notesStyle>
@@ -515,10 +513,6 @@
           <a:bodyPr/>
           <a:lstStyle/>
           <a:p>
-            <a:r>
-              <a:rPr lang="en-US" dirty="0"/>
-              <a:t/>
-            </a:r>
             <a:endParaRPr lang="en-US" dirty="0"/>
           </a:p>
         </p:txBody>
@@ -540,18 +534,12 @@
           <a:p>
             <a:fld id="{F7021451-1387-4CA6-816F-3879F97B5CBC}" type="slidenum">
               <a:rPr lang="en-US"/>
-              <a:t>1</a:t>
             </a:fld>
             <a:endParaRPr lang="en-US"/>
           </a:p>
         </p:txBody>
       </p:sp>
     </p:spTree>
-    <p:extLst>
-      <p:ext uri="{BB962C8B-B14F-4D97-AF65-F5344CB8AC3E}">
-        <p14:creationId xmlns:p14="http://schemas.microsoft.com/office/powerpoint/2010/main" val="1024086991"/>
-      </p:ext>
-    </p:extLst>
   </p:cSld>
   <p:clrMapOvr>
     <a:masterClrMapping/>
@@ -603,10 +591,6 @@
           <a:bodyPr/>
           <a:lstStyle/>
           <a:p>
-            <a:r>
-              <a:rPr lang="en-US" dirty="0"/>
-              <a:t/>
-            </a:r>
             <a:endParaRPr lang="en-US" dirty="0"/>
           </a:p>
         </p:txBody>
@@ -628,18 +612,12 @@
           <a:p>
             <a:fld id="{F7021451-1387-4CA6-816F-3879F97B5CBC}" type="slidenum">
               <a:rPr lang="en-US"/>
-              <a:t>10</a:t>
             </a:fld>
             <a:endParaRPr lang="en-US"/>
           </a:p>
         </p:txBody>
       </p:sp>
     </p:spTree>
-    <p:extLst>
-      <p:ext uri="{BB962C8B-B14F-4D97-AF65-F5344CB8AC3E}">
-        <p14:creationId xmlns:p14="http://schemas.microsoft.com/office/powerpoint/2010/main" val="1024086991"/>
-      </p:ext>
-    </p:extLst>
   </p:cSld>
   <p:clrMapOvr>
     <a:masterClrMapping/>
@@ -691,10 +669,6 @@
           <a:bodyPr/>
           <a:lstStyle/>
           <a:p>
-            <a:r>
-              <a:rPr lang="en-US" dirty="0"/>
-              <a:t/>
-            </a:r>
             <a:endParaRPr lang="en-US" dirty="0"/>
           </a:p>
         </p:txBody>
@@ -716,18 +690,12 @@
           <a:p>
             <a:fld id="{F7021451-1387-4CA6-816F-3879F97B5CBC}" type="slidenum">
               <a:rPr lang="en-US"/>
-              <a:t>11</a:t>
             </a:fld>
             <a:endParaRPr lang="en-US"/>
           </a:p>
         </p:txBody>
       </p:sp>
     </p:spTree>
-    <p:extLst>
-      <p:ext uri="{BB962C8B-B14F-4D97-AF65-F5344CB8AC3E}">
-        <p14:creationId xmlns:p14="http://schemas.microsoft.com/office/powerpoint/2010/main" val="1024086991"/>
-      </p:ext>
-    </p:extLst>
   </p:cSld>
   <p:clrMapOvr>
     <a:masterClrMapping/>
@@ -779,10 +747,6 @@
           <a:bodyPr/>
           <a:lstStyle/>
           <a:p>
-            <a:r>
-              <a:rPr lang="en-US" dirty="0"/>
-              <a:t/>
-            </a:r>
             <a:endParaRPr lang="en-US" dirty="0"/>
           </a:p>
         </p:txBody>
@@ -804,18 +768,12 @@
           <a:p>
             <a:fld id="{F7021451-1387-4CA6-816F-3879F97B5CBC}" type="slidenum">
               <a:rPr lang="en-US"/>
-              <a:t>12</a:t>
             </a:fld>
             <a:endParaRPr lang="en-US"/>
           </a:p>
         </p:txBody>
       </p:sp>
     </p:spTree>
-    <p:extLst>
-      <p:ext uri="{BB962C8B-B14F-4D97-AF65-F5344CB8AC3E}">
-        <p14:creationId xmlns:p14="http://schemas.microsoft.com/office/powerpoint/2010/main" val="1024086991"/>
-      </p:ext>
-    </p:extLst>
   </p:cSld>
   <p:clrMapOvr>
     <a:masterClrMapping/>
@@ -867,10 +825,6 @@
           <a:bodyPr/>
           <a:lstStyle/>
           <a:p>
-            <a:r>
-              <a:rPr lang="en-US" dirty="0"/>
-              <a:t/>
-            </a:r>
             <a:endParaRPr lang="en-US" dirty="0"/>
           </a:p>
         </p:txBody>
@@ -892,18 +846,12 @@
           <a:p>
             <a:fld id="{F7021451-1387-4CA6-816F-3879F97B5CBC}" type="slidenum">
               <a:rPr lang="en-US"/>
-              <a:t>13</a:t>
             </a:fld>
             <a:endParaRPr lang="en-US"/>
           </a:p>
         </p:txBody>
       </p:sp>
     </p:spTree>
-    <p:extLst>
-      <p:ext uri="{BB962C8B-B14F-4D97-AF65-F5344CB8AC3E}">
-        <p14:creationId xmlns:p14="http://schemas.microsoft.com/office/powerpoint/2010/main" val="1024086991"/>
-      </p:ext>
-    </p:extLst>
   </p:cSld>
   <p:clrMapOvr>
     <a:masterClrMapping/>
@@ -955,10 +903,6 @@
           <a:bodyPr/>
           <a:lstStyle/>
           <a:p>
-            <a:r>
-              <a:rPr lang="en-US" dirty="0"/>
-              <a:t/>
-            </a:r>
             <a:endParaRPr lang="en-US" dirty="0"/>
           </a:p>
         </p:txBody>
@@ -980,18 +924,12 @@
           <a:p>
             <a:fld id="{F7021451-1387-4CA6-816F-3879F97B5CBC}" type="slidenum">
               <a:rPr lang="en-US"/>
-              <a:t>14</a:t>
             </a:fld>
             <a:endParaRPr lang="en-US"/>
           </a:p>
         </p:txBody>
       </p:sp>
     </p:spTree>
-    <p:extLst>
-      <p:ext uri="{BB962C8B-B14F-4D97-AF65-F5344CB8AC3E}">
-        <p14:creationId xmlns:p14="http://schemas.microsoft.com/office/powerpoint/2010/main" val="1024086991"/>
-      </p:ext>
-    </p:extLst>
   </p:cSld>
   <p:clrMapOvr>
     <a:masterClrMapping/>
@@ -1043,10 +981,6 @@
           <a:bodyPr/>
           <a:lstStyle/>
           <a:p>
-            <a:r>
-              <a:rPr lang="en-US" dirty="0"/>
-              <a:t/>
-            </a:r>
             <a:endParaRPr lang="en-US" dirty="0"/>
           </a:p>
         </p:txBody>
@@ -1068,18 +1002,12 @@
           <a:p>
             <a:fld id="{F7021451-1387-4CA6-816F-3879F97B5CBC}" type="slidenum">
               <a:rPr lang="en-US"/>
-              <a:t>15</a:t>
             </a:fld>
             <a:endParaRPr lang="en-US"/>
           </a:p>
         </p:txBody>
       </p:sp>
     </p:spTree>
-    <p:extLst>
-      <p:ext uri="{BB962C8B-B14F-4D97-AF65-F5344CB8AC3E}">
-        <p14:creationId xmlns:p14="http://schemas.microsoft.com/office/powerpoint/2010/main" val="1024086991"/>
-      </p:ext>
-    </p:extLst>
   </p:cSld>
   <p:clrMapOvr>
     <a:masterClrMapping/>
@@ -1131,10 +1059,6 @@
           <a:bodyPr/>
           <a:lstStyle/>
           <a:p>
-            <a:r>
-              <a:rPr lang="en-US" dirty="0"/>
-              <a:t/>
-            </a:r>
             <a:endParaRPr lang="en-US" dirty="0"/>
           </a:p>
         </p:txBody>
@@ -1156,18 +1080,12 @@
           <a:p>
             <a:fld id="{F7021451-1387-4CA6-816F-3879F97B5CBC}" type="slidenum">
               <a:rPr lang="en-US"/>
-              <a:t>16</a:t>
             </a:fld>
             <a:endParaRPr lang="en-US"/>
           </a:p>
         </p:txBody>
       </p:sp>
     </p:spTree>
-    <p:extLst>
-      <p:ext uri="{BB962C8B-B14F-4D97-AF65-F5344CB8AC3E}">
-        <p14:creationId xmlns:p14="http://schemas.microsoft.com/office/powerpoint/2010/main" val="1024086991"/>
-      </p:ext>
-    </p:extLst>
   </p:cSld>
   <p:clrMapOvr>
     <a:masterClrMapping/>
@@ -1219,10 +1137,6 @@
           <a:bodyPr/>
           <a:lstStyle/>
           <a:p>
-            <a:r>
-              <a:rPr lang="en-US" dirty="0"/>
-              <a:t/>
-            </a:r>
             <a:endParaRPr lang="en-US" dirty="0"/>
           </a:p>
         </p:txBody>
@@ -1244,18 +1158,12 @@
           <a:p>
             <a:fld id="{F7021451-1387-4CA6-816F-3879F97B5CBC}" type="slidenum">
               <a:rPr lang="en-US"/>
-              <a:t>2</a:t>
             </a:fld>
             <a:endParaRPr lang="en-US"/>
           </a:p>
         </p:txBody>
       </p:sp>
     </p:spTree>
-    <p:extLst>
-      <p:ext uri="{BB962C8B-B14F-4D97-AF65-F5344CB8AC3E}">
-        <p14:creationId xmlns:p14="http://schemas.microsoft.com/office/powerpoint/2010/main" val="1024086991"/>
-      </p:ext>
-    </p:extLst>
   </p:cSld>
   <p:clrMapOvr>
     <a:masterClrMapping/>
@@ -1307,10 +1215,6 @@
           <a:bodyPr/>
           <a:lstStyle/>
           <a:p>
-            <a:r>
-              <a:rPr lang="en-US" dirty="0"/>
-              <a:t/>
-            </a:r>
             <a:endParaRPr lang="en-US" dirty="0"/>
           </a:p>
         </p:txBody>
@@ -1332,18 +1236,12 @@
           <a:p>
             <a:fld id="{F7021451-1387-4CA6-816F-3879F97B5CBC}" type="slidenum">
               <a:rPr lang="en-US"/>
-              <a:t>3</a:t>
             </a:fld>
             <a:endParaRPr lang="en-US"/>
           </a:p>
         </p:txBody>
       </p:sp>
     </p:spTree>
-    <p:extLst>
-      <p:ext uri="{BB962C8B-B14F-4D97-AF65-F5344CB8AC3E}">
-        <p14:creationId xmlns:p14="http://schemas.microsoft.com/office/powerpoint/2010/main" val="1024086991"/>
-      </p:ext>
-    </p:extLst>
   </p:cSld>
   <p:clrMapOvr>
     <a:masterClrMapping/>
@@ -1395,10 +1293,6 @@
           <a:bodyPr/>
           <a:lstStyle/>
           <a:p>
-            <a:r>
-              <a:rPr lang="en-US" dirty="0"/>
-              <a:t/>
-            </a:r>
             <a:endParaRPr lang="en-US" dirty="0"/>
           </a:p>
         </p:txBody>
@@ -1420,18 +1314,12 @@
           <a:p>
             <a:fld id="{F7021451-1387-4CA6-816F-3879F97B5CBC}" type="slidenum">
               <a:rPr lang="en-US"/>
-              <a:t>4</a:t>
             </a:fld>
             <a:endParaRPr lang="en-US"/>
           </a:p>
         </p:txBody>
       </p:sp>
     </p:spTree>
-    <p:extLst>
-      <p:ext uri="{BB962C8B-B14F-4D97-AF65-F5344CB8AC3E}">
-        <p14:creationId xmlns:p14="http://schemas.microsoft.com/office/powerpoint/2010/main" val="1024086991"/>
-      </p:ext>
-    </p:extLst>
   </p:cSld>
   <p:clrMapOvr>
     <a:masterClrMapping/>
@@ -1483,10 +1371,6 @@
           <a:bodyPr/>
           <a:lstStyle/>
           <a:p>
-            <a:r>
-              <a:rPr lang="en-US" dirty="0"/>
-              <a:t/>
-            </a:r>
             <a:endParaRPr lang="en-US" dirty="0"/>
           </a:p>
         </p:txBody>
@@ -1508,18 +1392,12 @@
           <a:p>
             <a:fld id="{F7021451-1387-4CA6-816F-3879F97B5CBC}" type="slidenum">
               <a:rPr lang="en-US"/>
-              <a:t>5</a:t>
             </a:fld>
             <a:endParaRPr lang="en-US"/>
           </a:p>
         </p:txBody>
       </p:sp>
     </p:spTree>
-    <p:extLst>
-      <p:ext uri="{BB962C8B-B14F-4D97-AF65-F5344CB8AC3E}">
-        <p14:creationId xmlns:p14="http://schemas.microsoft.com/office/powerpoint/2010/main" val="1024086991"/>
-      </p:ext>
-    </p:extLst>
   </p:cSld>
   <p:clrMapOvr>
     <a:masterClrMapping/>
@@ -1571,10 +1449,6 @@
           <a:bodyPr/>
           <a:lstStyle/>
           <a:p>
-            <a:r>
-              <a:rPr lang="en-US" dirty="0"/>
-              <a:t/>
-            </a:r>
             <a:endParaRPr lang="en-US" dirty="0"/>
           </a:p>
         </p:txBody>
@@ -1596,18 +1470,12 @@
           <a:p>
             <a:fld id="{F7021451-1387-4CA6-816F-3879F97B5CBC}" type="slidenum">
               <a:rPr lang="en-US"/>
-              <a:t>6</a:t>
             </a:fld>
             <a:endParaRPr lang="en-US"/>
           </a:p>
         </p:txBody>
       </p:sp>
     </p:spTree>
-    <p:extLst>
-      <p:ext uri="{BB962C8B-B14F-4D97-AF65-F5344CB8AC3E}">
-        <p14:creationId xmlns:p14="http://schemas.microsoft.com/office/powerpoint/2010/main" val="1024086991"/>
-      </p:ext>
-    </p:extLst>
   </p:cSld>
   <p:clrMapOvr>
     <a:masterClrMapping/>
@@ -1659,10 +1527,6 @@
           <a:bodyPr/>
           <a:lstStyle/>
           <a:p>
-            <a:r>
-              <a:rPr lang="en-US" dirty="0"/>
-              <a:t/>
-            </a:r>
             <a:endParaRPr lang="en-US" dirty="0"/>
           </a:p>
         </p:txBody>
@@ -1684,18 +1548,12 @@
           <a:p>
             <a:fld id="{F7021451-1387-4CA6-816F-3879F97B5CBC}" type="slidenum">
               <a:rPr lang="en-US"/>
-              <a:t>7</a:t>
             </a:fld>
             <a:endParaRPr lang="en-US"/>
           </a:p>
         </p:txBody>
       </p:sp>
     </p:spTree>
-    <p:extLst>
-      <p:ext uri="{BB962C8B-B14F-4D97-AF65-F5344CB8AC3E}">
-        <p14:creationId xmlns:p14="http://schemas.microsoft.com/office/powerpoint/2010/main" val="1024086991"/>
-      </p:ext>
-    </p:extLst>
   </p:cSld>
   <p:clrMapOvr>
     <a:masterClrMapping/>
@@ -1747,10 +1605,6 @@
           <a:bodyPr/>
           <a:lstStyle/>
           <a:p>
-            <a:r>
-              <a:rPr lang="en-US" dirty="0"/>
-              <a:t/>
-            </a:r>
             <a:endParaRPr lang="en-US" dirty="0"/>
           </a:p>
         </p:txBody>
@@ -1772,18 +1626,12 @@
           <a:p>
             <a:fld id="{F7021451-1387-4CA6-816F-3879F97B5CBC}" type="slidenum">
               <a:rPr lang="en-US"/>
-              <a:t>8</a:t>
             </a:fld>
             <a:endParaRPr lang="en-US"/>
           </a:p>
         </p:txBody>
       </p:sp>
     </p:spTree>
-    <p:extLst>
-      <p:ext uri="{BB962C8B-B14F-4D97-AF65-F5344CB8AC3E}">
-        <p14:creationId xmlns:p14="http://schemas.microsoft.com/office/powerpoint/2010/main" val="1024086991"/>
-      </p:ext>
-    </p:extLst>
   </p:cSld>
   <p:clrMapOvr>
     <a:masterClrMapping/>
@@ -1835,10 +1683,6 @@
           <a:bodyPr/>
           <a:lstStyle/>
           <a:p>
-            <a:r>
-              <a:rPr lang="en-US" dirty="0"/>
-              <a:t/>
-            </a:r>
             <a:endParaRPr lang="en-US" dirty="0"/>
           </a:p>
         </p:txBody>
@@ -1860,18 +1704,12 @@
           <a:p>
             <a:fld id="{F7021451-1387-4CA6-816F-3879F97B5CBC}" type="slidenum">
               <a:rPr lang="en-US"/>
-              <a:t>9</a:t>
             </a:fld>
             <a:endParaRPr lang="en-US"/>
           </a:p>
         </p:txBody>
       </p:sp>
     </p:spTree>
-    <p:extLst>
-      <p:ext uri="{BB962C8B-B14F-4D97-AF65-F5344CB8AC3E}">
-        <p14:creationId xmlns:p14="http://schemas.microsoft.com/office/powerpoint/2010/main" val="1024086991"/>
-      </p:ext>
-    </p:extLst>
   </p:cSld>
   <p:clrMapOvr>
     <a:masterClrMapping/>
@@ -1912,6 +1750,11 @@
 <file path=ppt/slideMasters/slideMaster1.xml><?xml version="1.0" encoding="utf-8"?>
 <p:sldMaster xmlns:a="http://schemas.openxmlformats.org/drawingml/2006/main" xmlns:r="http://schemas.openxmlformats.org/officeDocument/2006/relationships" xmlns:p="http://schemas.openxmlformats.org/presentationml/2006/main">
   <p:cSld>
+    <p:bg>
+      <p:bgRef idx="1001">
+        <a:schemeClr val="bg1"/>
+      </p:bgRef>
+    </p:bg>
     <p:spTree>
       <p:nvGrpSpPr>
         <p:cNvPr id="1" name=""/>
@@ -1955,7 +1798,7 @@
         <a:spcBef>
           <a:spcPct val="20000"/>
         </a:spcBef>
-        <a:buFont typeface="Arial" pitchFamily="34" charset="0"/>
+        <a:buFont typeface="Arial" panose="020B0604020202020204" pitchFamily="34" charset="0"/>
         <a:buChar char="•"/>
         <a:defRPr sz="3200" kern="1200">
           <a:solidFill>
@@ -1970,7 +1813,7 @@
         <a:spcBef>
           <a:spcPct val="20000"/>
         </a:spcBef>
-        <a:buFont typeface="Arial" pitchFamily="34" charset="0"/>
+        <a:buFont typeface="Arial" panose="020B0604020202020204" pitchFamily="34" charset="0"/>
         <a:buChar char="–"/>
         <a:defRPr sz="2800" kern="1200">
           <a:solidFill>
@@ -1985,7 +1828,7 @@
         <a:spcBef>
           <a:spcPct val="20000"/>
         </a:spcBef>
-        <a:buFont typeface="Arial" pitchFamily="34" charset="0"/>
+        <a:buFont typeface="Arial" panose="020B0604020202020204" pitchFamily="34" charset="0"/>
         <a:buChar char="•"/>
         <a:defRPr sz="2400" kern="1200">
           <a:solidFill>
@@ -2000,7 +1843,7 @@
         <a:spcBef>
           <a:spcPct val="20000"/>
         </a:spcBef>
-        <a:buFont typeface="Arial" pitchFamily="34" charset="0"/>
+        <a:buFont typeface="Arial" panose="020B0604020202020204" pitchFamily="34" charset="0"/>
         <a:buChar char="–"/>
         <a:defRPr sz="2000" kern="1200">
           <a:solidFill>
@@ -2015,7 +1858,7 @@
         <a:spcBef>
           <a:spcPct val="20000"/>
         </a:spcBef>
-        <a:buFont typeface="Arial" pitchFamily="34" charset="0"/>
+        <a:buFont typeface="Arial" panose="020B0604020202020204" pitchFamily="34" charset="0"/>
         <a:buChar char="»"/>
         <a:defRPr sz="2000" kern="1200">
           <a:solidFill>
@@ -2030,7 +1873,7 @@
         <a:spcBef>
           <a:spcPct val="20000"/>
         </a:spcBef>
-        <a:buFont typeface="Arial" pitchFamily="34" charset="0"/>
+        <a:buFont typeface="Arial" panose="020B0604020202020204" pitchFamily="34" charset="0"/>
         <a:buChar char="•"/>
         <a:defRPr sz="2000" kern="1200">
           <a:solidFill>
@@ -2045,7 +1888,7 @@
         <a:spcBef>
           <a:spcPct val="20000"/>
         </a:spcBef>
-        <a:buFont typeface="Arial" pitchFamily="34" charset="0"/>
+        <a:buFont typeface="Arial" panose="020B0604020202020204" pitchFamily="34" charset="0"/>
         <a:buChar char="•"/>
         <a:defRPr sz="2000" kern="1200">
           <a:solidFill>
@@ -2060,7 +1903,7 @@
         <a:spcBef>
           <a:spcPct val="20000"/>
         </a:spcBef>
-        <a:buFont typeface="Arial" pitchFamily="34" charset="0"/>
+        <a:buFont typeface="Arial" panose="020B0604020202020204" pitchFamily="34" charset="0"/>
         <a:buChar char="•"/>
         <a:defRPr sz="2000" kern="1200">
           <a:solidFill>
@@ -2075,7 +1918,7 @@
         <a:spcBef>
           <a:spcPct val="20000"/>
         </a:spcBef>
-        <a:buFont typeface="Arial" pitchFamily="34" charset="0"/>
+        <a:buFont typeface="Arial" panose="020B0604020202020204" pitchFamily="34" charset="0"/>
         <a:buChar char="•"/>
         <a:defRPr sz="2000" kern="1200">
           <a:solidFill>
@@ -2188,7 +2031,7 @@
 
 <file path=ppt/slides/slide1.xml><?xml version="1.0" encoding="utf-8"?>
 <p:sld xmlns:a="http://schemas.openxmlformats.org/drawingml/2006/main" xmlns:r="http://schemas.openxmlformats.org/officeDocument/2006/relationships" xmlns:p="http://schemas.openxmlformats.org/presentationml/2006/main">
-  <p:cSld name="Slide 1">
+  <p:cSld>
     <p:bg>
       <p:bgPr>
         <a:blipFill dpi="0" rotWithShape="1">
@@ -2232,13 +2075,12 @@
             <a:avLst/>
           </a:prstGeom>
           <a:noFill/>
-          <a:ln/>
         </p:spPr>
         <p:txBody>
           <a:bodyPr wrap="square" rtlCol="0" anchor="ctr"/>
           <a:lstStyle/>
           <a:p>
-            <a:pPr algn="r" indent="0" marL="0">
+            <a:pPr marL="0" indent="0" algn="r">
               <a:buNone/>
             </a:pPr>
             <a:r>
@@ -2246,9 +2088,9 @@
                 <a:solidFill>
                   <a:srgbClr val="8A9099"/>
                 </a:solidFill>
-                <a:latin typeface="微软雅黑" pitchFamily="34" charset="0"/>
-                <a:ea typeface="微软雅黑" pitchFamily="34" charset="-122"/>
-                <a:cs typeface="微软雅黑" pitchFamily="34" charset="-120"/>
+                <a:latin typeface="微软雅黑" panose="020B0503020204020204" pitchFamily="34" charset="-122"/>
+                <a:ea typeface="微软雅黑" panose="020B0503020204020204" pitchFamily="34" charset="-122"/>
+                <a:cs typeface="微软雅黑" panose="020B0503020204020204" pitchFamily="34" charset="-120"/>
               </a:rPr>
               <a:t>1 / 16</a:t>
             </a:r>
@@ -2271,13 +2113,12 @@
             <a:avLst/>
           </a:prstGeom>
           <a:noFill/>
-          <a:ln/>
         </p:spPr>
         <p:txBody>
           <a:bodyPr wrap="square" rtlCol="0" anchor="ctr"/>
           <a:lstStyle/>
           <a:p>
-            <a:pPr algn="ctr" indent="0" marL="0">
+            <a:pPr marL="0" indent="0" algn="ctr">
               <a:buNone/>
             </a:pPr>
             <a:r>
@@ -2285,9 +2126,9 @@
                 <a:solidFill>
                   <a:srgbClr val="1F4E9C"/>
                 </a:solidFill>
-                <a:latin typeface="微软雅黑" pitchFamily="34" charset="0"/>
-                <a:ea typeface="微软雅黑" pitchFamily="34" charset="-122"/>
-                <a:cs typeface="微软雅黑" pitchFamily="34" charset="-120"/>
+                <a:latin typeface="微软雅黑" panose="020B0503020204020204" pitchFamily="34" charset="-122"/>
+                <a:ea typeface="微软雅黑" panose="020B0503020204020204" pitchFamily="34" charset="-122"/>
+                <a:cs typeface="微软雅黑" panose="020B0503020204020204" pitchFamily="34" charset="-120"/>
               </a:rPr>
               <a:t>重邮802 数据结构代码课程</a:t>
             </a:r>
@@ -2310,13 +2151,12 @@
             <a:avLst/>
           </a:prstGeom>
           <a:noFill/>
-          <a:ln/>
         </p:spPr>
         <p:txBody>
           <a:bodyPr wrap="square" rtlCol="0" anchor="ctr"/>
           <a:lstStyle/>
           <a:p>
-            <a:pPr algn="ctr" indent="0" marL="0">
+            <a:pPr marL="0" indent="0" algn="ctr">
               <a:buNone/>
             </a:pPr>
             <a:r>
@@ -2324,9 +2164,9 @@
                 <a:solidFill>
                   <a:srgbClr val="1F2329"/>
                 </a:solidFill>
-                <a:latin typeface="微软雅黑" pitchFamily="34" charset="0"/>
-                <a:ea typeface="微软雅黑" pitchFamily="34" charset="-122"/>
-                <a:cs typeface="微软雅黑" pitchFamily="34" charset="-120"/>
+                <a:latin typeface="微软雅黑" panose="020B0503020204020204" pitchFamily="34" charset="-122"/>
+                <a:ea typeface="微软雅黑" panose="020B0503020204020204" pitchFamily="34" charset="-122"/>
+                <a:cs typeface="微软雅黑" panose="020B0503020204020204" pitchFamily="34" charset="-120"/>
               </a:rPr>
               <a:t>数据结构基础阶段</a:t>
             </a:r>
@@ -2349,13 +2189,12 @@
             <a:avLst/>
           </a:prstGeom>
           <a:noFill/>
-          <a:ln/>
         </p:spPr>
         <p:txBody>
           <a:bodyPr wrap="square" rtlCol="0" anchor="ctr"/>
           <a:lstStyle/>
           <a:p>
-            <a:pPr algn="ctr" indent="0" marL="0">
+            <a:pPr marL="0" indent="0" algn="ctr">
               <a:buNone/>
             </a:pPr>
             <a:r>
@@ -2363,9 +2202,9 @@
                 <a:solidFill>
                   <a:srgbClr val="1F2329"/>
                 </a:solidFill>
-                <a:latin typeface="微软雅黑" pitchFamily="34" charset="0"/>
-                <a:ea typeface="微软雅黑" pitchFamily="34" charset="-122"/>
-                <a:cs typeface="微软雅黑" pitchFamily="34" charset="-120"/>
+                <a:latin typeface="微软雅黑" panose="020B0503020204020204" pitchFamily="34" charset="-122"/>
+                <a:ea typeface="微软雅黑" panose="020B0503020204020204" pitchFamily="34" charset="-122"/>
+                <a:cs typeface="微软雅黑" panose="020B0503020204020204" pitchFamily="34" charset="-120"/>
               </a:rPr>
               <a:t>第5节 栈与队列</a:t>
             </a:r>
@@ -2388,13 +2227,12 @@
             <a:avLst/>
           </a:prstGeom>
           <a:noFill/>
-          <a:ln/>
         </p:spPr>
         <p:txBody>
           <a:bodyPr wrap="square" rtlCol="0" anchor="ctr"/>
           <a:lstStyle/>
           <a:p>
-            <a:pPr algn="ctr" indent="0" marL="0">
+            <a:pPr marL="0" indent="0" algn="ctr">
               <a:buNone/>
             </a:pPr>
             <a:r>
@@ -2402,9 +2240,9 @@
                 <a:solidFill>
                   <a:srgbClr val="8A9099"/>
                 </a:solidFill>
-                <a:latin typeface="微软雅黑" pitchFamily="34" charset="0"/>
-                <a:ea typeface="微软雅黑" pitchFamily="34" charset="-122"/>
-                <a:cs typeface="微软雅黑" pitchFamily="34" charset="-120"/>
+                <a:latin typeface="微软雅黑" panose="020B0503020204020204" pitchFamily="34" charset="-122"/>
+                <a:ea typeface="微软雅黑" panose="020B0503020204020204" pitchFamily="34" charset="-122"/>
+                <a:cs typeface="微软雅黑" panose="020B0503020204020204" pitchFamily="34" charset="-120"/>
               </a:rPr>
               <a:t>阶段：基础 ｜ 主讲：牙膏学长 ｜ 预计40分钟 ｜ 资料答疑：伴梦研途QQ群</a:t>
             </a:r>
@@ -2422,7 +2260,7 @@
 
 <file path=ppt/slides/slide10.xml><?xml version="1.0" encoding="utf-8"?>
 <p:sld xmlns:a="http://schemas.openxmlformats.org/drawingml/2006/main" xmlns:r="http://schemas.openxmlformats.org/officeDocument/2006/relationships" xmlns:p="http://schemas.openxmlformats.org/presentationml/2006/main">
-  <p:cSld name="Slide 10">
+  <p:cSld>
     <p:bg>
       <p:bgPr>
         <a:blipFill dpi="0" rotWithShape="1">
@@ -2466,13 +2304,12 @@
             <a:avLst/>
           </a:prstGeom>
           <a:noFill/>
-          <a:ln/>
         </p:spPr>
         <p:txBody>
           <a:bodyPr wrap="square" rtlCol="0" anchor="ctr"/>
           <a:lstStyle/>
           <a:p>
-            <a:pPr algn="r" indent="0" marL="0">
+            <a:pPr marL="0" indent="0" algn="r">
               <a:buNone/>
             </a:pPr>
             <a:r>
@@ -2480,9 +2317,9 @@
                 <a:solidFill>
                   <a:srgbClr val="8A9099"/>
                 </a:solidFill>
-                <a:latin typeface="微软雅黑" pitchFamily="34" charset="0"/>
-                <a:ea typeface="微软雅黑" pitchFamily="34" charset="-122"/>
-                <a:cs typeface="微软雅黑" pitchFamily="34" charset="-120"/>
+                <a:latin typeface="微软雅黑" panose="020B0503020204020204" pitchFamily="34" charset="-122"/>
+                <a:ea typeface="微软雅黑" panose="020B0503020204020204" pitchFamily="34" charset="-122"/>
+                <a:cs typeface="微软雅黑" panose="020B0503020204020204" pitchFamily="34" charset="-120"/>
               </a:rPr>
               <a:t>10 / 16</a:t>
             </a:r>
@@ -2505,13 +2342,12 @@
             <a:avLst/>
           </a:prstGeom>
           <a:noFill/>
-          <a:ln/>
         </p:spPr>
         <p:txBody>
           <a:bodyPr wrap="square" rtlCol="0" anchor="ctr"/>
           <a:lstStyle/>
           <a:p>
-            <a:pPr algn="l" indent="0" marL="0">
+            <a:pPr marL="0" indent="0" algn="l">
               <a:buNone/>
             </a:pPr>
             <a:r>
@@ -2519,9 +2355,9 @@
                 <a:solidFill>
                   <a:srgbClr val="1F4E9C"/>
                 </a:solidFill>
-                <a:latin typeface="微软雅黑" pitchFamily="34" charset="0"/>
-                <a:ea typeface="微软雅黑" pitchFamily="34" charset="-122"/>
-                <a:cs typeface="微软雅黑" pitchFamily="34" charset="-120"/>
+                <a:latin typeface="微软雅黑" panose="020B0503020204020204" pitchFamily="34" charset="-122"/>
+                <a:ea typeface="微软雅黑" panose="020B0503020204020204" pitchFamily="34" charset="-122"/>
+                <a:cs typeface="微软雅黑" panose="020B0503020204020204" pitchFamily="34" charset="-120"/>
               </a:rPr>
               <a:t>循环队列 · 入队出队</a:t>
             </a:r>
@@ -2544,13 +2380,12 @@
             <a:avLst/>
           </a:prstGeom>
           <a:noFill/>
-          <a:ln/>
         </p:spPr>
         <p:txBody>
           <a:bodyPr wrap="square" rtlCol="0" anchor="ctr"/>
           <a:lstStyle/>
           <a:p>
-            <a:pPr algn="l" indent="0" marL="0">
+            <a:pPr marL="0" indent="0" algn="l">
               <a:buNone/>
             </a:pPr>
             <a:r>
@@ -2558,9 +2393,9 @@
                 <a:solidFill>
                   <a:srgbClr val="1F2329"/>
                 </a:solidFill>
-                <a:latin typeface="微软雅黑" pitchFamily="34" charset="0"/>
-                <a:ea typeface="微软雅黑" pitchFamily="34" charset="-122"/>
-                <a:cs typeface="微软雅黑" pitchFamily="34" charset="-120"/>
+                <a:latin typeface="微软雅黑" panose="020B0503020204020204" pitchFamily="34" charset="-122"/>
+                <a:ea typeface="微软雅黑" panose="020B0503020204020204" pitchFamily="34" charset="-122"/>
+                <a:cs typeface="微软雅黑" panose="020B0503020204020204" pitchFamily="34" charset="-120"/>
               </a:rPr>
               <a:t>EnQueue 与 DeQueue：先判满、再操作、取模移动</a:t>
             </a:r>
@@ -2585,7 +2420,6 @@
           <a:solidFill>
             <a:srgbClr val="F7F9FC"/>
           </a:solidFill>
-          <a:ln/>
         </p:spPr>
       </p:sp>
       <p:sp>
@@ -2605,7 +2439,6 @@
           <a:solidFill>
             <a:srgbClr val="1F4E9C"/>
           </a:solidFill>
-          <a:ln/>
         </p:spPr>
       </p:sp>
       <p:sp>
@@ -2623,13 +2456,12 @@
             <a:avLst/>
           </a:prstGeom>
           <a:noFill/>
-          <a:ln/>
         </p:spPr>
         <p:txBody>
           <a:bodyPr wrap="square" rtlCol="0" anchor="t"/>
           <a:lstStyle/>
           <a:p>
-            <a:pPr algn="l" indent="0" marL="0">
+            <a:pPr marL="0" indent="0" algn="l">
               <a:lnSpc>
                 <a:spcPct val="125000"/>
               </a:lnSpc>
@@ -2640,9 +2472,9 @@
                 <a:solidFill>
                   <a:srgbClr val="1F2329"/>
                 </a:solidFill>
-                <a:latin typeface="Consolas" pitchFamily="34" charset="0"/>
-                <a:ea typeface="Consolas" pitchFamily="34" charset="-122"/>
-                <a:cs typeface="Consolas" pitchFamily="34" charset="-120"/>
+                <a:latin typeface="Consolas" panose="020B0609020204030204" pitchFamily="34" charset="0"/>
+                <a:ea typeface="Consolas" panose="020B0609020204030204" pitchFamily="34" charset="-122"/>
+                <a:cs typeface="Consolas" panose="020B0609020204030204" pitchFamily="34" charset="-120"/>
               </a:rPr>
               <a:t>bool EnQueue(SqQueue &amp;Q, int elem){
     if((Q.rear+1)%MaxSize == Q.front) return false;         // 判满
@@ -2673,13 +2505,12 @@
             <a:avLst/>
           </a:prstGeom>
           <a:noFill/>
-          <a:ln/>
         </p:spPr>
         <p:txBody>
           <a:bodyPr wrap="square" rtlCol="0" anchor="t"/>
           <a:lstStyle/>
           <a:p>
-            <a:pPr algn="l" indent="0" marL="0">
+            <a:pPr marL="0" indent="0" algn="l">
               <a:buNone/>
             </a:pPr>
             <a:r>
@@ -2687,9 +2518,9 @@
                 <a:solidFill>
                   <a:srgbClr val="8A9099"/>
                 </a:solidFill>
-                <a:latin typeface="微软雅黑" pitchFamily="34" charset="0"/>
-                <a:ea typeface="微软雅黑" pitchFamily="34" charset="-122"/>
-                <a:cs typeface="微软雅黑" pitchFamily="34" charset="-120"/>
+                <a:latin typeface="微软雅黑" panose="020B0503020204020204" pitchFamily="34" charset="-122"/>
+                <a:ea typeface="微软雅黑" panose="020B0503020204020204" pitchFamily="34" charset="-122"/>
+                <a:cs typeface="微软雅黑" panose="020B0503020204020204" pitchFamily="34" charset="-120"/>
               </a:rPr>
               <a:t>入队 rear 指的是下一个空位，所以先放再移；出队 front 指的是队头元素，所以先取再移；移动都要 % MaxSize 才能绕回</a:t>
             </a:r>
@@ -2707,7 +2538,7 @@
 
 <file path=ppt/slides/slide11.xml><?xml version="1.0" encoding="utf-8"?>
 <p:sld xmlns:a="http://schemas.openxmlformats.org/drawingml/2006/main" xmlns:r="http://schemas.openxmlformats.org/officeDocument/2006/relationships" xmlns:p="http://schemas.openxmlformats.org/presentationml/2006/main">
-  <p:cSld name="Slide 11">
+  <p:cSld>
     <p:bg>
       <p:bgPr>
         <a:blipFill dpi="0" rotWithShape="1">
@@ -2751,13 +2582,12 @@
             <a:avLst/>
           </a:prstGeom>
           <a:noFill/>
-          <a:ln/>
         </p:spPr>
         <p:txBody>
           <a:bodyPr wrap="square" rtlCol="0" anchor="ctr"/>
           <a:lstStyle/>
           <a:p>
-            <a:pPr algn="r" indent="0" marL="0">
+            <a:pPr marL="0" indent="0" algn="r">
               <a:buNone/>
             </a:pPr>
             <a:r>
@@ -2765,9 +2595,9 @@
                 <a:solidFill>
                   <a:srgbClr val="8A9099"/>
                 </a:solidFill>
-                <a:latin typeface="微软雅黑" pitchFamily="34" charset="0"/>
-                <a:ea typeface="微软雅黑" pitchFamily="34" charset="-122"/>
-                <a:cs typeface="微软雅黑" pitchFamily="34" charset="-120"/>
+                <a:latin typeface="微软雅黑" panose="020B0503020204020204" pitchFamily="34" charset="-122"/>
+                <a:ea typeface="微软雅黑" panose="020B0503020204020204" pitchFamily="34" charset="-122"/>
+                <a:cs typeface="微软雅黑" panose="020B0503020204020204" pitchFamily="34" charset="-120"/>
               </a:rPr>
               <a:t>11 / 16</a:t>
             </a:r>
@@ -2790,13 +2620,12 @@
             <a:avLst/>
           </a:prstGeom>
           <a:noFill/>
-          <a:ln/>
         </p:spPr>
         <p:txBody>
           <a:bodyPr wrap="square" rtlCol="0" anchor="ctr"/>
           <a:lstStyle/>
           <a:p>
-            <a:pPr algn="l" indent="0" marL="0">
+            <a:pPr marL="0" indent="0" algn="l">
               <a:buNone/>
             </a:pPr>
             <a:r>
@@ -2804,9 +2633,9 @@
                 <a:solidFill>
                   <a:srgbClr val="1F4E9C"/>
                 </a:solidFill>
-                <a:latin typeface="微软雅黑" pitchFamily="34" charset="0"/>
-                <a:ea typeface="微软雅黑" pitchFamily="34" charset="-122"/>
-                <a:cs typeface="微软雅黑" pitchFamily="34" charset="-120"/>
+                <a:latin typeface="微软雅黑" panose="020B0503020204020204" pitchFamily="34" charset="-122"/>
+                <a:ea typeface="微软雅黑" panose="020B0503020204020204" pitchFamily="34" charset="-122"/>
+                <a:cs typeface="微软雅黑" panose="020B0503020204020204" pitchFamily="34" charset="-120"/>
               </a:rPr>
               <a:t>链栈与链队</a:t>
             </a:r>
@@ -2829,13 +2658,12 @@
             <a:avLst/>
           </a:prstGeom>
           <a:noFill/>
-          <a:ln/>
         </p:spPr>
         <p:txBody>
           <a:bodyPr wrap="square" rtlCol="0" anchor="ctr"/>
           <a:lstStyle/>
           <a:p>
-            <a:pPr algn="l" indent="0" marL="0">
+            <a:pPr marL="0" indent="0" algn="l">
               <a:buNone/>
             </a:pPr>
             <a:r>
@@ -2843,9 +2671,9 @@
                 <a:solidFill>
                   <a:srgbClr val="1F2329"/>
                 </a:solidFill>
-                <a:latin typeface="微软雅黑" pitchFamily="34" charset="0"/>
-                <a:ea typeface="微软雅黑" pitchFamily="34" charset="-122"/>
-                <a:cs typeface="微软雅黑" pitchFamily="34" charset="-120"/>
+                <a:latin typeface="微软雅黑" panose="020B0503020204020204" pitchFamily="34" charset="-122"/>
+                <a:ea typeface="微软雅黑" panose="020B0503020204020204" pitchFamily="34" charset="-122"/>
+                <a:cs typeface="微软雅黑" panose="020B0503020204020204" pitchFamily="34" charset="-120"/>
               </a:rPr>
               <a:t>链栈、链队：用链表实现</a:t>
             </a:r>
@@ -2868,13 +2696,12 @@
             <a:avLst/>
           </a:prstGeom>
           <a:noFill/>
-          <a:ln/>
         </p:spPr>
         <p:txBody>
           <a:bodyPr wrap="square" rtlCol="0" anchor="t"/>
           <a:lstStyle/>
           <a:p>
-            <a:pPr algn="l" indent="0" marL="0">
+            <a:pPr marL="0" indent="0" algn="l">
               <a:lnSpc>
                 <a:spcPct val="115000"/>
               </a:lnSpc>
@@ -2885,25 +2712,68 @@
                 <a:solidFill>
                   <a:srgbClr val="1F4E9C"/>
                 </a:solidFill>
-                <a:latin typeface="微软雅黑" pitchFamily="34" charset="0"/>
-                <a:ea typeface="微软雅黑" pitchFamily="34" charset="-122"/>
-                <a:cs typeface="微软雅黑" pitchFamily="34" charset="-120"/>
+                <a:latin typeface="微软雅黑" panose="020B0503020204020204" pitchFamily="34" charset="-122"/>
+                <a:ea typeface="微软雅黑" panose="020B0503020204020204" pitchFamily="34" charset="-122"/>
+                <a:cs typeface="微软雅黑" panose="020B0503020204020204" pitchFamily="34" charset="-120"/>
               </a:rPr>
               <a:t>•  </a:t>
             </a:r>
-            <a:pPr algn="l" indent="0" marL="0">
+            <a:r>
+              <a:rPr lang="en-US" sz="1800" dirty="0">
+                <a:solidFill>
+                  <a:srgbClr val="000000"/>
+                </a:solidFill>
+              </a:rPr>
+              <a:t>链栈用单链表，栈顶就是表头：入栈等于头插，出栈等于删第一个结点</a:t>
+            </a:r>
+            <a:endParaRPr lang="en-US" sz="1800" dirty="0"/>
+          </a:p>
+        </p:txBody>
+      </p:sp>
+      <p:sp>
+        <p:nvSpPr>
+          <p:cNvPr id="6" name="Text 4"/>
+          <p:cNvSpPr/>
+          <p:nvPr/>
+        </p:nvSpPr>
+        <p:spPr>
+          <a:xfrm>
+            <a:off x="896112" y="2866644"/>
+            <a:ext cx="10454335" cy="740664"/>
+          </a:xfrm>
+          <a:prstGeom prst="rect">
+            <a:avLst/>
+          </a:prstGeom>
+          <a:noFill/>
+        </p:spPr>
+        <p:txBody>
+          <a:bodyPr wrap="square" rtlCol="0" anchor="t"/>
+          <a:lstStyle/>
+          <a:p>
+            <a:pPr marL="0" indent="0" algn="l">
               <a:lnSpc>
                 <a:spcPct val="115000"/>
               </a:lnSpc>
               <a:buNone/>
             </a:pPr>
             <a:r>
+              <a:rPr lang="en-US" sz="1800" b="1" dirty="0">
+                <a:solidFill>
+                  <a:srgbClr val="1F4E9C"/>
+                </a:solidFill>
+                <a:latin typeface="微软雅黑" panose="020B0503020204020204" pitchFamily="34" charset="-122"/>
+                <a:ea typeface="微软雅黑" panose="020B0503020204020204" pitchFamily="34" charset="-122"/>
+                <a:cs typeface="微软雅黑" panose="020B0503020204020204" pitchFamily="34" charset="-120"/>
+              </a:rPr>
+              <a:t>•  </a:t>
+            </a:r>
+            <a:r>
               <a:rPr lang="en-US" sz="1800" dirty="0">
                 <a:solidFill>
                   <a:srgbClr val="000000"/>
                 </a:solidFill>
               </a:rPr>
-              <a:t>链栈用单链表，栈顶就是表头：入栈等于头插，出栈等于删第一个结点</a:t>
+              <a:t>链栈不需要判满（内存够就能压），只需判空 L-&gt;next==NULL；这是它和顺序栈的一个区别</a:t>
             </a:r>
             <a:endParaRPr lang="en-US" sz="1800" dirty="0"/>
           </a:p>
@@ -2911,26 +2781,25 @@
       </p:sp>
       <p:sp>
         <p:nvSpPr>
-          <p:cNvPr id="6" name="Text 4"/>
-          <p:cNvSpPr/>
-          <p:nvPr/>
-        </p:nvSpPr>
-        <p:spPr>
-          <a:xfrm>
-            <a:off x="896112" y="2866644"/>
+          <p:cNvPr id="7" name="Text 5"/>
+          <p:cNvSpPr/>
+          <p:nvPr/>
+        </p:nvSpPr>
+        <p:spPr>
+          <a:xfrm>
+            <a:off x="896112" y="3680460"/>
             <a:ext cx="10454335" cy="740664"/>
           </a:xfrm>
           <a:prstGeom prst="rect">
             <a:avLst/>
           </a:prstGeom>
           <a:noFill/>
-          <a:ln/>
         </p:spPr>
         <p:txBody>
           <a:bodyPr wrap="square" rtlCol="0" anchor="t"/>
           <a:lstStyle/>
           <a:p>
-            <a:pPr algn="l" indent="0" marL="0">
+            <a:pPr marL="0" indent="0" algn="l">
               <a:lnSpc>
                 <a:spcPct val="115000"/>
               </a:lnSpc>
@@ -2941,74 +2810,12 @@
                 <a:solidFill>
                   <a:srgbClr val="1F4E9C"/>
                 </a:solidFill>
-                <a:latin typeface="微软雅黑" pitchFamily="34" charset="0"/>
-                <a:ea typeface="微软雅黑" pitchFamily="34" charset="-122"/>
-                <a:cs typeface="微软雅黑" pitchFamily="34" charset="-120"/>
+                <a:latin typeface="微软雅黑" panose="020B0503020204020204" pitchFamily="34" charset="-122"/>
+                <a:ea typeface="微软雅黑" panose="020B0503020204020204" pitchFamily="34" charset="-122"/>
+                <a:cs typeface="微软雅黑" panose="020B0503020204020204" pitchFamily="34" charset="-120"/>
               </a:rPr>
               <a:t>•  </a:t>
             </a:r>
-            <a:pPr algn="l" indent="0" marL="0">
-              <a:lnSpc>
-                <a:spcPct val="115000"/>
-              </a:lnSpc>
-              <a:buNone/>
-            </a:pPr>
-            <a:r>
-              <a:rPr lang="en-US" sz="1800" dirty="0">
-                <a:solidFill>
-                  <a:srgbClr val="000000"/>
-                </a:solidFill>
-              </a:rPr>
-              <a:t>链栈不需要判满（内存够就能压），只需判空 L-&gt;next==NULL；这是它和顺序栈的一个区别</a:t>
-            </a:r>
-            <a:endParaRPr lang="en-US" sz="1800" dirty="0"/>
-          </a:p>
-        </p:txBody>
-      </p:sp>
-      <p:sp>
-        <p:nvSpPr>
-          <p:cNvPr id="7" name="Text 5"/>
-          <p:cNvSpPr/>
-          <p:nvPr/>
-        </p:nvSpPr>
-        <p:spPr>
-          <a:xfrm>
-            <a:off x="896112" y="3680460"/>
-            <a:ext cx="10454335" cy="740664"/>
-          </a:xfrm>
-          <a:prstGeom prst="rect">
-            <a:avLst/>
-          </a:prstGeom>
-          <a:noFill/>
-          <a:ln/>
-        </p:spPr>
-        <p:txBody>
-          <a:bodyPr wrap="square" rtlCol="0" anchor="t"/>
-          <a:lstStyle/>
-          <a:p>
-            <a:pPr algn="l" indent="0" marL="0">
-              <a:lnSpc>
-                <a:spcPct val="115000"/>
-              </a:lnSpc>
-              <a:buNone/>
-            </a:pPr>
-            <a:r>
-              <a:rPr lang="en-US" sz="1800" b="1" dirty="0">
-                <a:solidFill>
-                  <a:srgbClr val="1F4E9C"/>
-                </a:solidFill>
-                <a:latin typeface="微软雅黑" pitchFamily="34" charset="0"/>
-                <a:ea typeface="微软雅黑" pitchFamily="34" charset="-122"/>
-                <a:cs typeface="微软雅黑" pitchFamily="34" charset="-120"/>
-              </a:rPr>
-              <a:t>•  </a:t>
-            </a:r>
-            <a:pPr algn="l" indent="0" marL="0">
-              <a:lnSpc>
-                <a:spcPct val="115000"/>
-              </a:lnSpc>
-              <a:buNone/>
-            </a:pPr>
             <a:r>
               <a:rPr lang="en-US" sz="1800" dirty="0">
                 <a:solidFill>
@@ -3036,13 +2843,12 @@
             <a:avLst/>
           </a:prstGeom>
           <a:noFill/>
-          <a:ln/>
         </p:spPr>
         <p:txBody>
           <a:bodyPr wrap="square" rtlCol="0" anchor="t"/>
           <a:lstStyle/>
           <a:p>
-            <a:pPr algn="l" indent="0" marL="0">
+            <a:pPr marL="0" indent="0" algn="l">
               <a:buNone/>
             </a:pPr>
             <a:r>
@@ -3050,9 +2856,9 @@
                 <a:solidFill>
                   <a:srgbClr val="8A9099"/>
                 </a:solidFill>
-                <a:latin typeface="微软雅黑" pitchFamily="34" charset="0"/>
-                <a:ea typeface="微软雅黑" pitchFamily="34" charset="-122"/>
-                <a:cs typeface="微软雅黑" pitchFamily="34" charset="-120"/>
+                <a:latin typeface="微软雅黑" panose="020B0503020204020204" pitchFamily="34" charset="-122"/>
+                <a:ea typeface="微软雅黑" panose="020B0503020204020204" pitchFamily="34" charset="-122"/>
+                <a:cs typeface="微软雅黑" panose="020B0503020204020204" pitchFamily="34" charset="-120"/>
               </a:rPr>
               <a:t>链栈链队 802 考得少，理解'栈顶在表头、入栈即头插'即可；链队不带头结点时队空是 front==NULL</a:t>
             </a:r>
@@ -3070,7 +2876,7 @@
 
 <file path=ppt/slides/slide12.xml><?xml version="1.0" encoding="utf-8"?>
 <p:sld xmlns:a="http://schemas.openxmlformats.org/drawingml/2006/main" xmlns:r="http://schemas.openxmlformats.org/officeDocument/2006/relationships" xmlns:p="http://schemas.openxmlformats.org/presentationml/2006/main">
-  <p:cSld name="Slide 12">
+  <p:cSld>
     <p:bg>
       <p:bgPr>
         <a:blipFill dpi="0" rotWithShape="1">
@@ -3114,13 +2920,12 @@
             <a:avLst/>
           </a:prstGeom>
           <a:noFill/>
-          <a:ln/>
         </p:spPr>
         <p:txBody>
           <a:bodyPr wrap="square" rtlCol="0" anchor="ctr"/>
           <a:lstStyle/>
           <a:p>
-            <a:pPr algn="r" indent="0" marL="0">
+            <a:pPr marL="0" indent="0" algn="r">
               <a:buNone/>
             </a:pPr>
             <a:r>
@@ -3128,9 +2933,9 @@
                 <a:solidFill>
                   <a:srgbClr val="8A9099"/>
                 </a:solidFill>
-                <a:latin typeface="微软雅黑" pitchFamily="34" charset="0"/>
-                <a:ea typeface="微软雅黑" pitchFamily="34" charset="-122"/>
-                <a:cs typeface="微软雅黑" pitchFamily="34" charset="-120"/>
+                <a:latin typeface="微软雅黑" panose="020B0503020204020204" pitchFamily="34" charset="-122"/>
+                <a:ea typeface="微软雅黑" panose="020B0503020204020204" pitchFamily="34" charset="-122"/>
+                <a:cs typeface="微软雅黑" panose="020B0503020204020204" pitchFamily="34" charset="-120"/>
               </a:rPr>
               <a:t>12 / 16</a:t>
             </a:r>
@@ -3153,13 +2958,12 @@
             <a:avLst/>
           </a:prstGeom>
           <a:noFill/>
-          <a:ln/>
         </p:spPr>
         <p:txBody>
           <a:bodyPr wrap="square" rtlCol="0" anchor="ctr"/>
           <a:lstStyle/>
           <a:p>
-            <a:pPr algn="l" indent="0" marL="0">
+            <a:pPr marL="0" indent="0" algn="l">
               <a:buNone/>
             </a:pPr>
             <a:r>
@@ -3167,9 +2971,9 @@
                 <a:solidFill>
                   <a:srgbClr val="1F4E9C"/>
                 </a:solidFill>
-                <a:latin typeface="微软雅黑" pitchFamily="34" charset="0"/>
-                <a:ea typeface="微软雅黑" pitchFamily="34" charset="-122"/>
-                <a:cs typeface="微软雅黑" pitchFamily="34" charset="-120"/>
+                <a:latin typeface="微软雅黑" panose="020B0503020204020204" pitchFamily="34" charset="-122"/>
+                <a:ea typeface="微软雅黑" panose="020B0503020204020204" pitchFamily="34" charset="-122"/>
+                <a:cs typeface="微软雅黑" panose="020B0503020204020204" pitchFamily="34" charset="-120"/>
               </a:rPr>
               <a:t>栈与递归</a:t>
             </a:r>
@@ -3192,13 +2996,12 @@
             <a:avLst/>
           </a:prstGeom>
           <a:noFill/>
-          <a:ln/>
         </p:spPr>
         <p:txBody>
           <a:bodyPr wrap="square" rtlCol="0" anchor="ctr"/>
           <a:lstStyle/>
           <a:p>
-            <a:pPr algn="l" indent="0" marL="0">
+            <a:pPr marL="0" indent="0" algn="l">
               <a:buNone/>
             </a:pPr>
             <a:r>
@@ -3206,9 +3009,9 @@
                 <a:solidFill>
                   <a:srgbClr val="1F2329"/>
                 </a:solidFill>
-                <a:latin typeface="微软雅黑" pitchFamily="34" charset="0"/>
-                <a:ea typeface="微软雅黑" pitchFamily="34" charset="-122"/>
-                <a:cs typeface="微软雅黑" pitchFamily="34" charset="-120"/>
+                <a:latin typeface="微软雅黑" panose="020B0503020204020204" pitchFamily="34" charset="-122"/>
+                <a:ea typeface="微软雅黑" panose="020B0503020204020204" pitchFamily="34" charset="-122"/>
+                <a:cs typeface="微软雅黑" panose="020B0503020204020204" pitchFamily="34" charset="-120"/>
               </a:rPr>
               <a:t>栈和递归的关系</a:t>
             </a:r>
@@ -3231,13 +3034,12 @@
             <a:avLst/>
           </a:prstGeom>
           <a:noFill/>
-          <a:ln/>
         </p:spPr>
         <p:txBody>
           <a:bodyPr wrap="square" rtlCol="0" anchor="t"/>
           <a:lstStyle/>
           <a:p>
-            <a:pPr algn="l" indent="0" marL="0">
+            <a:pPr marL="0" indent="0" algn="l">
               <a:lnSpc>
                 <a:spcPct val="115000"/>
               </a:lnSpc>
@@ -3248,25 +3050,68 @@
                 <a:solidFill>
                   <a:srgbClr val="1F4E9C"/>
                 </a:solidFill>
-                <a:latin typeface="微软雅黑" pitchFamily="34" charset="0"/>
-                <a:ea typeface="微软雅黑" pitchFamily="34" charset="-122"/>
-                <a:cs typeface="微软雅黑" pitchFamily="34" charset="-120"/>
+                <a:latin typeface="微软雅黑" panose="020B0503020204020204" pitchFamily="34" charset="-122"/>
+                <a:ea typeface="微软雅黑" panose="020B0503020204020204" pitchFamily="34" charset="-122"/>
+                <a:cs typeface="微软雅黑" panose="020B0503020204020204" pitchFamily="34" charset="-120"/>
               </a:rPr>
               <a:t>•  </a:t>
             </a:r>
-            <a:pPr algn="l" indent="0" marL="0">
+            <a:r>
+              <a:rPr lang="en-US" sz="1800" dirty="0">
+                <a:solidFill>
+                  <a:srgbClr val="000000"/>
+                </a:solidFill>
+              </a:rPr>
+              <a:t>C 语言强化阶段画过 fact(3) 的调用栈，一层层展开再一层层收回，那就是系统在帮你用栈</a:t>
+            </a:r>
+            <a:endParaRPr lang="en-US" sz="1800" dirty="0"/>
+          </a:p>
+        </p:txBody>
+      </p:sp>
+      <p:sp>
+        <p:nvSpPr>
+          <p:cNvPr id="6" name="Text 4"/>
+          <p:cNvSpPr/>
+          <p:nvPr/>
+        </p:nvSpPr>
+        <p:spPr>
+          <a:xfrm>
+            <a:off x="896112" y="3209544"/>
+            <a:ext cx="10454335" cy="740664"/>
+          </a:xfrm>
+          <a:prstGeom prst="rect">
+            <a:avLst/>
+          </a:prstGeom>
+          <a:noFill/>
+        </p:spPr>
+        <p:txBody>
+          <a:bodyPr wrap="square" rtlCol="0" anchor="t"/>
+          <a:lstStyle/>
+          <a:p>
+            <a:pPr marL="0" indent="0" algn="l">
               <a:lnSpc>
                 <a:spcPct val="115000"/>
               </a:lnSpc>
               <a:buNone/>
             </a:pPr>
             <a:r>
+              <a:rPr lang="en-US" sz="1800" b="1" dirty="0">
+                <a:solidFill>
+                  <a:srgbClr val="1F4E9C"/>
+                </a:solidFill>
+                <a:latin typeface="微软雅黑" panose="020B0503020204020204" pitchFamily="34" charset="-122"/>
+                <a:ea typeface="微软雅黑" panose="020B0503020204020204" pitchFamily="34" charset="-122"/>
+                <a:cs typeface="微软雅黑" panose="020B0503020204020204" pitchFamily="34" charset="-120"/>
+              </a:rPr>
+              <a:t>•  </a:t>
+            </a:r>
+            <a:r>
               <a:rPr lang="en-US" sz="1800" dirty="0">
                 <a:solidFill>
                   <a:srgbClr val="000000"/>
                 </a:solidFill>
               </a:rPr>
-              <a:t>C 语言强化阶段画过 fact(3) 的调用栈，一层层展开再一层层收回，那就是系统在帮你用栈</a:t>
+              <a:t>这一节讲的是你自己用一个栈；后面二叉树的非递归遍历，就是把递归的栈搬到代码里显式管理</a:t>
             </a:r>
             <a:endParaRPr lang="en-US" sz="1800" dirty="0"/>
           </a:p>
@@ -3274,26 +3119,25 @@
       </p:sp>
       <p:sp>
         <p:nvSpPr>
-          <p:cNvPr id="6" name="Text 4"/>
-          <p:cNvSpPr/>
-          <p:nvPr/>
-        </p:nvSpPr>
-        <p:spPr>
-          <a:xfrm>
-            <a:off x="896112" y="3209544"/>
-            <a:ext cx="10454335" cy="740664"/>
-          </a:xfrm>
-          <a:prstGeom prst="rect">
-            <a:avLst/>
-          </a:prstGeom>
-          <a:noFill/>
-          <a:ln/>
+          <p:cNvPr id="7" name="Text 5"/>
+          <p:cNvSpPr/>
+          <p:nvPr/>
+        </p:nvSpPr>
+        <p:spPr>
+          <a:xfrm>
+            <a:off x="896112" y="4023360"/>
+            <a:ext cx="10454335" cy="397764"/>
+          </a:xfrm>
+          <a:prstGeom prst="rect">
+            <a:avLst/>
+          </a:prstGeom>
+          <a:noFill/>
         </p:spPr>
         <p:txBody>
           <a:bodyPr wrap="square" rtlCol="0" anchor="t"/>
           <a:lstStyle/>
           <a:p>
-            <a:pPr algn="l" indent="0" marL="0">
+            <a:pPr marL="0" indent="0" algn="l">
               <a:lnSpc>
                 <a:spcPct val="115000"/>
               </a:lnSpc>
@@ -3304,74 +3148,12 @@
                 <a:solidFill>
                   <a:srgbClr val="1F4E9C"/>
                 </a:solidFill>
-                <a:latin typeface="微软雅黑" pitchFamily="34" charset="0"/>
-                <a:ea typeface="微软雅黑" pitchFamily="34" charset="-122"/>
-                <a:cs typeface="微软雅黑" pitchFamily="34" charset="-120"/>
+                <a:latin typeface="微软雅黑" panose="020B0503020204020204" pitchFamily="34" charset="-122"/>
+                <a:ea typeface="微软雅黑" panose="020B0503020204020204" pitchFamily="34" charset="-122"/>
+                <a:cs typeface="微软雅黑" panose="020B0503020204020204" pitchFamily="34" charset="-120"/>
               </a:rPr>
               <a:t>•  </a:t>
             </a:r>
-            <a:pPr algn="l" indent="0" marL="0">
-              <a:lnSpc>
-                <a:spcPct val="115000"/>
-              </a:lnSpc>
-              <a:buNone/>
-            </a:pPr>
-            <a:r>
-              <a:rPr lang="en-US" sz="1800" dirty="0">
-                <a:solidFill>
-                  <a:srgbClr val="000000"/>
-                </a:solidFill>
-              </a:rPr>
-              <a:t>这一节讲的是你自己用一个栈；后面二叉树的非递归遍历，就是把递归的栈搬到代码里显式管理</a:t>
-            </a:r>
-            <a:endParaRPr lang="en-US" sz="1800" dirty="0"/>
-          </a:p>
-        </p:txBody>
-      </p:sp>
-      <p:sp>
-        <p:nvSpPr>
-          <p:cNvPr id="7" name="Text 5"/>
-          <p:cNvSpPr/>
-          <p:nvPr/>
-        </p:nvSpPr>
-        <p:spPr>
-          <a:xfrm>
-            <a:off x="896112" y="4023360"/>
-            <a:ext cx="10454335" cy="397764"/>
-          </a:xfrm>
-          <a:prstGeom prst="rect">
-            <a:avLst/>
-          </a:prstGeom>
-          <a:noFill/>
-          <a:ln/>
-        </p:spPr>
-        <p:txBody>
-          <a:bodyPr wrap="square" rtlCol="0" anchor="t"/>
-          <a:lstStyle/>
-          <a:p>
-            <a:pPr algn="l" indent="0" marL="0">
-              <a:lnSpc>
-                <a:spcPct val="115000"/>
-              </a:lnSpc>
-              <a:buNone/>
-            </a:pPr>
-            <a:r>
-              <a:rPr lang="en-US" sz="1800" b="1" dirty="0">
-                <a:solidFill>
-                  <a:srgbClr val="1F4E9C"/>
-                </a:solidFill>
-                <a:latin typeface="微软雅黑" pitchFamily="34" charset="0"/>
-                <a:ea typeface="微软雅黑" pitchFamily="34" charset="-122"/>
-                <a:cs typeface="微软雅黑" pitchFamily="34" charset="-120"/>
-              </a:rPr>
-              <a:t>•  </a:t>
-            </a:r>
-            <a:pPr algn="l" indent="0" marL="0">
-              <a:lnSpc>
-                <a:spcPct val="115000"/>
-              </a:lnSpc>
-              <a:buNone/>
-            </a:pPr>
             <a:r>
               <a:rPr lang="en-US" sz="1800" dirty="0">
                 <a:solidFill>
@@ -3399,13 +3181,12 @@
             <a:avLst/>
           </a:prstGeom>
           <a:noFill/>
-          <a:ln/>
         </p:spPr>
         <p:txBody>
           <a:bodyPr wrap="square" rtlCol="0" anchor="t"/>
           <a:lstStyle/>
           <a:p>
-            <a:pPr algn="l" indent="0" marL="0">
+            <a:pPr marL="0" indent="0" algn="l">
               <a:buNone/>
             </a:pPr>
             <a:r>
@@ -3413,9 +3194,9 @@
                 <a:solidFill>
                   <a:srgbClr val="8A9099"/>
                 </a:solidFill>
-                <a:latin typeface="微软雅黑" pitchFamily="34" charset="0"/>
-                <a:ea typeface="微软雅黑" pitchFamily="34" charset="-122"/>
-                <a:cs typeface="微软雅黑" pitchFamily="34" charset="-120"/>
+                <a:latin typeface="微软雅黑" panose="020B0503020204020204" pitchFamily="34" charset="-122"/>
+                <a:ea typeface="微软雅黑" panose="020B0503020204020204" pitchFamily="34" charset="-122"/>
+                <a:cs typeface="微软雅黑" panose="020B0503020204020204" pitchFamily="34" charset="-120"/>
               </a:rPr>
               <a:t>队列是另一类工具：层序遍历、广度优先搜索、拓扑排序都要用队列排队</a:t>
             </a:r>
@@ -3433,7 +3214,7 @@
 
 <file path=ppt/slides/slide13.xml><?xml version="1.0" encoding="utf-8"?>
 <p:sld xmlns:a="http://schemas.openxmlformats.org/drawingml/2006/main" xmlns:r="http://schemas.openxmlformats.org/officeDocument/2006/relationships" xmlns:p="http://schemas.openxmlformats.org/presentationml/2006/main">
-  <p:cSld name="Slide 13">
+  <p:cSld>
     <p:bg>
       <p:bgPr>
         <a:blipFill dpi="0" rotWithShape="1">
@@ -3477,13 +3258,12 @@
             <a:avLst/>
           </a:prstGeom>
           <a:noFill/>
-          <a:ln/>
         </p:spPr>
         <p:txBody>
           <a:bodyPr wrap="square" rtlCol="0" anchor="ctr"/>
           <a:lstStyle/>
           <a:p>
-            <a:pPr algn="r" indent="0" marL="0">
+            <a:pPr marL="0" indent="0" algn="r">
               <a:buNone/>
             </a:pPr>
             <a:r>
@@ -3491,9 +3271,9 @@
                 <a:solidFill>
                   <a:srgbClr val="8A9099"/>
                 </a:solidFill>
-                <a:latin typeface="微软雅黑" pitchFamily="34" charset="0"/>
-                <a:ea typeface="微软雅黑" pitchFamily="34" charset="-122"/>
-                <a:cs typeface="微软雅黑" pitchFamily="34" charset="-120"/>
+                <a:latin typeface="微软雅黑" panose="020B0503020204020204" pitchFamily="34" charset="-122"/>
+                <a:ea typeface="微软雅黑" panose="020B0503020204020204" pitchFamily="34" charset="-122"/>
+                <a:cs typeface="微软雅黑" panose="020B0503020204020204" pitchFamily="34" charset="-120"/>
               </a:rPr>
               <a:t>13 / 16</a:t>
             </a:r>
@@ -3516,13 +3296,12 @@
             <a:avLst/>
           </a:prstGeom>
           <a:noFill/>
-          <a:ln/>
         </p:spPr>
         <p:txBody>
           <a:bodyPr wrap="square" rtlCol="0" anchor="ctr"/>
           <a:lstStyle/>
           <a:p>
-            <a:pPr algn="l" indent="0" marL="0">
+            <a:pPr marL="0" indent="0" algn="l">
               <a:buNone/>
             </a:pPr>
             <a:r>
@@ -3530,9 +3309,9 @@
                 <a:solidFill>
                   <a:srgbClr val="1F4E9C"/>
                 </a:solidFill>
-                <a:latin typeface="微软雅黑" pitchFamily="34" charset="0"/>
-                <a:ea typeface="微软雅黑" pitchFamily="34" charset="-122"/>
-                <a:cs typeface="微软雅黑" pitchFamily="34" charset="-120"/>
+                <a:latin typeface="微软雅黑" panose="020B0503020204020204" pitchFamily="34" charset="-122"/>
+                <a:ea typeface="微软雅黑" panose="020B0503020204020204" pitchFamily="34" charset="-122"/>
+                <a:cs typeface="微软雅黑" panose="020B0503020204020204" pitchFamily="34" charset="-120"/>
               </a:rPr>
               <a:t>本节小结</a:t>
             </a:r>
@@ -3555,13 +3334,12 @@
             <a:avLst/>
           </a:prstGeom>
           <a:noFill/>
-          <a:ln/>
         </p:spPr>
         <p:txBody>
           <a:bodyPr wrap="square" rtlCol="0" anchor="ctr"/>
           <a:lstStyle/>
           <a:p>
-            <a:pPr algn="l" indent="0" marL="0">
+            <a:pPr marL="0" indent="0" algn="l">
               <a:buNone/>
             </a:pPr>
             <a:r>
@@ -3569,9 +3347,9 @@
                 <a:solidFill>
                   <a:srgbClr val="1F2329"/>
                 </a:solidFill>
-                <a:latin typeface="微软雅黑" pitchFamily="34" charset="0"/>
-                <a:ea typeface="微软雅黑" pitchFamily="34" charset="-122"/>
-                <a:cs typeface="微软雅黑" pitchFamily="34" charset="-120"/>
+                <a:latin typeface="微软雅黑" panose="020B0503020204020204" pitchFamily="34" charset="-122"/>
+                <a:ea typeface="微软雅黑" panose="020B0503020204020204" pitchFamily="34" charset="-122"/>
+                <a:cs typeface="微软雅黑" panose="020B0503020204020204" pitchFamily="34" charset="-120"/>
               </a:rPr>
               <a:t>栈与队列小结</a:t>
             </a:r>
@@ -3594,13 +3372,12 @@
             <a:avLst/>
           </a:prstGeom>
           <a:noFill/>
-          <a:ln/>
         </p:spPr>
         <p:txBody>
           <a:bodyPr wrap="square" rtlCol="0" anchor="t"/>
           <a:lstStyle/>
           <a:p>
-            <a:pPr algn="l" indent="0" marL="0">
+            <a:pPr marL="0" indent="0" algn="l">
               <a:lnSpc>
                 <a:spcPct val="115000"/>
               </a:lnSpc>
@@ -3611,25 +3388,68 @@
                 <a:solidFill>
                   <a:srgbClr val="1F4E9C"/>
                 </a:solidFill>
-                <a:latin typeface="微软雅黑" pitchFamily="34" charset="0"/>
-                <a:ea typeface="微软雅黑" pitchFamily="34" charset="-122"/>
-                <a:cs typeface="微软雅黑" pitchFamily="34" charset="-120"/>
+                <a:latin typeface="微软雅黑" panose="020B0503020204020204" pitchFamily="34" charset="-122"/>
+                <a:ea typeface="微软雅黑" panose="020B0503020204020204" pitchFamily="34" charset="-122"/>
+                <a:cs typeface="微软雅黑" panose="020B0503020204020204" pitchFamily="34" charset="-120"/>
               </a:rPr>
               <a:t>•  </a:t>
             </a:r>
-            <a:pPr algn="l" indent="0" marL="0">
+            <a:r>
+              <a:rPr lang="en-US" sz="1800" dirty="0">
+                <a:solidFill>
+                  <a:srgbClr val="000000"/>
+                </a:solidFill>
+              </a:rPr>
+              <a:t>顺序栈：top=-1 约定下，入栈 data[++top]、出栈 data[top--]、判空 top==-1、判满 top==MaxSize-1、长度 top+1</a:t>
+            </a:r>
+            <a:endParaRPr lang="en-US" sz="1800" dirty="0"/>
+          </a:p>
+        </p:txBody>
+      </p:sp>
+      <p:sp>
+        <p:nvSpPr>
+          <p:cNvPr id="6" name="Text 4"/>
+          <p:cNvSpPr/>
+          <p:nvPr/>
+        </p:nvSpPr>
+        <p:spPr>
+          <a:xfrm>
+            <a:off x="896112" y="3209544"/>
+            <a:ext cx="10454335" cy="397764"/>
+          </a:xfrm>
+          <a:prstGeom prst="rect">
+            <a:avLst/>
+          </a:prstGeom>
+          <a:noFill/>
+        </p:spPr>
+        <p:txBody>
+          <a:bodyPr wrap="square" rtlCol="0" anchor="t"/>
+          <a:lstStyle/>
+          <a:p>
+            <a:pPr marL="0" indent="0" algn="l">
               <a:lnSpc>
                 <a:spcPct val="115000"/>
               </a:lnSpc>
               <a:buNone/>
             </a:pPr>
             <a:r>
+              <a:rPr lang="en-US" sz="1800" b="1" dirty="0">
+                <a:solidFill>
+                  <a:srgbClr val="1F4E9C"/>
+                </a:solidFill>
+                <a:latin typeface="微软雅黑" panose="020B0503020204020204" pitchFamily="34" charset="-122"/>
+                <a:ea typeface="微软雅黑" panose="020B0503020204020204" pitchFamily="34" charset="-122"/>
+                <a:cs typeface="微软雅黑" panose="020B0503020204020204" pitchFamily="34" charset="-120"/>
+              </a:rPr>
+              <a:t>•  </a:t>
+            </a:r>
+            <a:r>
               <a:rPr lang="en-US" sz="1800" dirty="0">
                 <a:solidFill>
                   <a:srgbClr val="000000"/>
                 </a:solidFill>
               </a:rPr>
-              <a:t>顺序栈：top=-1 约定下，入栈 data[++top]、出栈 data[top--]、判空 top==-1、判满 top==MaxSize-1、长度 top+1</a:t>
+              <a:t>top=0 约定五个式子全变，两套不能混用</a:t>
             </a:r>
             <a:endParaRPr lang="en-US" sz="1800" dirty="0"/>
           </a:p>
@@ -3637,26 +3457,25 @@
       </p:sp>
       <p:sp>
         <p:nvSpPr>
-          <p:cNvPr id="6" name="Text 4"/>
-          <p:cNvSpPr/>
-          <p:nvPr/>
-        </p:nvSpPr>
-        <p:spPr>
-          <a:xfrm>
-            <a:off x="896112" y="3209544"/>
-            <a:ext cx="10454335" cy="397764"/>
-          </a:xfrm>
-          <a:prstGeom prst="rect">
-            <a:avLst/>
-          </a:prstGeom>
-          <a:noFill/>
-          <a:ln/>
+          <p:cNvPr id="7" name="Text 5"/>
+          <p:cNvSpPr/>
+          <p:nvPr/>
+        </p:nvSpPr>
+        <p:spPr>
+          <a:xfrm>
+            <a:off x="896112" y="3680460"/>
+            <a:ext cx="10454335" cy="1083564"/>
+          </a:xfrm>
+          <a:prstGeom prst="rect">
+            <a:avLst/>
+          </a:prstGeom>
+          <a:noFill/>
         </p:spPr>
         <p:txBody>
           <a:bodyPr wrap="square" rtlCol="0" anchor="t"/>
           <a:lstStyle/>
           <a:p>
-            <a:pPr algn="l" indent="0" marL="0">
+            <a:pPr marL="0" indent="0" algn="l">
               <a:lnSpc>
                 <a:spcPct val="115000"/>
               </a:lnSpc>
@@ -3667,130 +3486,61 @@
                 <a:solidFill>
                   <a:srgbClr val="1F4E9C"/>
                 </a:solidFill>
-                <a:latin typeface="微软雅黑" pitchFamily="34" charset="0"/>
-                <a:ea typeface="微软雅黑" pitchFamily="34" charset="-122"/>
-                <a:cs typeface="微软雅黑" pitchFamily="34" charset="-120"/>
+                <a:latin typeface="微软雅黑" panose="020B0503020204020204" pitchFamily="34" charset="-122"/>
+                <a:ea typeface="微软雅黑" panose="020B0503020204020204" pitchFamily="34" charset="-122"/>
+                <a:cs typeface="微软雅黑" panose="020B0503020204020204" pitchFamily="34" charset="-120"/>
               </a:rPr>
               <a:t>•  </a:t>
             </a:r>
-            <a:pPr algn="l" indent="0" marL="0">
+            <a:r>
+              <a:rPr lang="en-US" sz="1800" dirty="0">
+                <a:solidFill>
+                  <a:srgbClr val="000000"/>
+                </a:solidFill>
+              </a:rPr>
+              <a:t>循环队列：牺牲一单元，判空 rear==front、判满 (rear+1)%MaxSize==front、长度 (rear-front+MaxSize)%MaxSize</a:t>
+            </a:r>
+            <a:endParaRPr lang="en-US" sz="1800" dirty="0"/>
+          </a:p>
+        </p:txBody>
+      </p:sp>
+      <p:sp>
+        <p:nvSpPr>
+          <p:cNvPr id="8" name="Text 6"/>
+          <p:cNvSpPr/>
+          <p:nvPr/>
+        </p:nvSpPr>
+        <p:spPr>
+          <a:xfrm>
+            <a:off x="896112" y="4837176"/>
+            <a:ext cx="10454335" cy="397764"/>
+          </a:xfrm>
+          <a:prstGeom prst="rect">
+            <a:avLst/>
+          </a:prstGeom>
+          <a:noFill/>
+        </p:spPr>
+        <p:txBody>
+          <a:bodyPr wrap="square" rtlCol="0" anchor="t"/>
+          <a:lstStyle/>
+          <a:p>
+            <a:pPr marL="0" indent="0" algn="l">
               <a:lnSpc>
                 <a:spcPct val="115000"/>
               </a:lnSpc>
               <a:buNone/>
             </a:pPr>
             <a:r>
-              <a:rPr lang="en-US" sz="1800" dirty="0">
-                <a:solidFill>
-                  <a:srgbClr val="000000"/>
-                </a:solidFill>
-              </a:rPr>
-              <a:t>top=0 约定五个式子全变，两套不能混用</a:t>
-            </a:r>
-            <a:endParaRPr lang="en-US" sz="1800" dirty="0"/>
-          </a:p>
-        </p:txBody>
-      </p:sp>
-      <p:sp>
-        <p:nvSpPr>
-          <p:cNvPr id="7" name="Text 5"/>
-          <p:cNvSpPr/>
-          <p:nvPr/>
-        </p:nvSpPr>
-        <p:spPr>
-          <a:xfrm>
-            <a:off x="896112" y="3680460"/>
-            <a:ext cx="10454335" cy="1083564"/>
-          </a:xfrm>
-          <a:prstGeom prst="rect">
-            <a:avLst/>
-          </a:prstGeom>
-          <a:noFill/>
-          <a:ln/>
-        </p:spPr>
-        <p:txBody>
-          <a:bodyPr wrap="square" rtlCol="0" anchor="t"/>
-          <a:lstStyle/>
-          <a:p>
-            <a:pPr algn="l" indent="0" marL="0">
-              <a:lnSpc>
-                <a:spcPct val="115000"/>
-              </a:lnSpc>
-              <a:buNone/>
-            </a:pPr>
-            <a:r>
               <a:rPr lang="en-US" sz="1800" b="1" dirty="0">
                 <a:solidFill>
                   <a:srgbClr val="1F4E9C"/>
                 </a:solidFill>
-                <a:latin typeface="微软雅黑" pitchFamily="34" charset="0"/>
-                <a:ea typeface="微软雅黑" pitchFamily="34" charset="-122"/>
-                <a:cs typeface="微软雅黑" pitchFamily="34" charset="-120"/>
+                <a:latin typeface="微软雅黑" panose="020B0503020204020204" pitchFamily="34" charset="-122"/>
+                <a:ea typeface="微软雅黑" panose="020B0503020204020204" pitchFamily="34" charset="-122"/>
+                <a:cs typeface="微软雅黑" panose="020B0503020204020204" pitchFamily="34" charset="-120"/>
               </a:rPr>
               <a:t>•  </a:t>
             </a:r>
-            <a:pPr algn="l" indent="0" marL="0">
-              <a:lnSpc>
-                <a:spcPct val="115000"/>
-              </a:lnSpc>
-              <a:buNone/>
-            </a:pPr>
-            <a:r>
-              <a:rPr lang="en-US" sz="1800" dirty="0">
-                <a:solidFill>
-                  <a:srgbClr val="000000"/>
-                </a:solidFill>
-              </a:rPr>
-              <a:t>循环队列：牺牲一单元，判空 rear==front、判满 (rear+1)%MaxSize==front、长度 (rear-front+MaxSize)%MaxSize</a:t>
-            </a:r>
-            <a:endParaRPr lang="en-US" sz="1800" dirty="0"/>
-          </a:p>
-        </p:txBody>
-      </p:sp>
-      <p:sp>
-        <p:nvSpPr>
-          <p:cNvPr id="8" name="Text 6"/>
-          <p:cNvSpPr/>
-          <p:nvPr/>
-        </p:nvSpPr>
-        <p:spPr>
-          <a:xfrm>
-            <a:off x="896112" y="4837176"/>
-            <a:ext cx="10454335" cy="397764"/>
-          </a:xfrm>
-          <a:prstGeom prst="rect">
-            <a:avLst/>
-          </a:prstGeom>
-          <a:noFill/>
-          <a:ln/>
-        </p:spPr>
-        <p:txBody>
-          <a:bodyPr wrap="square" rtlCol="0" anchor="t"/>
-          <a:lstStyle/>
-          <a:p>
-            <a:pPr algn="l" indent="0" marL="0">
-              <a:lnSpc>
-                <a:spcPct val="115000"/>
-              </a:lnSpc>
-              <a:buNone/>
-            </a:pPr>
-            <a:r>
-              <a:rPr lang="en-US" sz="1800" b="1" dirty="0">
-                <a:solidFill>
-                  <a:srgbClr val="1F4E9C"/>
-                </a:solidFill>
-                <a:latin typeface="微软雅黑" pitchFamily="34" charset="0"/>
-                <a:ea typeface="微软雅黑" pitchFamily="34" charset="-122"/>
-                <a:cs typeface="微软雅黑" pitchFamily="34" charset="-120"/>
-              </a:rPr>
-              <a:t>•  </a:t>
-            </a:r>
-            <a:pPr algn="l" indent="0" marL="0">
-              <a:lnSpc>
-                <a:spcPct val="115000"/>
-              </a:lnSpc>
-              <a:buNone/>
-            </a:pPr>
             <a:r>
               <a:rPr lang="en-US" sz="1800" dirty="0">
                 <a:solidFill>
@@ -3818,13 +3568,12 @@
             <a:avLst/>
           </a:prstGeom>
           <a:noFill/>
-          <a:ln/>
         </p:spPr>
         <p:txBody>
           <a:bodyPr wrap="square" rtlCol="0" anchor="t"/>
           <a:lstStyle/>
           <a:p>
-            <a:pPr algn="l" indent="0" marL="0">
+            <a:pPr marL="0" indent="0" algn="l">
               <a:buNone/>
             </a:pPr>
             <a:r>
@@ -3832,9 +3581,9 @@
                 <a:solidFill>
                   <a:srgbClr val="8A9099"/>
                 </a:solidFill>
-                <a:latin typeface="微软雅黑" pitchFamily="34" charset="0"/>
-                <a:ea typeface="微软雅黑" pitchFamily="34" charset="-122"/>
-                <a:cs typeface="微软雅黑" pitchFamily="34" charset="-120"/>
+                <a:latin typeface="微软雅黑" panose="020B0503020204020204" pitchFamily="34" charset="-122"/>
+                <a:ea typeface="微软雅黑" panose="020B0503020204020204" pitchFamily="34" charset="-122"/>
+                <a:cs typeface="微软雅黑" panose="020B0503020204020204" pitchFamily="34" charset="-120"/>
               </a:rPr>
               <a:t>栈和队列本身简单，考点全在 top 约定与循环队列判满；它们是强化阶段算法的工具</a:t>
             </a:r>
@@ -3852,7 +3601,7 @@
 
 <file path=ppt/slides/slide14.xml><?xml version="1.0" encoding="utf-8"?>
 <p:sld xmlns:a="http://schemas.openxmlformats.org/drawingml/2006/main" xmlns:r="http://schemas.openxmlformats.org/officeDocument/2006/relationships" xmlns:p="http://schemas.openxmlformats.org/presentationml/2006/main">
-  <p:cSld name="Slide 14">
+  <p:cSld>
     <p:bg>
       <p:bgPr>
         <a:blipFill dpi="0" rotWithShape="1">
@@ -3896,13 +3645,12 @@
             <a:avLst/>
           </a:prstGeom>
           <a:noFill/>
-          <a:ln/>
         </p:spPr>
         <p:txBody>
           <a:bodyPr wrap="square" rtlCol="0" anchor="ctr"/>
           <a:lstStyle/>
           <a:p>
-            <a:pPr algn="r" indent="0" marL="0">
+            <a:pPr marL="0" indent="0" algn="r">
               <a:buNone/>
             </a:pPr>
             <a:r>
@@ -3910,9 +3658,9 @@
                 <a:solidFill>
                   <a:srgbClr val="8A9099"/>
                 </a:solidFill>
-                <a:latin typeface="微软雅黑" pitchFamily="34" charset="0"/>
-                <a:ea typeface="微软雅黑" pitchFamily="34" charset="-122"/>
-                <a:cs typeface="微软雅黑" pitchFamily="34" charset="-120"/>
+                <a:latin typeface="微软雅黑" panose="020B0503020204020204" pitchFamily="34" charset="-122"/>
+                <a:ea typeface="微软雅黑" panose="020B0503020204020204" pitchFamily="34" charset="-122"/>
+                <a:cs typeface="微软雅黑" panose="020B0503020204020204" pitchFamily="34" charset="-120"/>
               </a:rPr>
               <a:t>14 / 16</a:t>
             </a:r>
@@ -3935,13 +3683,12 @@
             <a:avLst/>
           </a:prstGeom>
           <a:noFill/>
-          <a:ln/>
         </p:spPr>
         <p:txBody>
           <a:bodyPr wrap="square" rtlCol="0" anchor="ctr"/>
           <a:lstStyle/>
           <a:p>
-            <a:pPr algn="l" indent="0" marL="0">
+            <a:pPr marL="0" indent="0" algn="l">
               <a:buNone/>
             </a:pPr>
             <a:r>
@@ -3949,9 +3696,9 @@
                 <a:solidFill>
                   <a:srgbClr val="1F4E9C"/>
                 </a:solidFill>
-                <a:latin typeface="微软雅黑" pitchFamily="34" charset="0"/>
-                <a:ea typeface="微软雅黑" pitchFamily="34" charset="-122"/>
-                <a:cs typeface="微软雅黑" pitchFamily="34" charset="-120"/>
+                <a:latin typeface="微软雅黑" panose="020B0503020204020204" pitchFamily="34" charset="-122"/>
+                <a:ea typeface="微软雅黑" panose="020B0503020204020204" pitchFamily="34" charset="-122"/>
+                <a:cs typeface="微软雅黑" panose="020B0503020204020204" pitchFamily="34" charset="-120"/>
               </a:rPr>
               <a:t>课后任务</a:t>
             </a:r>
@@ -3974,13 +3721,12 @@
             <a:avLst/>
           </a:prstGeom>
           <a:noFill/>
-          <a:ln/>
         </p:spPr>
         <p:txBody>
           <a:bodyPr wrap="square" rtlCol="0" anchor="ctr"/>
           <a:lstStyle/>
           <a:p>
-            <a:pPr algn="l" indent="0" marL="0">
+            <a:pPr marL="0" indent="0" algn="l">
               <a:buNone/>
             </a:pPr>
             <a:r>
@@ -3988,9 +3734,9 @@
                 <a:solidFill>
                   <a:srgbClr val="1F2329"/>
                 </a:solidFill>
-                <a:latin typeface="微软雅黑" pitchFamily="34" charset="0"/>
-                <a:ea typeface="微软雅黑" pitchFamily="34" charset="-122"/>
-                <a:cs typeface="微软雅黑" pitchFamily="34" charset="-120"/>
+                <a:latin typeface="微软雅黑" panose="020B0503020204020204" pitchFamily="34" charset="-122"/>
+                <a:ea typeface="微软雅黑" panose="020B0503020204020204" pitchFamily="34" charset="-122"/>
+                <a:cs typeface="微软雅黑" panose="020B0503020204020204" pitchFamily="34" charset="-120"/>
               </a:rPr>
               <a:t>1道跟练 ＋ 1道模仿</a:t>
             </a:r>
@@ -4013,13 +3759,12 @@
             <a:avLst/>
           </a:prstGeom>
           <a:noFill/>
-          <a:ln/>
         </p:spPr>
         <p:txBody>
           <a:bodyPr wrap="square" rtlCol="0" anchor="t"/>
           <a:lstStyle/>
           <a:p>
-            <a:pPr algn="l" indent="0" marL="0">
+            <a:pPr marL="0" indent="0" algn="l">
               <a:lnSpc>
                 <a:spcPct val="115000"/>
               </a:lnSpc>
@@ -4030,13 +3775,53 @@
                 <a:solidFill>
                   <a:srgbClr val="1F4E9C"/>
                 </a:solidFill>
-                <a:latin typeface="微软雅黑" pitchFamily="34" charset="0"/>
-                <a:ea typeface="微软雅黑" pitchFamily="34" charset="-122"/>
-                <a:cs typeface="微软雅黑" pitchFamily="34" charset="-120"/>
+                <a:latin typeface="微软雅黑" panose="020B0503020204020204" pitchFamily="34" charset="-122"/>
+                <a:ea typeface="微软雅黑" panose="020B0503020204020204" pitchFamily="34" charset="-122"/>
+                <a:cs typeface="微软雅黑" panose="020B0503020204020204" pitchFamily="34" charset="-120"/>
               </a:rPr>
               <a:t>•  </a:t>
             </a:r>
-            <a:pPr algn="l" indent="0" marL="0">
+            <a:r>
+              <a:rPr lang="en-US" sz="1800" b="1" dirty="0">
+                <a:solidFill>
+                  <a:srgbClr val="000000"/>
+                </a:solidFill>
+              </a:rPr>
+              <a:t>跟练题</a:t>
+            </a:r>
+            <a:r>
+              <a:rPr lang="en-US" sz="1800" dirty="0">
+                <a:solidFill>
+                  <a:srgbClr val="000000"/>
+                </a:solidFill>
+              </a:rPr>
+              <a:t>：默写 SqStack 与 SqQueue 的定义和全部基本操作，并写出判满三策略的三个判满条件式</a:t>
+            </a:r>
+            <a:endParaRPr lang="en-US" sz="1800" dirty="0"/>
+          </a:p>
+        </p:txBody>
+      </p:sp>
+      <p:sp>
+        <p:nvSpPr>
+          <p:cNvPr id="6" name="Text 4"/>
+          <p:cNvSpPr/>
+          <p:nvPr/>
+        </p:nvSpPr>
+        <p:spPr>
+          <a:xfrm>
+            <a:off x="896112" y="3209544"/>
+            <a:ext cx="10454335" cy="1083564"/>
+          </a:xfrm>
+          <a:prstGeom prst="rect">
+            <a:avLst/>
+          </a:prstGeom>
+          <a:noFill/>
+        </p:spPr>
+        <p:txBody>
+          <a:bodyPr wrap="square" rtlCol="0" anchor="t"/>
+          <a:lstStyle/>
+          <a:p>
+            <a:pPr marL="0" indent="0" algn="l">
               <a:lnSpc>
                 <a:spcPct val="115000"/>
               </a:lnSpc>
@@ -4045,87 +3830,22 @@
             <a:r>
               <a:rPr lang="en-US" sz="1800" b="1" dirty="0">
                 <a:solidFill>
+                  <a:srgbClr val="1F4E9C"/>
+                </a:solidFill>
+                <a:latin typeface="微软雅黑" panose="020B0503020204020204" pitchFamily="34" charset="-122"/>
+                <a:ea typeface="微软雅黑" panose="020B0503020204020204" pitchFamily="34" charset="-122"/>
+                <a:cs typeface="微软雅黑" panose="020B0503020204020204" pitchFamily="34" charset="-120"/>
+              </a:rPr>
+              <a:t>•  </a:t>
+            </a:r>
+            <a:r>
+              <a:rPr lang="en-US" sz="1800" b="1" dirty="0">
+                <a:solidFill>
                   <a:srgbClr val="000000"/>
                 </a:solidFill>
               </a:rPr>
-              <a:t>跟练题</a:t>
-            </a:r>
-            <a:pPr algn="l" indent="0" marL="0">
-              <a:lnSpc>
-                <a:spcPct val="115000"/>
-              </a:lnSpc>
-              <a:buNone/>
-            </a:pPr>
-            <a:r>
-              <a:rPr lang="en-US" sz="1800" dirty="0">
-                <a:solidFill>
-                  <a:srgbClr val="000000"/>
-                </a:solidFill>
-              </a:rPr>
-              <a:t>：默写 SqStack 与 SqQueue 的定义和全部基本操作，并写出判满三策略的三个判满条件式</a:t>
-            </a:r>
-            <a:endParaRPr lang="en-US" sz="1800" dirty="0"/>
-          </a:p>
-        </p:txBody>
-      </p:sp>
-      <p:sp>
-        <p:nvSpPr>
-          <p:cNvPr id="6" name="Text 4"/>
-          <p:cNvSpPr/>
-          <p:nvPr/>
-        </p:nvSpPr>
-        <p:spPr>
-          <a:xfrm>
-            <a:off x="896112" y="3209544"/>
-            <a:ext cx="10454335" cy="1083564"/>
-          </a:xfrm>
-          <a:prstGeom prst="rect">
-            <a:avLst/>
-          </a:prstGeom>
-          <a:noFill/>
-          <a:ln/>
-        </p:spPr>
-        <p:txBody>
-          <a:bodyPr wrap="square" rtlCol="0" anchor="t"/>
-          <a:lstStyle/>
-          <a:p>
-            <a:pPr algn="l" indent="0" marL="0">
-              <a:lnSpc>
-                <a:spcPct val="115000"/>
-              </a:lnSpc>
-              <a:buNone/>
-            </a:pPr>
-            <a:r>
-              <a:rPr lang="en-US" sz="1800" b="1" dirty="0">
-                <a:solidFill>
-                  <a:srgbClr val="1F4E9C"/>
-                </a:solidFill>
-                <a:latin typeface="微软雅黑" pitchFamily="34" charset="0"/>
-                <a:ea typeface="微软雅黑" pitchFamily="34" charset="-122"/>
-                <a:cs typeface="微软雅黑" pitchFamily="34" charset="-120"/>
-              </a:rPr>
-              <a:t>•  </a:t>
-            </a:r>
-            <a:pPr algn="l" indent="0" marL="0">
-              <a:lnSpc>
-                <a:spcPct val="115000"/>
-              </a:lnSpc>
-              <a:buNone/>
-            </a:pPr>
-            <a:r>
-              <a:rPr lang="en-US" sz="1800" b="1" dirty="0">
-                <a:solidFill>
-                  <a:srgbClr val="000000"/>
-                </a:solidFill>
-              </a:rPr>
               <a:t>模仿题</a:t>
             </a:r>
-            <a:pPr algn="l" indent="0" marL="0">
-              <a:lnSpc>
-                <a:spcPct val="115000"/>
-              </a:lnSpc>
-              <a:buNone/>
-            </a:pPr>
             <a:r>
               <a:rPr lang="en-US" sz="1800" dirty="0">
                 <a:solidFill>
@@ -4153,13 +3873,12 @@
             <a:avLst/>
           </a:prstGeom>
           <a:noFill/>
-          <a:ln/>
         </p:spPr>
         <p:txBody>
           <a:bodyPr wrap="square" rtlCol="0" anchor="t"/>
           <a:lstStyle/>
           <a:p>
-            <a:pPr algn="l" indent="0" marL="0">
+            <a:pPr marL="0" indent="0" algn="l">
               <a:buNone/>
             </a:pPr>
             <a:r>
@@ -4167,9 +3886,9 @@
                 <a:solidFill>
                   <a:srgbClr val="8A9099"/>
                 </a:solidFill>
-                <a:latin typeface="微软雅黑" pitchFamily="34" charset="0"/>
-                <a:ea typeface="微软雅黑" pitchFamily="34" charset="-122"/>
-                <a:cs typeface="微软雅黑" pitchFamily="34" charset="-120"/>
+                <a:latin typeface="微软雅黑" panose="020B0503020204020204" pitchFamily="34" charset="-122"/>
+                <a:ea typeface="微软雅黑" panose="020B0503020204020204" pitchFamily="34" charset="-122"/>
+                <a:cs typeface="微软雅黑" panose="020B0503020204020204" pitchFamily="34" charset="-120"/>
               </a:rPr>
               <a:t>默写要求：合上资料能写出栈队定义与操作、三个判满式；参考答案在本PPT最后两页，课后自行对照</a:t>
             </a:r>
@@ -4187,7 +3906,7 @@
 
 <file path=ppt/slides/slide15.xml><?xml version="1.0" encoding="utf-8"?>
 <p:sld xmlns:a="http://schemas.openxmlformats.org/drawingml/2006/main" xmlns:r="http://schemas.openxmlformats.org/officeDocument/2006/relationships" xmlns:p="http://schemas.openxmlformats.org/presentationml/2006/main">
-  <p:cSld name="Slide 15">
+  <p:cSld>
     <p:bg>
       <p:bgPr>
         <a:blipFill dpi="0" rotWithShape="1">
@@ -4231,13 +3950,12 @@
             <a:avLst/>
           </a:prstGeom>
           <a:noFill/>
-          <a:ln/>
         </p:spPr>
         <p:txBody>
           <a:bodyPr wrap="square" rtlCol="0" anchor="ctr"/>
           <a:lstStyle/>
           <a:p>
-            <a:pPr algn="r" indent="0" marL="0">
+            <a:pPr marL="0" indent="0" algn="r">
               <a:buNone/>
             </a:pPr>
             <a:r>
@@ -4245,9 +3963,9 @@
                 <a:solidFill>
                   <a:srgbClr val="8A9099"/>
                 </a:solidFill>
-                <a:latin typeface="微软雅黑" pitchFamily="34" charset="0"/>
-                <a:ea typeface="微软雅黑" pitchFamily="34" charset="-122"/>
-                <a:cs typeface="微软雅黑" pitchFamily="34" charset="-120"/>
+                <a:latin typeface="微软雅黑" panose="020B0503020204020204" pitchFamily="34" charset="-122"/>
+                <a:ea typeface="微软雅黑" panose="020B0503020204020204" pitchFamily="34" charset="-122"/>
+                <a:cs typeface="微软雅黑" panose="020B0503020204020204" pitchFamily="34" charset="-120"/>
               </a:rPr>
               <a:t>15 / 16</a:t>
             </a:r>
@@ -4270,13 +3988,12 @@
             <a:avLst/>
           </a:prstGeom>
           <a:noFill/>
-          <a:ln/>
         </p:spPr>
         <p:txBody>
           <a:bodyPr wrap="square" rtlCol="0" anchor="ctr"/>
           <a:lstStyle/>
           <a:p>
-            <a:pPr algn="l" indent="0" marL="0">
+            <a:pPr marL="0" indent="0" algn="l">
               <a:buNone/>
             </a:pPr>
             <a:r>
@@ -4284,9 +4001,9 @@
                 <a:solidFill>
                   <a:srgbClr val="1F4E9C"/>
                 </a:solidFill>
-                <a:latin typeface="微软雅黑" pitchFamily="34" charset="0"/>
-                <a:ea typeface="微软雅黑" pitchFamily="34" charset="-122"/>
-                <a:cs typeface="微软雅黑" pitchFamily="34" charset="-120"/>
+                <a:latin typeface="微软雅黑" panose="020B0503020204020204" pitchFamily="34" charset="-122"/>
+                <a:ea typeface="微软雅黑" panose="020B0503020204020204" pitchFamily="34" charset="-122"/>
+                <a:cs typeface="微软雅黑" panose="020B0503020204020204" pitchFamily="34" charset="-120"/>
               </a:rPr>
               <a:t>参考答案 · 跟练题</a:t>
             </a:r>
@@ -4309,13 +4026,12 @@
             <a:avLst/>
           </a:prstGeom>
           <a:noFill/>
-          <a:ln/>
         </p:spPr>
         <p:txBody>
           <a:bodyPr wrap="square" rtlCol="0" anchor="ctr"/>
           <a:lstStyle/>
           <a:p>
-            <a:pPr algn="l" indent="0" marL="0">
+            <a:pPr marL="0" indent="0" algn="l">
               <a:buNone/>
             </a:pPr>
             <a:r>
@@ -4323,9 +4039,9 @@
                 <a:solidFill>
                   <a:srgbClr val="1F2329"/>
                 </a:solidFill>
-                <a:latin typeface="微软雅黑" pitchFamily="34" charset="0"/>
-                <a:ea typeface="微软雅黑" pitchFamily="34" charset="-122"/>
-                <a:cs typeface="微软雅黑" pitchFamily="34" charset="-120"/>
+                <a:latin typeface="微软雅黑" panose="020B0503020204020204" pitchFamily="34" charset="-122"/>
+                <a:ea typeface="微软雅黑" panose="020B0503020204020204" pitchFamily="34" charset="-122"/>
+                <a:cs typeface="微软雅黑" panose="020B0503020204020204" pitchFamily="34" charset="-120"/>
               </a:rPr>
               <a:t>跟练题参考答案（自行对照）</a:t>
             </a:r>
@@ -4350,7 +4066,6 @@
           <a:solidFill>
             <a:srgbClr val="F7F9FC"/>
           </a:solidFill>
-          <a:ln/>
         </p:spPr>
       </p:sp>
       <p:sp>
@@ -4370,7 +4085,6 @@
           <a:solidFill>
             <a:srgbClr val="1F4E9C"/>
           </a:solidFill>
-          <a:ln/>
         </p:spPr>
       </p:sp>
       <p:sp>
@@ -4388,13 +4102,12 @@
             <a:avLst/>
           </a:prstGeom>
           <a:noFill/>
-          <a:ln/>
         </p:spPr>
         <p:txBody>
           <a:bodyPr wrap="square" rtlCol="0" anchor="t"/>
           <a:lstStyle/>
           <a:p>
-            <a:pPr algn="l" indent="0" marL="0">
+            <a:pPr marL="0" indent="0" algn="l">
               <a:lnSpc>
                 <a:spcPct val="125000"/>
               </a:lnSpc>
@@ -4405,9 +4118,9 @@
                 <a:solidFill>
                   <a:srgbClr val="1F2329"/>
                 </a:solidFill>
-                <a:latin typeface="Consolas" pitchFamily="34" charset="0"/>
-                <a:ea typeface="Consolas" pitchFamily="34" charset="-122"/>
-                <a:cs typeface="Consolas" pitchFamily="34" charset="-120"/>
+                <a:latin typeface="Consolas" panose="020B0609020204030204" pitchFamily="34" charset="0"/>
+                <a:ea typeface="Consolas" panose="020B0609020204030204" pitchFamily="34" charset="-122"/>
+                <a:cs typeface="Consolas" panose="020B0609020204030204" pitchFamily="34" charset="-120"/>
               </a:rPr>
               <a:t>typedef struct{ int data[MaxSize]; int top; }SqStack;
 Push: if(top==MaxSize-1) 满; data[++top]=elem;
@@ -4437,13 +4150,12 @@
             <a:avLst/>
           </a:prstGeom>
           <a:noFill/>
-          <a:ln/>
         </p:spPr>
         <p:txBody>
           <a:bodyPr wrap="square" rtlCol="0" anchor="t"/>
           <a:lstStyle/>
           <a:p>
-            <a:pPr algn="l" indent="0" marL="0">
+            <a:pPr marL="0" indent="0" algn="l">
               <a:buNone/>
             </a:pPr>
             <a:r>
@@ -4451,9 +4163,9 @@
                 <a:solidFill>
                   <a:srgbClr val="8A9099"/>
                 </a:solidFill>
-                <a:latin typeface="微软雅黑" pitchFamily="34" charset="0"/>
-                <a:ea typeface="微软雅黑" pitchFamily="34" charset="-122"/>
-                <a:cs typeface="微软雅黑" pitchFamily="34" charset="-120"/>
+                <a:latin typeface="微软雅黑" panose="020B0503020204020204" pitchFamily="34" charset="-122"/>
+                <a:ea typeface="微软雅黑" panose="020B0503020204020204" pitchFamily="34" charset="-122"/>
+                <a:cs typeface="微软雅黑" panose="020B0503020204020204" pitchFamily="34" charset="-120"/>
               </a:rPr>
               <a:t>判满三策略：牺牲一单元 (rear+1)%MaxSize==front；加 size 则 size==MaxSize；加 tag 则 front==rear 且 tag==1</a:t>
             </a:r>
@@ -4471,7 +4183,7 @@
 
 <file path=ppt/slides/slide16.xml><?xml version="1.0" encoding="utf-8"?>
 <p:sld xmlns:a="http://schemas.openxmlformats.org/drawingml/2006/main" xmlns:r="http://schemas.openxmlformats.org/officeDocument/2006/relationships" xmlns:p="http://schemas.openxmlformats.org/presentationml/2006/main">
-  <p:cSld name="Slide 16">
+  <p:cSld>
     <p:bg>
       <p:bgPr>
         <a:blipFill dpi="0" rotWithShape="1">
@@ -4515,13 +4227,12 @@
             <a:avLst/>
           </a:prstGeom>
           <a:noFill/>
-          <a:ln/>
         </p:spPr>
         <p:txBody>
           <a:bodyPr wrap="square" rtlCol="0" anchor="ctr"/>
           <a:lstStyle/>
           <a:p>
-            <a:pPr algn="r" indent="0" marL="0">
+            <a:pPr marL="0" indent="0" algn="r">
               <a:buNone/>
             </a:pPr>
             <a:r>
@@ -4529,9 +4240,9 @@
                 <a:solidFill>
                   <a:srgbClr val="8A9099"/>
                 </a:solidFill>
-                <a:latin typeface="微软雅黑" pitchFamily="34" charset="0"/>
-                <a:ea typeface="微软雅黑" pitchFamily="34" charset="-122"/>
-                <a:cs typeface="微软雅黑" pitchFamily="34" charset="-120"/>
+                <a:latin typeface="微软雅黑" panose="020B0503020204020204" pitchFamily="34" charset="-122"/>
+                <a:ea typeface="微软雅黑" panose="020B0503020204020204" pitchFamily="34" charset="-122"/>
+                <a:cs typeface="微软雅黑" panose="020B0503020204020204" pitchFamily="34" charset="-120"/>
               </a:rPr>
               <a:t>16 / 16</a:t>
             </a:r>
@@ -4554,13 +4265,12 @@
             <a:avLst/>
           </a:prstGeom>
           <a:noFill/>
-          <a:ln/>
         </p:spPr>
         <p:txBody>
           <a:bodyPr wrap="square" rtlCol="0" anchor="ctr"/>
           <a:lstStyle/>
           <a:p>
-            <a:pPr algn="l" indent="0" marL="0">
+            <a:pPr marL="0" indent="0" algn="l">
               <a:buNone/>
             </a:pPr>
             <a:r>
@@ -4568,9 +4278,9 @@
                 <a:solidFill>
                   <a:srgbClr val="1F4E9C"/>
                 </a:solidFill>
-                <a:latin typeface="微软雅黑" pitchFamily="34" charset="0"/>
-                <a:ea typeface="微软雅黑" pitchFamily="34" charset="-122"/>
-                <a:cs typeface="微软雅黑" pitchFamily="34" charset="-120"/>
+                <a:latin typeface="微软雅黑" panose="020B0503020204020204" pitchFamily="34" charset="-122"/>
+                <a:ea typeface="微软雅黑" panose="020B0503020204020204" pitchFamily="34" charset="-122"/>
+                <a:cs typeface="微软雅黑" panose="020B0503020204020204" pitchFamily="34" charset="-120"/>
               </a:rPr>
               <a:t>参考答案 · 模仿题</a:t>
             </a:r>
@@ -4593,13 +4303,12 @@
             <a:avLst/>
           </a:prstGeom>
           <a:noFill/>
-          <a:ln/>
         </p:spPr>
         <p:txBody>
           <a:bodyPr wrap="square" rtlCol="0" anchor="ctr"/>
           <a:lstStyle/>
           <a:p>
-            <a:pPr algn="l" indent="0" marL="0">
+            <a:pPr marL="0" indent="0" algn="l">
               <a:buNone/>
             </a:pPr>
             <a:r>
@@ -4607,9 +4316,9 @@
                 <a:solidFill>
                   <a:srgbClr val="1F2329"/>
                 </a:solidFill>
-                <a:latin typeface="微软雅黑" pitchFamily="34" charset="0"/>
-                <a:ea typeface="微软雅黑" pitchFamily="34" charset="-122"/>
-                <a:cs typeface="微软雅黑" pitchFamily="34" charset="-120"/>
+                <a:latin typeface="微软雅黑" panose="020B0503020204020204" pitchFamily="34" charset="-122"/>
+                <a:ea typeface="微软雅黑" panose="020B0503020204020204" pitchFamily="34" charset="-122"/>
+                <a:cs typeface="微软雅黑" panose="020B0503020204020204" pitchFamily="34" charset="-120"/>
               </a:rPr>
               <a:t>模仿题参考答案（自行对照）</a:t>
             </a:r>
@@ -4632,13 +4341,12 @@
             <a:avLst/>
           </a:prstGeom>
           <a:noFill/>
-          <a:ln/>
         </p:spPr>
         <p:txBody>
           <a:bodyPr wrap="square" rtlCol="0" anchor="t"/>
           <a:lstStyle/>
           <a:p>
-            <a:pPr algn="l" indent="0" marL="0">
+            <a:pPr marL="0" indent="0" algn="l">
               <a:buNone/>
             </a:pPr>
             <a:r>
@@ -4668,13 +4376,12 @@
             <a:avLst/>
           </a:prstGeom>
           <a:noFill/>
-          <a:ln/>
         </p:spPr>
         <p:txBody>
           <a:bodyPr wrap="square" rtlCol="0" anchor="t"/>
           <a:lstStyle/>
           <a:p>
-            <a:pPr algn="l" indent="0" marL="0">
+            <a:pPr marL="0" indent="0" algn="l">
               <a:lnSpc>
                 <a:spcPct val="115000"/>
               </a:lnSpc>
@@ -4685,25 +4392,68 @@
                 <a:solidFill>
                   <a:srgbClr val="1F4E9C"/>
                 </a:solidFill>
-                <a:latin typeface="微软雅黑" pitchFamily="34" charset="0"/>
-                <a:ea typeface="微软雅黑" pitchFamily="34" charset="-122"/>
-                <a:cs typeface="微软雅黑" pitchFamily="34" charset="-120"/>
+                <a:latin typeface="微软雅黑" panose="020B0503020204020204" pitchFamily="34" charset="-122"/>
+                <a:ea typeface="微软雅黑" panose="020B0503020204020204" pitchFamily="34" charset="-122"/>
+                <a:cs typeface="微软雅黑" panose="020B0503020204020204" pitchFamily="34" charset="-120"/>
               </a:rPr>
               <a:t>•  </a:t>
             </a:r>
-            <a:pPr algn="l" indent="0" marL="0">
+            <a:r>
+              <a:rPr lang="en-US" sz="1800" dirty="0">
+                <a:solidFill>
+                  <a:srgbClr val="000000"/>
+                </a:solidFill>
+              </a:rPr>
+              <a:t>元素个数 = (rear-front+MaxSize)%MaxSize = (0-1+6)%6 = 5，队里有5个元素</a:t>
+            </a:r>
+            <a:endParaRPr lang="en-US" sz="1800" dirty="0"/>
+          </a:p>
+        </p:txBody>
+      </p:sp>
+      <p:sp>
+        <p:nvSpPr>
+          <p:cNvPr id="7" name="Text 5"/>
+          <p:cNvSpPr/>
+          <p:nvPr/>
+        </p:nvSpPr>
+        <p:spPr>
+          <a:xfrm>
+            <a:off x="896112" y="3753612"/>
+            <a:ext cx="10454335" cy="740664"/>
+          </a:xfrm>
+          <a:prstGeom prst="rect">
+            <a:avLst/>
+          </a:prstGeom>
+          <a:noFill/>
+        </p:spPr>
+        <p:txBody>
+          <a:bodyPr wrap="square" rtlCol="0" anchor="t"/>
+          <a:lstStyle/>
+          <a:p>
+            <a:pPr marL="0" indent="0" algn="l">
               <a:lnSpc>
                 <a:spcPct val="115000"/>
               </a:lnSpc>
               <a:buNone/>
             </a:pPr>
             <a:r>
+              <a:rPr lang="en-US" sz="1800" b="1" dirty="0">
+                <a:solidFill>
+                  <a:srgbClr val="1F4E9C"/>
+                </a:solidFill>
+                <a:latin typeface="微软雅黑" panose="020B0503020204020204" pitchFamily="34" charset="-122"/>
+                <a:ea typeface="微软雅黑" panose="020B0503020204020204" pitchFamily="34" charset="-122"/>
+                <a:cs typeface="微软雅黑" panose="020B0503020204020204" pitchFamily="34" charset="-120"/>
+              </a:rPr>
+              <a:t>•  </a:t>
+            </a:r>
+            <a:r>
               <a:rPr lang="en-US" sz="1800" dirty="0">
                 <a:solidFill>
                   <a:srgbClr val="000000"/>
                 </a:solidFill>
               </a:rPr>
-              <a:t>元素个数 = (rear-front+MaxSize)%MaxSize = (0-1+6)%6 = 5，队里有5个元素</a:t>
+              <a:t>判满：(rear+1)%MaxSize = (0+1)%6 = 1 == front，成立，所以队已满（牺牲一单元，最多存5个）</a:t>
             </a:r>
             <a:endParaRPr lang="en-US" sz="1800" dirty="0"/>
           </a:p>
@@ -4711,26 +4461,25 @@
       </p:sp>
       <p:sp>
         <p:nvSpPr>
-          <p:cNvPr id="7" name="Text 5"/>
-          <p:cNvSpPr/>
-          <p:nvPr/>
-        </p:nvSpPr>
-        <p:spPr>
-          <a:xfrm>
-            <a:off x="896112" y="3753612"/>
+          <p:cNvPr id="8" name="Text 6"/>
+          <p:cNvSpPr/>
+          <p:nvPr/>
+        </p:nvSpPr>
+        <p:spPr>
+          <a:xfrm>
+            <a:off x="896112" y="4567428"/>
             <a:ext cx="10454335" cy="740664"/>
           </a:xfrm>
           <a:prstGeom prst="rect">
             <a:avLst/>
           </a:prstGeom>
           <a:noFill/>
-          <a:ln/>
         </p:spPr>
         <p:txBody>
           <a:bodyPr wrap="square" rtlCol="0" anchor="t"/>
           <a:lstStyle/>
           <a:p>
-            <a:pPr algn="l" indent="0" marL="0">
+            <a:pPr marL="0" indent="0" algn="l">
               <a:lnSpc>
                 <a:spcPct val="115000"/>
               </a:lnSpc>
@@ -4741,74 +4490,12 @@
                 <a:solidFill>
                   <a:srgbClr val="1F4E9C"/>
                 </a:solidFill>
-                <a:latin typeface="微软雅黑" pitchFamily="34" charset="0"/>
-                <a:ea typeface="微软雅黑" pitchFamily="34" charset="-122"/>
-                <a:cs typeface="微软雅黑" pitchFamily="34" charset="-120"/>
+                <a:latin typeface="微软雅黑" panose="020B0503020204020204" pitchFamily="34" charset="-122"/>
+                <a:ea typeface="微软雅黑" panose="020B0503020204020204" pitchFamily="34" charset="-122"/>
+                <a:cs typeface="微软雅黑" panose="020B0503020204020204" pitchFamily="34" charset="-120"/>
               </a:rPr>
               <a:t>•  </a:t>
             </a:r>
-            <a:pPr algn="l" indent="0" marL="0">
-              <a:lnSpc>
-                <a:spcPct val="115000"/>
-              </a:lnSpc>
-              <a:buNone/>
-            </a:pPr>
-            <a:r>
-              <a:rPr lang="en-US" sz="1800" dirty="0">
-                <a:solidFill>
-                  <a:srgbClr val="000000"/>
-                </a:solidFill>
-              </a:rPr>
-              <a:t>判满：(rear+1)%MaxSize = (0+1)%6 = 1 == front，成立，所以队已满（牺牲一单元，最多存5个）</a:t>
-            </a:r>
-            <a:endParaRPr lang="en-US" sz="1800" dirty="0"/>
-          </a:p>
-        </p:txBody>
-      </p:sp>
-      <p:sp>
-        <p:nvSpPr>
-          <p:cNvPr id="8" name="Text 6"/>
-          <p:cNvSpPr/>
-          <p:nvPr/>
-        </p:nvSpPr>
-        <p:spPr>
-          <a:xfrm>
-            <a:off x="896112" y="4567428"/>
-            <a:ext cx="10454335" cy="740664"/>
-          </a:xfrm>
-          <a:prstGeom prst="rect">
-            <a:avLst/>
-          </a:prstGeom>
-          <a:noFill/>
-          <a:ln/>
-        </p:spPr>
-        <p:txBody>
-          <a:bodyPr wrap="square" rtlCol="0" anchor="t"/>
-          <a:lstStyle/>
-          <a:p>
-            <a:pPr algn="l" indent="0" marL="0">
-              <a:lnSpc>
-                <a:spcPct val="115000"/>
-              </a:lnSpc>
-              <a:buNone/>
-            </a:pPr>
-            <a:r>
-              <a:rPr lang="en-US" sz="1800" b="1" dirty="0">
-                <a:solidFill>
-                  <a:srgbClr val="1F4E9C"/>
-                </a:solidFill>
-                <a:latin typeface="微软雅黑" pitchFamily="34" charset="0"/>
-                <a:ea typeface="微软雅黑" pitchFamily="34" charset="-122"/>
-                <a:cs typeface="微软雅黑" pitchFamily="34" charset="-120"/>
-              </a:rPr>
-              <a:t>•  </a:t>
-            </a:r>
-            <a:pPr algn="l" indent="0" marL="0">
-              <a:lnSpc>
-                <a:spcPct val="115000"/>
-              </a:lnSpc>
-              <a:buNone/>
-            </a:pPr>
             <a:r>
               <a:rPr lang="en-US" sz="1800" dirty="0">
                 <a:solidFill>
@@ -4831,7 +4518,7 @@
 
 <file path=ppt/slides/slide2.xml><?xml version="1.0" encoding="utf-8"?>
 <p:sld xmlns:a="http://schemas.openxmlformats.org/drawingml/2006/main" xmlns:r="http://schemas.openxmlformats.org/officeDocument/2006/relationships" xmlns:p="http://schemas.openxmlformats.org/presentationml/2006/main">
-  <p:cSld name="Slide 2">
+  <p:cSld>
     <p:bg>
       <p:bgPr>
         <a:blipFill dpi="0" rotWithShape="1">
@@ -4875,13 +4562,12 @@
             <a:avLst/>
           </a:prstGeom>
           <a:noFill/>
-          <a:ln/>
         </p:spPr>
         <p:txBody>
           <a:bodyPr wrap="square" rtlCol="0" anchor="ctr"/>
           <a:lstStyle/>
           <a:p>
-            <a:pPr algn="r" indent="0" marL="0">
+            <a:pPr marL="0" indent="0" algn="r">
               <a:buNone/>
             </a:pPr>
             <a:r>
@@ -4889,9 +4575,9 @@
                 <a:solidFill>
                   <a:srgbClr val="8A9099"/>
                 </a:solidFill>
-                <a:latin typeface="微软雅黑" pitchFamily="34" charset="0"/>
-                <a:ea typeface="微软雅黑" pitchFamily="34" charset="-122"/>
-                <a:cs typeface="微软雅黑" pitchFamily="34" charset="-120"/>
+                <a:latin typeface="微软雅黑" panose="020B0503020204020204" pitchFamily="34" charset="-122"/>
+                <a:ea typeface="微软雅黑" panose="020B0503020204020204" pitchFamily="34" charset="-122"/>
+                <a:cs typeface="微软雅黑" panose="020B0503020204020204" pitchFamily="34" charset="-120"/>
               </a:rPr>
               <a:t>2 / 16</a:t>
             </a:r>
@@ -4914,13 +4600,12 @@
             <a:avLst/>
           </a:prstGeom>
           <a:noFill/>
-          <a:ln/>
         </p:spPr>
         <p:txBody>
           <a:bodyPr wrap="square" rtlCol="0" anchor="ctr"/>
           <a:lstStyle/>
           <a:p>
-            <a:pPr algn="l" indent="0" marL="0">
+            <a:pPr marL="0" indent="0" algn="l">
               <a:buNone/>
             </a:pPr>
             <a:r>
@@ -4928,9 +4613,9 @@
                 <a:solidFill>
                   <a:srgbClr val="1F4E9C"/>
                 </a:solidFill>
-                <a:latin typeface="微软雅黑" pitchFamily="34" charset="0"/>
-                <a:ea typeface="微软雅黑" pitchFamily="34" charset="-122"/>
-                <a:cs typeface="微软雅黑" pitchFamily="34" charset="-120"/>
+                <a:latin typeface="微软雅黑" panose="020B0503020204020204" pitchFamily="34" charset="-122"/>
+                <a:ea typeface="微软雅黑" panose="020B0503020204020204" pitchFamily="34" charset="-122"/>
+                <a:cs typeface="微软雅黑" panose="020B0503020204020204" pitchFamily="34" charset="-120"/>
               </a:rPr>
               <a:t>引题</a:t>
             </a:r>
@@ -4953,13 +4638,12 @@
             <a:avLst/>
           </a:prstGeom>
           <a:noFill/>
-          <a:ln/>
         </p:spPr>
         <p:txBody>
           <a:bodyPr wrap="square" rtlCol="0" anchor="ctr"/>
           <a:lstStyle/>
           <a:p>
-            <a:pPr algn="l" indent="0" marL="0">
+            <a:pPr marL="0" indent="0" algn="l">
               <a:buNone/>
             </a:pPr>
             <a:r>
@@ -4967,11 +4651,11 @@
                 <a:solidFill>
                   <a:srgbClr val="1F2329"/>
                 </a:solidFill>
-                <a:latin typeface="微软雅黑" pitchFamily="34" charset="0"/>
-                <a:ea typeface="微软雅黑" pitchFamily="34" charset="-122"/>
-                <a:cs typeface="微软雅黑" pitchFamily="34" charset="-120"/>
-              </a:rPr>
-              <a:t>为什么要限制只能在一端操作</a:t>
+                <a:latin typeface="微软雅黑" panose="020B0503020204020204" pitchFamily="34" charset="-122"/>
+                <a:ea typeface="微软雅黑" panose="020B0503020204020204" pitchFamily="34" charset="-122"/>
+                <a:cs typeface="微软雅黑" panose="020B0503020204020204" pitchFamily="34" charset="-120"/>
+              </a:rPr>
+              <a:t>为什么要限制只能在端操作</a:t>
             </a:r>
             <a:endParaRPr lang="en-US" sz="2800" dirty="0"/>
           </a:p>
@@ -4992,13 +4676,12 @@
             <a:avLst/>
           </a:prstGeom>
           <a:noFill/>
-          <a:ln/>
         </p:spPr>
         <p:txBody>
           <a:bodyPr wrap="square" rtlCol="0" anchor="t"/>
           <a:lstStyle/>
           <a:p>
-            <a:pPr algn="l" indent="0" marL="0">
+            <a:pPr marL="0" indent="0" algn="l">
               <a:lnSpc>
                 <a:spcPct val="115000"/>
               </a:lnSpc>
@@ -5009,25 +4692,68 @@
                 <a:solidFill>
                   <a:srgbClr val="1F4E9C"/>
                 </a:solidFill>
-                <a:latin typeface="微软雅黑" pitchFamily="34" charset="0"/>
-                <a:ea typeface="微软雅黑" pitchFamily="34" charset="-122"/>
-                <a:cs typeface="微软雅黑" pitchFamily="34" charset="-120"/>
+                <a:latin typeface="微软雅黑" panose="020B0503020204020204" pitchFamily="34" charset="-122"/>
+                <a:ea typeface="微软雅黑" panose="020B0503020204020204" pitchFamily="34" charset="-122"/>
+                <a:cs typeface="微软雅黑" panose="020B0503020204020204" pitchFamily="34" charset="-120"/>
               </a:rPr>
               <a:t>•  </a:t>
             </a:r>
-            <a:pPr algn="l" indent="0" marL="0">
+            <a:r>
+              <a:rPr lang="en-US" sz="1800" dirty="0">
+                <a:solidFill>
+                  <a:srgbClr val="000000"/>
+                </a:solidFill>
+              </a:rPr>
+              <a:t>顺序表、链表哪个位置都能插删，很灵活；但很多问题只在一端操作，灵活反而用不上</a:t>
+            </a:r>
+            <a:endParaRPr lang="en-US" sz="1800" dirty="0"/>
+          </a:p>
+        </p:txBody>
+      </p:sp>
+      <p:sp>
+        <p:nvSpPr>
+          <p:cNvPr id="6" name="Text 4"/>
+          <p:cNvSpPr/>
+          <p:nvPr/>
+        </p:nvSpPr>
+        <p:spPr>
+          <a:xfrm>
+            <a:off x="896112" y="2866644"/>
+            <a:ext cx="10454335" cy="397764"/>
+          </a:xfrm>
+          <a:prstGeom prst="rect">
+            <a:avLst/>
+          </a:prstGeom>
+          <a:noFill/>
+        </p:spPr>
+        <p:txBody>
+          <a:bodyPr wrap="square" rtlCol="0" anchor="t"/>
+          <a:lstStyle/>
+          <a:p>
+            <a:pPr marL="0" indent="0" algn="l">
               <a:lnSpc>
                 <a:spcPct val="115000"/>
               </a:lnSpc>
               <a:buNone/>
             </a:pPr>
             <a:r>
+              <a:rPr lang="en-US" sz="1800" b="1" dirty="0">
+                <a:solidFill>
+                  <a:srgbClr val="1F4E9C"/>
+                </a:solidFill>
+                <a:latin typeface="微软雅黑" panose="020B0503020204020204" pitchFamily="34" charset="-122"/>
+                <a:ea typeface="微软雅黑" panose="020B0503020204020204" pitchFamily="34" charset="-122"/>
+                <a:cs typeface="微软雅黑" panose="020B0503020204020204" pitchFamily="34" charset="-120"/>
+              </a:rPr>
+              <a:t>•  </a:t>
+            </a:r>
+            <a:r>
               <a:rPr lang="en-US" sz="1800" dirty="0">
                 <a:solidFill>
                   <a:srgbClr val="000000"/>
                 </a:solidFill>
               </a:rPr>
-              <a:t>顺序表、链表哪个位置都能插删，很灵活；但很多问题只在一端操作，灵活反而用不上</a:t>
+              <a:t>栈：只在一端（栈顶）进出，后进先出，比如函数调用、括号匹配、表达式求值、递归</a:t>
             </a:r>
             <a:endParaRPr lang="en-US" sz="1800" dirty="0"/>
           </a:p>
@@ -5035,26 +4761,25 @@
       </p:sp>
       <p:sp>
         <p:nvSpPr>
-          <p:cNvPr id="6" name="Text 4"/>
-          <p:cNvSpPr/>
-          <p:nvPr/>
-        </p:nvSpPr>
-        <p:spPr>
-          <a:xfrm>
-            <a:off x="896112" y="2866644"/>
+          <p:cNvPr id="7" name="Text 5"/>
+          <p:cNvSpPr/>
+          <p:nvPr/>
+        </p:nvSpPr>
+        <p:spPr>
+          <a:xfrm>
+            <a:off x="896112" y="3337560"/>
             <a:ext cx="10454335" cy="397764"/>
           </a:xfrm>
           <a:prstGeom prst="rect">
             <a:avLst/>
           </a:prstGeom>
           <a:noFill/>
-          <a:ln/>
         </p:spPr>
         <p:txBody>
           <a:bodyPr wrap="square" rtlCol="0" anchor="t"/>
           <a:lstStyle/>
           <a:p>
-            <a:pPr algn="l" indent="0" marL="0">
+            <a:pPr marL="0" indent="0" algn="l">
               <a:lnSpc>
                 <a:spcPct val="115000"/>
               </a:lnSpc>
@@ -5065,74 +4790,12 @@
                 <a:solidFill>
                   <a:srgbClr val="1F4E9C"/>
                 </a:solidFill>
-                <a:latin typeface="微软雅黑" pitchFamily="34" charset="0"/>
-                <a:ea typeface="微软雅黑" pitchFamily="34" charset="-122"/>
-                <a:cs typeface="微软雅黑" pitchFamily="34" charset="-120"/>
+                <a:latin typeface="微软雅黑" panose="020B0503020204020204" pitchFamily="34" charset="-122"/>
+                <a:ea typeface="微软雅黑" panose="020B0503020204020204" pitchFamily="34" charset="-122"/>
+                <a:cs typeface="微软雅黑" panose="020B0503020204020204" pitchFamily="34" charset="-120"/>
               </a:rPr>
               <a:t>•  </a:t>
             </a:r>
-            <a:pPr algn="l" indent="0" marL="0">
-              <a:lnSpc>
-                <a:spcPct val="115000"/>
-              </a:lnSpc>
-              <a:buNone/>
-            </a:pPr>
-            <a:r>
-              <a:rPr lang="en-US" sz="1800" dirty="0">
-                <a:solidFill>
-                  <a:srgbClr val="000000"/>
-                </a:solidFill>
-              </a:rPr>
-              <a:t>栈：只在一端（栈顶）进出，后进先出，比如函数调用、括号匹配、表达式求值、递归</a:t>
-            </a:r>
-            <a:endParaRPr lang="en-US" sz="1800" dirty="0"/>
-          </a:p>
-        </p:txBody>
-      </p:sp>
-      <p:sp>
-        <p:nvSpPr>
-          <p:cNvPr id="7" name="Text 5"/>
-          <p:cNvSpPr/>
-          <p:nvPr/>
-        </p:nvSpPr>
-        <p:spPr>
-          <a:xfrm>
-            <a:off x="896112" y="3337560"/>
-            <a:ext cx="10454335" cy="397764"/>
-          </a:xfrm>
-          <a:prstGeom prst="rect">
-            <a:avLst/>
-          </a:prstGeom>
-          <a:noFill/>
-          <a:ln/>
-        </p:spPr>
-        <p:txBody>
-          <a:bodyPr wrap="square" rtlCol="0" anchor="t"/>
-          <a:lstStyle/>
-          <a:p>
-            <a:pPr algn="l" indent="0" marL="0">
-              <a:lnSpc>
-                <a:spcPct val="115000"/>
-              </a:lnSpc>
-              <a:buNone/>
-            </a:pPr>
-            <a:r>
-              <a:rPr lang="en-US" sz="1800" b="1" dirty="0">
-                <a:solidFill>
-                  <a:srgbClr val="1F4E9C"/>
-                </a:solidFill>
-                <a:latin typeface="微软雅黑" pitchFamily="34" charset="0"/>
-                <a:ea typeface="微软雅黑" pitchFamily="34" charset="-122"/>
-                <a:cs typeface="微软雅黑" pitchFamily="34" charset="-120"/>
-              </a:rPr>
-              <a:t>•  </a:t>
-            </a:r>
-            <a:pPr algn="l" indent="0" marL="0">
-              <a:lnSpc>
-                <a:spcPct val="115000"/>
-              </a:lnSpc>
-              <a:buNone/>
-            </a:pPr>
             <a:r>
               <a:rPr lang="en-US" sz="1800" dirty="0">
                 <a:solidFill>
@@ -5160,13 +4823,12 @@
             <a:avLst/>
           </a:prstGeom>
           <a:noFill/>
-          <a:ln/>
         </p:spPr>
         <p:txBody>
           <a:bodyPr wrap="square" rtlCol="0" anchor="t"/>
           <a:lstStyle/>
           <a:p>
-            <a:pPr algn="l" indent="0" marL="0">
+            <a:pPr marL="0" indent="0" algn="l">
               <a:buNone/>
             </a:pPr>
             <a:r>
@@ -5174,9 +4836,9 @@
                 <a:solidFill>
                   <a:srgbClr val="8A9099"/>
                 </a:solidFill>
-                <a:latin typeface="微软雅黑" pitchFamily="34" charset="0"/>
-                <a:ea typeface="微软雅黑" pitchFamily="34" charset="-122"/>
-                <a:cs typeface="微软雅黑" pitchFamily="34" charset="-120"/>
+                <a:latin typeface="微软雅黑" panose="020B0503020204020204" pitchFamily="34" charset="-122"/>
+                <a:ea typeface="微软雅黑" panose="020B0503020204020204" pitchFamily="34" charset="-122"/>
+                <a:cs typeface="微软雅黑" panose="020B0503020204020204" pitchFamily="34" charset="-120"/>
               </a:rPr>
               <a:t>栈和队列本身不难，考点全在两处：top 的约定、循环队列的判满；这一节把这两处讲透</a:t>
             </a:r>
@@ -5194,7 +4856,7 @@
 
 <file path=ppt/slides/slide3.xml><?xml version="1.0" encoding="utf-8"?>
 <p:sld xmlns:a="http://schemas.openxmlformats.org/drawingml/2006/main" xmlns:r="http://schemas.openxmlformats.org/officeDocument/2006/relationships" xmlns:p="http://schemas.openxmlformats.org/presentationml/2006/main">
-  <p:cSld name="Slide 3">
+  <p:cSld>
     <p:bg>
       <p:bgPr>
         <a:blipFill dpi="0" rotWithShape="1">
@@ -5238,13 +4900,12 @@
             <a:avLst/>
           </a:prstGeom>
           <a:noFill/>
-          <a:ln/>
         </p:spPr>
         <p:txBody>
           <a:bodyPr wrap="square" rtlCol="0" anchor="ctr"/>
           <a:lstStyle/>
           <a:p>
-            <a:pPr algn="r" indent="0" marL="0">
+            <a:pPr marL="0" indent="0" algn="r">
               <a:buNone/>
             </a:pPr>
             <a:r>
@@ -5252,9 +4913,9 @@
                 <a:solidFill>
                   <a:srgbClr val="8A9099"/>
                 </a:solidFill>
-                <a:latin typeface="微软雅黑" pitchFamily="34" charset="0"/>
-                <a:ea typeface="微软雅黑" pitchFamily="34" charset="-122"/>
-                <a:cs typeface="微软雅黑" pitchFamily="34" charset="-120"/>
+                <a:latin typeface="微软雅黑" panose="020B0503020204020204" pitchFamily="34" charset="-122"/>
+                <a:ea typeface="微软雅黑" panose="020B0503020204020204" pitchFamily="34" charset="-122"/>
+                <a:cs typeface="微软雅黑" panose="020B0503020204020204" pitchFamily="34" charset="-120"/>
               </a:rPr>
               <a:t>3 / 16</a:t>
             </a:r>
@@ -5277,13 +4938,12 @@
             <a:avLst/>
           </a:prstGeom>
           <a:noFill/>
-          <a:ln/>
         </p:spPr>
         <p:txBody>
           <a:bodyPr wrap="square" rtlCol="0" anchor="ctr"/>
           <a:lstStyle/>
           <a:p>
-            <a:pPr algn="l" indent="0" marL="0">
+            <a:pPr marL="0" indent="0" algn="l">
               <a:buNone/>
             </a:pPr>
             <a:r>
@@ -5291,9 +4951,9 @@
                 <a:solidFill>
                   <a:srgbClr val="1F4E9C"/>
                 </a:solidFill>
-                <a:latin typeface="微软雅黑" pitchFamily="34" charset="0"/>
-                <a:ea typeface="微软雅黑" pitchFamily="34" charset="-122"/>
-                <a:cs typeface="微软雅黑" pitchFamily="34" charset="-120"/>
+                <a:latin typeface="微软雅黑" panose="020B0503020204020204" pitchFamily="34" charset="-122"/>
+                <a:ea typeface="微软雅黑" panose="020B0503020204020204" pitchFamily="34" charset="-122"/>
+                <a:cs typeface="微软雅黑" panose="020B0503020204020204" pitchFamily="34" charset="-120"/>
               </a:rPr>
               <a:t>顺序栈 · 定义 · 约定3</a:t>
             </a:r>
@@ -5316,13 +4976,12 @@
             <a:avLst/>
           </a:prstGeom>
           <a:noFill/>
-          <a:ln/>
         </p:spPr>
         <p:txBody>
           <a:bodyPr wrap="square" rtlCol="0" anchor="ctr"/>
           <a:lstStyle/>
           <a:p>
-            <a:pPr algn="l" indent="0" marL="0">
+            <a:pPr marL="0" indent="0" algn="l">
               <a:buNone/>
             </a:pPr>
             <a:r>
@@ -5330,9 +4989,9 @@
                 <a:solidFill>
                   <a:srgbClr val="1F2329"/>
                 </a:solidFill>
-                <a:latin typeface="微软雅黑" pitchFamily="34" charset="0"/>
-                <a:ea typeface="微软雅黑" pitchFamily="34" charset="-122"/>
-                <a:cs typeface="微软雅黑" pitchFamily="34" charset="-120"/>
+                <a:latin typeface="微软雅黑" panose="020B0503020204020204" pitchFamily="34" charset="-122"/>
+                <a:ea typeface="微软雅黑" panose="020B0503020204020204" pitchFamily="34" charset="-122"/>
+                <a:cs typeface="微软雅黑" panose="020B0503020204020204" pitchFamily="34" charset="-120"/>
               </a:rPr>
               <a:t>顺序栈与 top=-1 约定</a:t>
             </a:r>
@@ -5357,7 +5016,6 @@
           <a:solidFill>
             <a:srgbClr val="F7F9FC"/>
           </a:solidFill>
-          <a:ln/>
         </p:spPr>
       </p:sp>
       <p:sp>
@@ -5377,7 +5035,6 @@
           <a:solidFill>
             <a:srgbClr val="1F4E9C"/>
           </a:solidFill>
-          <a:ln/>
         </p:spPr>
       </p:sp>
       <p:sp>
@@ -5395,13 +5052,12 @@
             <a:avLst/>
           </a:prstGeom>
           <a:noFill/>
-          <a:ln/>
         </p:spPr>
         <p:txBody>
           <a:bodyPr wrap="square" rtlCol="0" anchor="t"/>
           <a:lstStyle/>
           <a:p>
-            <a:pPr algn="l" indent="0" marL="0">
+            <a:pPr marL="0" indent="0" algn="l">
               <a:lnSpc>
                 <a:spcPct val="125000"/>
               </a:lnSpc>
@@ -5412,9 +5068,9 @@
                 <a:solidFill>
                   <a:srgbClr val="1F2329"/>
                 </a:solidFill>
-                <a:latin typeface="Consolas" pitchFamily="34" charset="0"/>
-                <a:ea typeface="Consolas" pitchFamily="34" charset="-122"/>
-                <a:cs typeface="Consolas" pitchFamily="34" charset="-120"/>
+                <a:latin typeface="Consolas" panose="020B0609020204030204" pitchFamily="34" charset="0"/>
+                <a:ea typeface="Consolas" panose="020B0609020204030204" pitchFamily="34" charset="-122"/>
+                <a:cs typeface="Consolas" panose="020B0609020204030204" pitchFamily="34" charset="-120"/>
               </a:rPr>
               <a:t>#define MaxSize 100
 typedef struct{ int data[MaxSize]; int top; }SqStack;
@@ -5440,13 +5096,12 @@
             <a:avLst/>
           </a:prstGeom>
           <a:noFill/>
-          <a:ln/>
         </p:spPr>
         <p:txBody>
           <a:bodyPr wrap="square" rtlCol="0" anchor="t"/>
           <a:lstStyle/>
           <a:p>
-            <a:pPr algn="l" indent="0" marL="0">
+            <a:pPr marL="0" indent="0" algn="l">
               <a:lnSpc>
                 <a:spcPct val="115000"/>
               </a:lnSpc>
@@ -5457,25 +5112,68 @@
                 <a:solidFill>
                   <a:srgbClr val="1F4E9C"/>
                 </a:solidFill>
-                <a:latin typeface="微软雅黑" pitchFamily="34" charset="0"/>
-                <a:ea typeface="微软雅黑" pitchFamily="34" charset="-122"/>
-                <a:cs typeface="微软雅黑" pitchFamily="34" charset="-120"/>
+                <a:latin typeface="微软雅黑" panose="020B0503020204020204" pitchFamily="34" charset="-122"/>
+                <a:ea typeface="微软雅黑" panose="020B0503020204020204" pitchFamily="34" charset="-122"/>
+                <a:cs typeface="微软雅黑" panose="020B0503020204020204" pitchFamily="34" charset="-120"/>
               </a:rPr>
               <a:t>•  </a:t>
             </a:r>
-            <a:pPr algn="l" indent="0" marL="0">
+            <a:r>
+              <a:rPr lang="en-US" sz="1800" dirty="0">
+                <a:solidFill>
+                  <a:srgbClr val="000000"/>
+                </a:solidFill>
+              </a:rPr>
+              <a:t>栈就是一个数组 data 加一个 top，top 记栈顶元素的下标</a:t>
+            </a:r>
+            <a:endParaRPr lang="en-US" sz="1800" dirty="0"/>
+          </a:p>
+        </p:txBody>
+      </p:sp>
+      <p:sp>
+        <p:nvSpPr>
+          <p:cNvPr id="9" name="Text 7"/>
+          <p:cNvSpPr/>
+          <p:nvPr/>
+        </p:nvSpPr>
+        <p:spPr>
+          <a:xfrm>
+            <a:off x="896112" y="4338828"/>
+            <a:ext cx="10454335" cy="740664"/>
+          </a:xfrm>
+          <a:prstGeom prst="rect">
+            <a:avLst/>
+          </a:prstGeom>
+          <a:noFill/>
+        </p:spPr>
+        <p:txBody>
+          <a:bodyPr wrap="square" rtlCol="0" anchor="t"/>
+          <a:lstStyle/>
+          <a:p>
+            <a:pPr marL="0" indent="0" algn="l">
               <a:lnSpc>
                 <a:spcPct val="115000"/>
               </a:lnSpc>
               <a:buNone/>
             </a:pPr>
             <a:r>
+              <a:rPr lang="en-US" sz="1800" b="1" dirty="0">
+                <a:solidFill>
+                  <a:srgbClr val="1F4E9C"/>
+                </a:solidFill>
+                <a:latin typeface="微软雅黑" panose="020B0503020204020204" pitchFamily="34" charset="-122"/>
+                <a:ea typeface="微软雅黑" panose="020B0503020204020204" pitchFamily="34" charset="-122"/>
+                <a:cs typeface="微软雅黑" panose="020B0503020204020204" pitchFamily="34" charset="-120"/>
+              </a:rPr>
+              <a:t>•  </a:t>
+            </a:r>
+            <a:r>
               <a:rPr lang="en-US" sz="1800" dirty="0">
                 <a:solidFill>
                   <a:srgbClr val="000000"/>
                 </a:solidFill>
               </a:rPr>
-              <a:t>栈就是一个数组 data 加一个 top，top 记栈顶元素的下标</a:t>
+              <a:t>本课程约定 top=-1 表示栈空，也就是 top 指向栈顶元素本身；这是约定3，本节就地定下</a:t>
             </a:r>
             <a:endParaRPr lang="en-US" sz="1800" dirty="0"/>
           </a:p>
@@ -5483,26 +5181,25 @@
       </p:sp>
       <p:sp>
         <p:nvSpPr>
-          <p:cNvPr id="9" name="Text 7"/>
-          <p:cNvSpPr/>
-          <p:nvPr/>
-        </p:nvSpPr>
-        <p:spPr>
-          <a:xfrm>
-            <a:off x="896112" y="4338828"/>
+          <p:cNvPr id="10" name="Text 8"/>
+          <p:cNvSpPr/>
+          <p:nvPr/>
+        </p:nvSpPr>
+        <p:spPr>
+          <a:xfrm>
+            <a:off x="896112" y="5152644"/>
             <a:ext cx="10454335" cy="740664"/>
           </a:xfrm>
           <a:prstGeom prst="rect">
             <a:avLst/>
           </a:prstGeom>
           <a:noFill/>
-          <a:ln/>
         </p:spPr>
         <p:txBody>
           <a:bodyPr wrap="square" rtlCol="0" anchor="t"/>
           <a:lstStyle/>
           <a:p>
-            <a:pPr algn="l" indent="0" marL="0">
+            <a:pPr marL="0" indent="0" algn="l">
               <a:lnSpc>
                 <a:spcPct val="115000"/>
               </a:lnSpc>
@@ -5513,74 +5210,12 @@
                 <a:solidFill>
                   <a:srgbClr val="1F4E9C"/>
                 </a:solidFill>
-                <a:latin typeface="微软雅黑" pitchFamily="34" charset="0"/>
-                <a:ea typeface="微软雅黑" pitchFamily="34" charset="-122"/>
-                <a:cs typeface="微软雅黑" pitchFamily="34" charset="-120"/>
+                <a:latin typeface="微软雅黑" panose="020B0503020204020204" pitchFamily="34" charset="-122"/>
+                <a:ea typeface="微软雅黑" panose="020B0503020204020204" pitchFamily="34" charset="-122"/>
+                <a:cs typeface="微软雅黑" panose="020B0503020204020204" pitchFamily="34" charset="-120"/>
               </a:rPr>
               <a:t>•  </a:t>
             </a:r>
-            <a:pPr algn="l" indent="0" marL="0">
-              <a:lnSpc>
-                <a:spcPct val="115000"/>
-              </a:lnSpc>
-              <a:buNone/>
-            </a:pPr>
-            <a:r>
-              <a:rPr lang="en-US" sz="1800" dirty="0">
-                <a:solidFill>
-                  <a:srgbClr val="000000"/>
-                </a:solidFill>
-              </a:rPr>
-              <a:t>本课程约定 top=-1 表示栈空，也就是 top 指向栈顶元素本身；这是约定3，本节就地定下</a:t>
-            </a:r>
-            <a:endParaRPr lang="en-US" sz="1800" dirty="0"/>
-          </a:p>
-        </p:txBody>
-      </p:sp>
-      <p:sp>
-        <p:nvSpPr>
-          <p:cNvPr id="10" name="Text 8"/>
-          <p:cNvSpPr/>
-          <p:nvPr/>
-        </p:nvSpPr>
-        <p:spPr>
-          <a:xfrm>
-            <a:off x="896112" y="5152644"/>
-            <a:ext cx="10454335" cy="740664"/>
-          </a:xfrm>
-          <a:prstGeom prst="rect">
-            <a:avLst/>
-          </a:prstGeom>
-          <a:noFill/>
-          <a:ln/>
-        </p:spPr>
-        <p:txBody>
-          <a:bodyPr wrap="square" rtlCol="0" anchor="t"/>
-          <a:lstStyle/>
-          <a:p>
-            <a:pPr algn="l" indent="0" marL="0">
-              <a:lnSpc>
-                <a:spcPct val="115000"/>
-              </a:lnSpc>
-              <a:buNone/>
-            </a:pPr>
-            <a:r>
-              <a:rPr lang="en-US" sz="1800" b="1" dirty="0">
-                <a:solidFill>
-                  <a:srgbClr val="1F4E9C"/>
-                </a:solidFill>
-                <a:latin typeface="微软雅黑" pitchFamily="34" charset="0"/>
-                <a:ea typeface="微软雅黑" pitchFamily="34" charset="-122"/>
-                <a:cs typeface="微软雅黑" pitchFamily="34" charset="-120"/>
-              </a:rPr>
-              <a:t>•  </a:t>
-            </a:r>
-            <a:pPr algn="l" indent="0" marL="0">
-              <a:lnSpc>
-                <a:spcPct val="115000"/>
-              </a:lnSpc>
-              <a:buNone/>
-            </a:pPr>
             <a:r>
               <a:rPr lang="en-US" sz="1800" dirty="0">
                 <a:solidFill>
@@ -5603,7 +5238,7 @@
 
 <file path=ppt/slides/slide4.xml><?xml version="1.0" encoding="utf-8"?>
 <p:sld xmlns:a="http://schemas.openxmlformats.org/drawingml/2006/main" xmlns:r="http://schemas.openxmlformats.org/officeDocument/2006/relationships" xmlns:p="http://schemas.openxmlformats.org/presentationml/2006/main">
-  <p:cSld name="Slide 4">
+  <p:cSld>
     <p:bg>
       <p:bgPr>
         <a:blipFill dpi="0" rotWithShape="1">
@@ -5647,13 +5282,12 @@
             <a:avLst/>
           </a:prstGeom>
           <a:noFill/>
-          <a:ln/>
         </p:spPr>
         <p:txBody>
           <a:bodyPr wrap="square" rtlCol="0" anchor="ctr"/>
           <a:lstStyle/>
           <a:p>
-            <a:pPr algn="r" indent="0" marL="0">
+            <a:pPr marL="0" indent="0" algn="r">
               <a:buNone/>
             </a:pPr>
             <a:r>
@@ -5661,9 +5295,9 @@
                 <a:solidFill>
                   <a:srgbClr val="8A9099"/>
                 </a:solidFill>
-                <a:latin typeface="微软雅黑" pitchFamily="34" charset="0"/>
-                <a:ea typeface="微软雅黑" pitchFamily="34" charset="-122"/>
-                <a:cs typeface="微软雅黑" pitchFamily="34" charset="-120"/>
+                <a:latin typeface="微软雅黑" panose="020B0503020204020204" pitchFamily="34" charset="-122"/>
+                <a:ea typeface="微软雅黑" panose="020B0503020204020204" pitchFamily="34" charset="-122"/>
+                <a:cs typeface="微软雅黑" panose="020B0503020204020204" pitchFamily="34" charset="-120"/>
               </a:rPr>
               <a:t>4 / 16</a:t>
             </a:r>
@@ -5686,13 +5320,12 @@
             <a:avLst/>
           </a:prstGeom>
           <a:noFill/>
-          <a:ln/>
         </p:spPr>
         <p:txBody>
           <a:bodyPr wrap="square" rtlCol="0" anchor="ctr"/>
           <a:lstStyle/>
           <a:p>
-            <a:pPr algn="l" indent="0" marL="0">
+            <a:pPr marL="0" indent="0" algn="l">
               <a:buNone/>
             </a:pPr>
             <a:r>
@@ -5700,9 +5333,9 @@
                 <a:solidFill>
                   <a:srgbClr val="1F4E9C"/>
                 </a:solidFill>
-                <a:latin typeface="微软雅黑" pitchFamily="34" charset="0"/>
-                <a:ea typeface="微软雅黑" pitchFamily="34" charset="-122"/>
-                <a:cs typeface="微软雅黑" pitchFamily="34" charset="-120"/>
+                <a:latin typeface="微软雅黑" panose="020B0503020204020204" pitchFamily="34" charset="-122"/>
+                <a:ea typeface="微软雅黑" panose="020B0503020204020204" pitchFamily="34" charset="-122"/>
+                <a:cs typeface="微软雅黑" panose="020B0503020204020204" pitchFamily="34" charset="-120"/>
               </a:rPr>
               <a:t>顺序栈 · 入栈出栈</a:t>
             </a:r>
@@ -5725,13 +5358,12 @@
             <a:avLst/>
           </a:prstGeom>
           <a:noFill/>
-          <a:ln/>
         </p:spPr>
         <p:txBody>
           <a:bodyPr wrap="square" rtlCol="0" anchor="ctr"/>
           <a:lstStyle/>
           <a:p>
-            <a:pPr algn="l" indent="0" marL="0">
+            <a:pPr marL="0" indent="0" algn="l">
               <a:buNone/>
             </a:pPr>
             <a:r>
@@ -5739,9 +5371,9 @@
                 <a:solidFill>
                   <a:srgbClr val="1F2329"/>
                 </a:solidFill>
-                <a:latin typeface="微软雅黑" pitchFamily="34" charset="0"/>
-                <a:ea typeface="微软雅黑" pitchFamily="34" charset="-122"/>
-                <a:cs typeface="微软雅黑" pitchFamily="34" charset="-120"/>
+                <a:latin typeface="微软雅黑" panose="020B0503020204020204" pitchFamily="34" charset="-122"/>
+                <a:ea typeface="微软雅黑" panose="020B0503020204020204" pitchFamily="34" charset="-122"/>
+                <a:cs typeface="微软雅黑" panose="020B0503020204020204" pitchFamily="34" charset="-120"/>
               </a:rPr>
               <a:t>Push 与 Pop：自增自减的位置由约定决定</a:t>
             </a:r>
@@ -5766,7 +5398,6 @@
           <a:solidFill>
             <a:srgbClr val="F7F9FC"/>
           </a:solidFill>
-          <a:ln/>
         </p:spPr>
       </p:sp>
       <p:sp>
@@ -5786,7 +5417,6 @@
           <a:solidFill>
             <a:srgbClr val="1F4E9C"/>
           </a:solidFill>
-          <a:ln/>
         </p:spPr>
       </p:sp>
       <p:sp>
@@ -5804,13 +5434,12 @@
             <a:avLst/>
           </a:prstGeom>
           <a:noFill/>
-          <a:ln/>
         </p:spPr>
         <p:txBody>
           <a:bodyPr wrap="square" rtlCol="0" anchor="t"/>
           <a:lstStyle/>
           <a:p>
-            <a:pPr algn="l" indent="0" marL="0">
+            <a:pPr marL="0" indent="0" algn="l">
               <a:lnSpc>
                 <a:spcPct val="125000"/>
               </a:lnSpc>
@@ -5821,9 +5450,9 @@
                 <a:solidFill>
                   <a:srgbClr val="1F2329"/>
                 </a:solidFill>
-                <a:latin typeface="Consolas" pitchFamily="34" charset="0"/>
-                <a:ea typeface="Consolas" pitchFamily="34" charset="-122"/>
-                <a:cs typeface="Consolas" pitchFamily="34" charset="-120"/>
+                <a:latin typeface="Consolas" panose="020B0609020204030204" pitchFamily="34" charset="0"/>
+                <a:ea typeface="Consolas" panose="020B0609020204030204" pitchFamily="34" charset="-122"/>
+                <a:cs typeface="Consolas" panose="020B0609020204030204" pitchFamily="34" charset="-120"/>
               </a:rPr>
               <a:t>bool Push(SqStack &amp;S, int elem){
     if(S.top == MaxSize - 1) return false;   // 判满
@@ -5856,13 +5485,12 @@
             <a:avLst/>
           </a:prstGeom>
           <a:noFill/>
-          <a:ln/>
         </p:spPr>
         <p:txBody>
           <a:bodyPr wrap="square" rtlCol="0" anchor="t"/>
           <a:lstStyle/>
           <a:p>
-            <a:pPr algn="l" indent="0" marL="0">
+            <a:pPr marL="0" indent="0" algn="l">
               <a:buNone/>
             </a:pPr>
             <a:r>
@@ -5870,9 +5498,9 @@
                 <a:solidFill>
                   <a:srgbClr val="8A9099"/>
                 </a:solidFill>
-                <a:latin typeface="微软雅黑" pitchFamily="34" charset="0"/>
-                <a:ea typeface="微软雅黑" pitchFamily="34" charset="-122"/>
-                <a:cs typeface="微软雅黑" pitchFamily="34" charset="-120"/>
+                <a:latin typeface="微软雅黑" panose="020B0503020204020204" pitchFamily="34" charset="-122"/>
+                <a:ea typeface="微软雅黑" panose="020B0503020204020204" pitchFamily="34" charset="-122"/>
+                <a:cs typeface="微软雅黑" panose="020B0503020204020204" pitchFamily="34" charset="-120"/>
               </a:rPr>
               <a:t>top=-1 表示空，所以入栈先 ++top 再放（前缀自增）、出栈先取再 top--（后缀自减）；次序是约定决定的，不能随便写</a:t>
             </a:r>
@@ -5890,7 +5518,7 @@
 
 <file path=ppt/slides/slide5.xml><?xml version="1.0" encoding="utf-8"?>
 <p:sld xmlns:a="http://schemas.openxmlformats.org/drawingml/2006/main" xmlns:r="http://schemas.openxmlformats.org/officeDocument/2006/relationships" xmlns:p="http://schemas.openxmlformats.org/presentationml/2006/main">
-  <p:cSld name="Slide 5">
+  <p:cSld>
     <p:bg>
       <p:bgPr>
         <a:blipFill dpi="0" rotWithShape="1">
@@ -5934,13 +5562,12 @@
             <a:avLst/>
           </a:prstGeom>
           <a:noFill/>
-          <a:ln/>
         </p:spPr>
         <p:txBody>
           <a:bodyPr wrap="square" rtlCol="0" anchor="ctr"/>
           <a:lstStyle/>
           <a:p>
-            <a:pPr algn="r" indent="0" marL="0">
+            <a:pPr marL="0" indent="0" algn="r">
               <a:buNone/>
             </a:pPr>
             <a:r>
@@ -5948,9 +5575,9 @@
                 <a:solidFill>
                   <a:srgbClr val="8A9099"/>
                 </a:solidFill>
-                <a:latin typeface="微软雅黑" pitchFamily="34" charset="0"/>
-                <a:ea typeface="微软雅黑" pitchFamily="34" charset="-122"/>
-                <a:cs typeface="微软雅黑" pitchFamily="34" charset="-120"/>
+                <a:latin typeface="微软雅黑" panose="020B0503020204020204" pitchFamily="34" charset="-122"/>
+                <a:ea typeface="微软雅黑" panose="020B0503020204020204" pitchFamily="34" charset="-122"/>
+                <a:cs typeface="微软雅黑" panose="020B0503020204020204" pitchFamily="34" charset="-120"/>
               </a:rPr>
               <a:t>5 / 16</a:t>
             </a:r>
@@ -5973,13 +5600,12 @@
             <a:avLst/>
           </a:prstGeom>
           <a:noFill/>
-          <a:ln/>
         </p:spPr>
         <p:txBody>
           <a:bodyPr wrap="square" rtlCol="0" anchor="ctr"/>
           <a:lstStyle/>
           <a:p>
-            <a:pPr algn="l" indent="0" marL="0">
+            <a:pPr marL="0" indent="0" algn="l">
               <a:buNone/>
             </a:pPr>
             <a:r>
@@ -5987,9 +5613,9 @@
                 <a:solidFill>
                   <a:srgbClr val="1F4E9C"/>
                 </a:solidFill>
-                <a:latin typeface="微软雅黑" pitchFamily="34" charset="0"/>
-                <a:ea typeface="微软雅黑" pitchFamily="34" charset="-122"/>
-                <a:cs typeface="微软雅黑" pitchFamily="34" charset="-120"/>
+                <a:latin typeface="微软雅黑" panose="020B0503020204020204" pitchFamily="34" charset="-122"/>
+                <a:ea typeface="微软雅黑" panose="020B0503020204020204" pitchFamily="34" charset="-122"/>
+                <a:cs typeface="微软雅黑" panose="020B0503020204020204" pitchFamily="34" charset="-120"/>
               </a:rPr>
               <a:t>顺序栈 · 其余操作</a:t>
             </a:r>
@@ -6012,13 +5638,12 @@
             <a:avLst/>
           </a:prstGeom>
           <a:noFill/>
-          <a:ln/>
         </p:spPr>
         <p:txBody>
           <a:bodyPr wrap="square" rtlCol="0" anchor="ctr"/>
           <a:lstStyle/>
           <a:p>
-            <a:pPr algn="l" indent="0" marL="0">
+            <a:pPr marL="0" indent="0" algn="l">
               <a:buNone/>
             </a:pPr>
             <a:r>
@@ -6026,9 +5651,9 @@
                 <a:solidFill>
                   <a:srgbClr val="1F2329"/>
                 </a:solidFill>
-                <a:latin typeface="微软雅黑" pitchFamily="34" charset="0"/>
-                <a:ea typeface="微软雅黑" pitchFamily="34" charset="-122"/>
-                <a:cs typeface="微软雅黑" pitchFamily="34" charset="-120"/>
+                <a:latin typeface="微软雅黑" panose="020B0503020204020204" pitchFamily="34" charset="-122"/>
+                <a:ea typeface="微软雅黑" panose="020B0503020204020204" pitchFamily="34" charset="-122"/>
+                <a:cs typeface="微软雅黑" panose="020B0503020204020204" pitchFamily="34" charset="-120"/>
               </a:rPr>
               <a:t>GetTop、判空判满、求长度</a:t>
             </a:r>
@@ -6053,7 +5678,6 @@
           <a:solidFill>
             <a:srgbClr val="F7F9FC"/>
           </a:solidFill>
-          <a:ln/>
         </p:spPr>
       </p:sp>
       <p:sp>
@@ -6073,7 +5697,6 @@
           <a:solidFill>
             <a:srgbClr val="1F4E9C"/>
           </a:solidFill>
-          <a:ln/>
         </p:spPr>
       </p:sp>
       <p:sp>
@@ -6091,13 +5714,12 @@
             <a:avLst/>
           </a:prstGeom>
           <a:noFill/>
-          <a:ln/>
         </p:spPr>
         <p:txBody>
           <a:bodyPr wrap="square" rtlCol="0" anchor="t"/>
           <a:lstStyle/>
           <a:p>
-            <a:pPr algn="l" indent="0" marL="0">
+            <a:pPr marL="0" indent="0" algn="l">
               <a:lnSpc>
                 <a:spcPct val="125000"/>
               </a:lnSpc>
@@ -6108,9 +5730,9 @@
                 <a:solidFill>
                   <a:srgbClr val="1F2329"/>
                 </a:solidFill>
-                <a:latin typeface="Consolas" pitchFamily="34" charset="0"/>
-                <a:ea typeface="Consolas" pitchFamily="34" charset="-122"/>
-                <a:cs typeface="Consolas" pitchFamily="34" charset="-120"/>
+                <a:latin typeface="Consolas" panose="020B0609020204030204" pitchFamily="34" charset="0"/>
+                <a:ea typeface="Consolas" panose="020B0609020204030204" pitchFamily="34" charset="-122"/>
+                <a:cs typeface="Consolas" panose="020B0609020204030204" pitchFamily="34" charset="-120"/>
               </a:rPr>
               <a:t>bool GetTop(SqStack S, int &amp;elem){ if(S.top==-1) return false; elem=S.data[S.top]; return true; }
 bool IsEmpty(SqStack S){ return S.top == -1; }
@@ -6137,13 +5759,12 @@
             <a:avLst/>
           </a:prstGeom>
           <a:noFill/>
-          <a:ln/>
         </p:spPr>
         <p:txBody>
           <a:bodyPr wrap="square" rtlCol="0" anchor="t"/>
           <a:lstStyle/>
           <a:p>
-            <a:pPr algn="l" indent="0" marL="0">
+            <a:pPr marL="0" indent="0" algn="l">
               <a:lnSpc>
                 <a:spcPct val="115000"/>
               </a:lnSpc>
@@ -6154,74 +5775,61 @@
                 <a:solidFill>
                   <a:srgbClr val="1F4E9C"/>
                 </a:solidFill>
-                <a:latin typeface="微软雅黑" pitchFamily="34" charset="0"/>
-                <a:ea typeface="微软雅黑" pitchFamily="34" charset="-122"/>
-                <a:cs typeface="微软雅黑" pitchFamily="34" charset="-120"/>
+                <a:latin typeface="微软雅黑" panose="020B0503020204020204" pitchFamily="34" charset="-122"/>
+                <a:ea typeface="微软雅黑" panose="020B0503020204020204" pitchFamily="34" charset="-122"/>
+                <a:cs typeface="微软雅黑" panose="020B0503020204020204" pitchFamily="34" charset="-120"/>
               </a:rPr>
               <a:t>•  </a:t>
             </a:r>
-            <a:pPr algn="l" indent="0" marL="0">
+            <a:r>
+              <a:rPr lang="en-US" sz="1800" dirty="0">
+                <a:solidFill>
+                  <a:srgbClr val="000000"/>
+                </a:solidFill>
+              </a:rPr>
+              <a:t>GetTop 只读栈顶、不移 top，这是它和 Pop 的区别</a:t>
+            </a:r>
+            <a:endParaRPr lang="en-US" sz="1800" dirty="0"/>
+          </a:p>
+        </p:txBody>
+      </p:sp>
+      <p:sp>
+        <p:nvSpPr>
+          <p:cNvPr id="9" name="Text 7"/>
+          <p:cNvSpPr/>
+          <p:nvPr/>
+        </p:nvSpPr>
+        <p:spPr>
+          <a:xfrm>
+            <a:off x="896112" y="4576572"/>
+            <a:ext cx="10454335" cy="740664"/>
+          </a:xfrm>
+          <a:prstGeom prst="rect">
+            <a:avLst/>
+          </a:prstGeom>
+          <a:noFill/>
+        </p:spPr>
+        <p:txBody>
+          <a:bodyPr wrap="square" rtlCol="0" anchor="t"/>
+          <a:lstStyle/>
+          <a:p>
+            <a:pPr marL="0" indent="0" algn="l">
               <a:lnSpc>
                 <a:spcPct val="115000"/>
               </a:lnSpc>
               <a:buNone/>
             </a:pPr>
             <a:r>
-              <a:rPr lang="en-US" sz="1800" dirty="0">
-                <a:solidFill>
-                  <a:srgbClr val="000000"/>
-                </a:solidFill>
-              </a:rPr>
-              <a:t>GetTop 只读栈顶、不移 top，这是它和 Pop 的区别</a:t>
-            </a:r>
-            <a:endParaRPr lang="en-US" sz="1800" dirty="0"/>
-          </a:p>
-        </p:txBody>
-      </p:sp>
-      <p:sp>
-        <p:nvSpPr>
-          <p:cNvPr id="9" name="Text 7"/>
-          <p:cNvSpPr/>
-          <p:nvPr/>
-        </p:nvSpPr>
-        <p:spPr>
-          <a:xfrm>
-            <a:off x="896112" y="4576572"/>
-            <a:ext cx="10454335" cy="740664"/>
-          </a:xfrm>
-          <a:prstGeom prst="rect">
-            <a:avLst/>
-          </a:prstGeom>
-          <a:noFill/>
-          <a:ln/>
-        </p:spPr>
-        <p:txBody>
-          <a:bodyPr wrap="square" rtlCol="0" anchor="t"/>
-          <a:lstStyle/>
-          <a:p>
-            <a:pPr algn="l" indent="0" marL="0">
-              <a:lnSpc>
-                <a:spcPct val="115000"/>
-              </a:lnSpc>
-              <a:buNone/>
-            </a:pPr>
-            <a:r>
               <a:rPr lang="en-US" sz="1800" b="1" dirty="0">
                 <a:solidFill>
                   <a:srgbClr val="1F4E9C"/>
                 </a:solidFill>
-                <a:latin typeface="微软雅黑" pitchFamily="34" charset="0"/>
-                <a:ea typeface="微软雅黑" pitchFamily="34" charset="-122"/>
-                <a:cs typeface="微软雅黑" pitchFamily="34" charset="-120"/>
+                <a:latin typeface="微软雅黑" panose="020B0503020204020204" pitchFamily="34" charset="-122"/>
+                <a:ea typeface="微软雅黑" panose="020B0503020204020204" pitchFamily="34" charset="-122"/>
+                <a:cs typeface="微软雅黑" panose="020B0503020204020204" pitchFamily="34" charset="-120"/>
               </a:rPr>
               <a:t>•  </a:t>
             </a:r>
-            <a:pPr algn="l" indent="0" marL="0">
-              <a:lnSpc>
-                <a:spcPct val="115000"/>
-              </a:lnSpc>
-              <a:buNone/>
-            </a:pPr>
             <a:r>
               <a:rPr lang="en-US" sz="1800" dirty="0">
                 <a:solidFill>
@@ -6244,7 +5852,7 @@
 
 <file path=ppt/slides/slide6.xml><?xml version="1.0" encoding="utf-8"?>
 <p:sld xmlns:a="http://schemas.openxmlformats.org/drawingml/2006/main" xmlns:r="http://schemas.openxmlformats.org/officeDocument/2006/relationships" xmlns:p="http://schemas.openxmlformats.org/presentationml/2006/main">
-  <p:cSld name="Slide 6">
+  <p:cSld>
     <p:bg>
       <p:bgPr>
         <a:blipFill dpi="0" rotWithShape="1">
@@ -6288,13 +5896,12 @@
             <a:avLst/>
           </a:prstGeom>
           <a:noFill/>
-          <a:ln/>
         </p:spPr>
         <p:txBody>
           <a:bodyPr wrap="square" rtlCol="0" anchor="ctr"/>
           <a:lstStyle/>
           <a:p>
-            <a:pPr algn="r" indent="0" marL="0">
+            <a:pPr marL="0" indent="0" algn="r">
               <a:buNone/>
             </a:pPr>
             <a:r>
@@ -6302,9 +5909,9 @@
                 <a:solidFill>
                   <a:srgbClr val="8A9099"/>
                 </a:solidFill>
-                <a:latin typeface="微软雅黑" pitchFamily="34" charset="0"/>
-                <a:ea typeface="微软雅黑" pitchFamily="34" charset="-122"/>
-                <a:cs typeface="微软雅黑" pitchFamily="34" charset="-120"/>
+                <a:latin typeface="微软雅黑" panose="020B0503020204020204" pitchFamily="34" charset="-122"/>
+                <a:ea typeface="微软雅黑" panose="020B0503020204020204" pitchFamily="34" charset="-122"/>
+                <a:cs typeface="微软雅黑" panose="020B0503020204020204" pitchFamily="34" charset="-120"/>
               </a:rPr>
               <a:t>6 / 16</a:t>
             </a:r>
@@ -6327,13 +5934,12 @@
             <a:avLst/>
           </a:prstGeom>
           <a:noFill/>
-          <a:ln/>
         </p:spPr>
         <p:txBody>
           <a:bodyPr wrap="square" rtlCol="0" anchor="ctr"/>
           <a:lstStyle/>
           <a:p>
-            <a:pPr algn="l" indent="0" marL="0">
+            <a:pPr marL="0" indent="0" algn="l">
               <a:buNone/>
             </a:pPr>
             <a:r>
@@ -6341,9 +5947,9 @@
                 <a:solidFill>
                   <a:srgbClr val="1F4E9C"/>
                 </a:solidFill>
-                <a:latin typeface="微软雅黑" pitchFamily="34" charset="0"/>
-                <a:ea typeface="微软雅黑" pitchFamily="34" charset="-122"/>
-                <a:cs typeface="微软雅黑" pitchFamily="34" charset="-120"/>
+                <a:latin typeface="微软雅黑" panose="020B0503020204020204" pitchFamily="34" charset="-122"/>
+                <a:ea typeface="微软雅黑" panose="020B0503020204020204" pitchFamily="34" charset="-122"/>
+                <a:cs typeface="微软雅黑" panose="020B0503020204020204" pitchFamily="34" charset="-120"/>
               </a:rPr>
               <a:t>约定对比 · 检查页</a:t>
             </a:r>
@@ -6366,13 +5972,12 @@
             <a:avLst/>
           </a:prstGeom>
           <a:noFill/>
-          <a:ln/>
         </p:spPr>
         <p:txBody>
           <a:bodyPr wrap="square" rtlCol="0" anchor="ctr"/>
           <a:lstStyle/>
           <a:p>
-            <a:pPr algn="l" indent="0" marL="0">
+            <a:pPr marL="0" indent="0" algn="l">
               <a:buNone/>
             </a:pPr>
             <a:r>
@@ -6380,9 +5985,9 @@
                 <a:solidFill>
                   <a:srgbClr val="1F2329"/>
                 </a:solidFill>
-                <a:latin typeface="微软雅黑" pitchFamily="34" charset="0"/>
-                <a:ea typeface="微软雅黑" pitchFamily="34" charset="-122"/>
-                <a:cs typeface="微软雅黑" pitchFamily="34" charset="-120"/>
+                <a:latin typeface="微软雅黑" panose="020B0503020204020204" pitchFamily="34" charset="-122"/>
+                <a:ea typeface="微软雅黑" panose="020B0503020204020204" pitchFamily="34" charset="-122"/>
+                <a:cs typeface="微软雅黑" panose="020B0503020204020204" pitchFamily="34" charset="-120"/>
               </a:rPr>
               <a:t>若约定 top=0，五个式子怎么变？（先自己推）</a:t>
             </a:r>
@@ -6405,13 +6010,12 @@
             <a:avLst/>
           </a:prstGeom>
           <a:noFill/>
-          <a:ln/>
         </p:spPr>
         <p:txBody>
           <a:bodyPr wrap="square" rtlCol="0" anchor="t"/>
           <a:lstStyle/>
           <a:p>
-            <a:pPr algn="l" indent="0" marL="0">
+            <a:pPr marL="0" indent="0" algn="l">
               <a:buNone/>
             </a:pPr>
             <a:r>
@@ -6441,13 +6045,12 @@
             <a:avLst/>
           </a:prstGeom>
           <a:noFill/>
-          <a:ln/>
         </p:spPr>
         <p:txBody>
           <a:bodyPr wrap="square" rtlCol="0" anchor="t"/>
           <a:lstStyle/>
           <a:p>
-            <a:pPr algn="l" indent="0" marL="0">
+            <a:pPr marL="0" indent="0" algn="l">
               <a:lnSpc>
                 <a:spcPct val="115000"/>
               </a:lnSpc>
@@ -6458,25 +6061,68 @@
                 <a:solidFill>
                   <a:srgbClr val="1F4E9C"/>
                 </a:solidFill>
-                <a:latin typeface="微软雅黑" pitchFamily="34" charset="0"/>
-                <a:ea typeface="微软雅黑" pitchFamily="34" charset="-122"/>
-                <a:cs typeface="微软雅黑" pitchFamily="34" charset="-120"/>
+                <a:latin typeface="微软雅黑" panose="020B0503020204020204" pitchFamily="34" charset="-122"/>
+                <a:ea typeface="微软雅黑" panose="020B0503020204020204" pitchFamily="34" charset="-122"/>
+                <a:cs typeface="微软雅黑" panose="020B0503020204020204" pitchFamily="34" charset="-120"/>
               </a:rPr>
               <a:t>•  </a:t>
             </a:r>
-            <a:pPr algn="l" indent="0" marL="0">
+            <a:r>
+              <a:rPr lang="en-US" sz="1800" dirty="0">
+                <a:solidFill>
+                  <a:srgbClr val="000000"/>
+                </a:solidFill>
+              </a:rPr>
+              <a:t>判空 top==0；判满 top==MaxSize；长度就是 top</a:t>
+            </a:r>
+            <a:endParaRPr lang="en-US" sz="1800" dirty="0"/>
+          </a:p>
+        </p:txBody>
+      </p:sp>
+      <p:sp>
+        <p:nvSpPr>
+          <p:cNvPr id="7" name="Text 5"/>
+          <p:cNvSpPr/>
+          <p:nvPr/>
+        </p:nvSpPr>
+        <p:spPr>
+          <a:xfrm>
+            <a:off x="896112" y="3753612"/>
+            <a:ext cx="10454335" cy="740664"/>
+          </a:xfrm>
+          <a:prstGeom prst="rect">
+            <a:avLst/>
+          </a:prstGeom>
+          <a:noFill/>
+        </p:spPr>
+        <p:txBody>
+          <a:bodyPr wrap="square" rtlCol="0" anchor="t"/>
+          <a:lstStyle/>
+          <a:p>
+            <a:pPr marL="0" indent="0" algn="l">
               <a:lnSpc>
                 <a:spcPct val="115000"/>
               </a:lnSpc>
               <a:buNone/>
             </a:pPr>
             <a:r>
+              <a:rPr lang="en-US" sz="1800" b="1" dirty="0">
+                <a:solidFill>
+                  <a:srgbClr val="1F4E9C"/>
+                </a:solidFill>
+                <a:latin typeface="微软雅黑" panose="020B0503020204020204" pitchFamily="34" charset="-122"/>
+                <a:ea typeface="微软雅黑" panose="020B0503020204020204" pitchFamily="34" charset="-122"/>
+                <a:cs typeface="微软雅黑" panose="020B0503020204020204" pitchFamily="34" charset="-120"/>
+              </a:rPr>
+              <a:t>•  </a:t>
+            </a:r>
+            <a:r>
               <a:rPr lang="en-US" sz="1800" dirty="0">
                 <a:solidFill>
                   <a:srgbClr val="000000"/>
                 </a:solidFill>
               </a:rPr>
-              <a:t>判空 top==0；判满 top==MaxSize；长度就是 top</a:t>
+              <a:t>入栈 data[top++] = elem（先放再移）；出栈 elem = data[--top]（先移再取）</a:t>
             </a:r>
             <a:endParaRPr lang="en-US" sz="1800" dirty="0"/>
           </a:p>
@@ -6484,26 +6130,25 @@
       </p:sp>
       <p:sp>
         <p:nvSpPr>
-          <p:cNvPr id="7" name="Text 5"/>
-          <p:cNvSpPr/>
-          <p:nvPr/>
-        </p:nvSpPr>
-        <p:spPr>
-          <a:xfrm>
-            <a:off x="896112" y="3753612"/>
-            <a:ext cx="10454335" cy="740664"/>
-          </a:xfrm>
-          <a:prstGeom prst="rect">
-            <a:avLst/>
-          </a:prstGeom>
-          <a:noFill/>
-          <a:ln/>
+          <p:cNvPr id="8" name="Text 6"/>
+          <p:cNvSpPr/>
+          <p:nvPr/>
+        </p:nvSpPr>
+        <p:spPr>
+          <a:xfrm>
+            <a:off x="896112" y="4567428"/>
+            <a:ext cx="10454335" cy="397764"/>
+          </a:xfrm>
+          <a:prstGeom prst="rect">
+            <a:avLst/>
+          </a:prstGeom>
+          <a:noFill/>
         </p:spPr>
         <p:txBody>
           <a:bodyPr wrap="square" rtlCol="0" anchor="t"/>
           <a:lstStyle/>
           <a:p>
-            <a:pPr algn="l" indent="0" marL="0">
+            <a:pPr marL="0" indent="0" algn="l">
               <a:lnSpc>
                 <a:spcPct val="115000"/>
               </a:lnSpc>
@@ -6514,74 +6159,12 @@
                 <a:solidFill>
                   <a:srgbClr val="1F4E9C"/>
                 </a:solidFill>
-                <a:latin typeface="微软雅黑" pitchFamily="34" charset="0"/>
-                <a:ea typeface="微软雅黑" pitchFamily="34" charset="-122"/>
-                <a:cs typeface="微软雅黑" pitchFamily="34" charset="-120"/>
+                <a:latin typeface="微软雅黑" panose="020B0503020204020204" pitchFamily="34" charset="-122"/>
+                <a:ea typeface="微软雅黑" panose="020B0503020204020204" pitchFamily="34" charset="-122"/>
+                <a:cs typeface="微软雅黑" panose="020B0503020204020204" pitchFamily="34" charset="-120"/>
               </a:rPr>
               <a:t>•  </a:t>
             </a:r>
-            <a:pPr algn="l" indent="0" marL="0">
-              <a:lnSpc>
-                <a:spcPct val="115000"/>
-              </a:lnSpc>
-              <a:buNone/>
-            </a:pPr>
-            <a:r>
-              <a:rPr lang="en-US" sz="1800" dirty="0">
-                <a:solidFill>
-                  <a:srgbClr val="000000"/>
-                </a:solidFill>
-              </a:rPr>
-              <a:t>入栈 data[top++] = elem（先放再移）；出栈 elem = data[--top]（先移再取）</a:t>
-            </a:r>
-            <a:endParaRPr lang="en-US" sz="1800" dirty="0"/>
-          </a:p>
-        </p:txBody>
-      </p:sp>
-      <p:sp>
-        <p:nvSpPr>
-          <p:cNvPr id="8" name="Text 6"/>
-          <p:cNvSpPr/>
-          <p:nvPr/>
-        </p:nvSpPr>
-        <p:spPr>
-          <a:xfrm>
-            <a:off x="896112" y="4567428"/>
-            <a:ext cx="10454335" cy="397764"/>
-          </a:xfrm>
-          <a:prstGeom prst="rect">
-            <a:avLst/>
-          </a:prstGeom>
-          <a:noFill/>
-          <a:ln/>
-        </p:spPr>
-        <p:txBody>
-          <a:bodyPr wrap="square" rtlCol="0" anchor="t"/>
-          <a:lstStyle/>
-          <a:p>
-            <a:pPr algn="l" indent="0" marL="0">
-              <a:lnSpc>
-                <a:spcPct val="115000"/>
-              </a:lnSpc>
-              <a:buNone/>
-            </a:pPr>
-            <a:r>
-              <a:rPr lang="en-US" sz="1800" b="1" dirty="0">
-                <a:solidFill>
-                  <a:srgbClr val="1F4E9C"/>
-                </a:solidFill>
-                <a:latin typeface="微软雅黑" pitchFamily="34" charset="0"/>
-                <a:ea typeface="微软雅黑" pitchFamily="34" charset="-122"/>
-                <a:cs typeface="微软雅黑" pitchFamily="34" charset="-120"/>
-              </a:rPr>
-              <a:t>•  </a:t>
-            </a:r>
-            <a:pPr algn="l" indent="0" marL="0">
-              <a:lnSpc>
-                <a:spcPct val="115000"/>
-              </a:lnSpc>
-              <a:buNone/>
-            </a:pPr>
             <a:r>
               <a:rPr lang="en-US" sz="1800" dirty="0">
                 <a:solidFill>
@@ -6599,12 +6182,287 @@
   <p:clrMapOvr>
     <a:masterClrMapping/>
   </p:clrMapOvr>
+  <p:timing>
+    <p:tnLst>
+      <p:par>
+        <p:cTn id="1" dur="indefinite" restart="never" nodeType="tmRoot">
+          <p:childTnLst>
+            <p:seq concurrent="1" nextAc="seek">
+              <p:cTn id="2" dur="indefinite" nodeType="mainSeq">
+                <p:childTnLst>
+                  <p:par>
+                    <p:cTn id="3" fill="hold">
+                      <p:stCondLst>
+                        <p:cond delay="indefinite"/>
+                      </p:stCondLst>
+                      <p:childTnLst>
+                        <p:par>
+                          <p:cTn id="4" fill="hold">
+                            <p:stCondLst>
+                              <p:cond delay="0"/>
+                            </p:stCondLst>
+                            <p:childTnLst>
+                              <p:par>
+                                <p:cTn id="5" presetID="2" presetClass="entr" presetSubtype="4" fill="hold" grpId="0" nodeType="clickEffect">
+                                  <p:stCondLst>
+                                    <p:cond delay="0"/>
+                                  </p:stCondLst>
+                                  <p:childTnLst>
+                                    <p:set>
+                                      <p:cBhvr>
+                                        <p:cTn id="6" dur="1" fill="hold">
+                                          <p:stCondLst>
+                                            <p:cond delay="0"/>
+                                          </p:stCondLst>
+                                        </p:cTn>
+                                        <p:tgtEl>
+                                          <p:spTgt spid="6"/>
+                                        </p:tgtEl>
+                                        <p:attrNameLst>
+                                          <p:attrName>style.visibility</p:attrName>
+                                        </p:attrNameLst>
+                                      </p:cBhvr>
+                                      <p:to>
+                                        <p:strVal val="visible"/>
+                                      </p:to>
+                                    </p:set>
+                                    <p:anim calcmode="lin" valueType="num">
+                                      <p:cBhvr additive="base">
+                                        <p:cTn id="7" dur="500" fill="hold"/>
+                                        <p:tgtEl>
+                                          <p:spTgt spid="6"/>
+                                        </p:tgtEl>
+                                        <p:attrNameLst>
+                                          <p:attrName>ppt_x</p:attrName>
+                                        </p:attrNameLst>
+                                      </p:cBhvr>
+                                      <p:tavLst>
+                                        <p:tav tm="0">
+                                          <p:val>
+                                            <p:strVal val="#ppt_x"/>
+                                          </p:val>
+                                        </p:tav>
+                                        <p:tav tm="100000">
+                                          <p:val>
+                                            <p:strVal val="#ppt_x"/>
+                                          </p:val>
+                                        </p:tav>
+                                      </p:tavLst>
+                                    </p:anim>
+                                    <p:anim calcmode="lin" valueType="num">
+                                      <p:cBhvr additive="base">
+                                        <p:cTn id="8" dur="500" fill="hold"/>
+                                        <p:tgtEl>
+                                          <p:spTgt spid="6"/>
+                                        </p:tgtEl>
+                                        <p:attrNameLst>
+                                          <p:attrName>ppt_y</p:attrName>
+                                        </p:attrNameLst>
+                                      </p:cBhvr>
+                                      <p:tavLst>
+                                        <p:tav tm="0">
+                                          <p:val>
+                                            <p:strVal val="1+#ppt_h/2"/>
+                                          </p:val>
+                                        </p:tav>
+                                        <p:tav tm="100000">
+                                          <p:val>
+                                            <p:strVal val="#ppt_y"/>
+                                          </p:val>
+                                        </p:tav>
+                                      </p:tavLst>
+                                    </p:anim>
+                                  </p:childTnLst>
+                                </p:cTn>
+                              </p:par>
+                              <p:par>
+                                <p:cTn id="9" presetID="2" presetClass="entr" presetSubtype="4" fill="hold" grpId="0" nodeType="withEffect">
+                                  <p:stCondLst>
+                                    <p:cond delay="0"/>
+                                  </p:stCondLst>
+                                  <p:childTnLst>
+                                    <p:set>
+                                      <p:cBhvr>
+                                        <p:cTn id="10" dur="1" fill="hold">
+                                          <p:stCondLst>
+                                            <p:cond delay="0"/>
+                                          </p:stCondLst>
+                                        </p:cTn>
+                                        <p:tgtEl>
+                                          <p:spTgt spid="7"/>
+                                        </p:tgtEl>
+                                        <p:attrNameLst>
+                                          <p:attrName>style.visibility</p:attrName>
+                                        </p:attrNameLst>
+                                      </p:cBhvr>
+                                      <p:to>
+                                        <p:strVal val="visible"/>
+                                      </p:to>
+                                    </p:set>
+                                    <p:anim calcmode="lin" valueType="num">
+                                      <p:cBhvr additive="base">
+                                        <p:cTn id="11" dur="500" fill="hold"/>
+                                        <p:tgtEl>
+                                          <p:spTgt spid="7"/>
+                                        </p:tgtEl>
+                                        <p:attrNameLst>
+                                          <p:attrName>ppt_x</p:attrName>
+                                        </p:attrNameLst>
+                                      </p:cBhvr>
+                                      <p:tavLst>
+                                        <p:tav tm="0">
+                                          <p:val>
+                                            <p:strVal val="#ppt_x"/>
+                                          </p:val>
+                                        </p:tav>
+                                        <p:tav tm="100000">
+                                          <p:val>
+                                            <p:strVal val="#ppt_x"/>
+                                          </p:val>
+                                        </p:tav>
+                                      </p:tavLst>
+                                    </p:anim>
+                                    <p:anim calcmode="lin" valueType="num">
+                                      <p:cBhvr additive="base">
+                                        <p:cTn id="12" dur="500" fill="hold"/>
+                                        <p:tgtEl>
+                                          <p:spTgt spid="7"/>
+                                        </p:tgtEl>
+                                        <p:attrNameLst>
+                                          <p:attrName>ppt_y</p:attrName>
+                                        </p:attrNameLst>
+                                      </p:cBhvr>
+                                      <p:tavLst>
+                                        <p:tav tm="0">
+                                          <p:val>
+                                            <p:strVal val="1+#ppt_h/2"/>
+                                          </p:val>
+                                        </p:tav>
+                                        <p:tav tm="100000">
+                                          <p:val>
+                                            <p:strVal val="#ppt_y"/>
+                                          </p:val>
+                                        </p:tav>
+                                      </p:tavLst>
+                                    </p:anim>
+                                  </p:childTnLst>
+                                </p:cTn>
+                              </p:par>
+                              <p:par>
+                                <p:cTn id="13" presetID="2" presetClass="entr" presetSubtype="4" fill="hold" grpId="0" nodeType="withEffect">
+                                  <p:stCondLst>
+                                    <p:cond delay="0"/>
+                                  </p:stCondLst>
+                                  <p:childTnLst>
+                                    <p:set>
+                                      <p:cBhvr>
+                                        <p:cTn id="14" dur="1" fill="hold">
+                                          <p:stCondLst>
+                                            <p:cond delay="0"/>
+                                          </p:stCondLst>
+                                        </p:cTn>
+                                        <p:tgtEl>
+                                          <p:spTgt spid="8"/>
+                                        </p:tgtEl>
+                                        <p:attrNameLst>
+                                          <p:attrName>style.visibility</p:attrName>
+                                        </p:attrNameLst>
+                                      </p:cBhvr>
+                                      <p:to>
+                                        <p:strVal val="visible"/>
+                                      </p:to>
+                                    </p:set>
+                                    <p:anim calcmode="lin" valueType="num">
+                                      <p:cBhvr additive="base">
+                                        <p:cTn id="15" dur="500" fill="hold"/>
+                                        <p:tgtEl>
+                                          <p:spTgt spid="8"/>
+                                        </p:tgtEl>
+                                        <p:attrNameLst>
+                                          <p:attrName>ppt_x</p:attrName>
+                                        </p:attrNameLst>
+                                      </p:cBhvr>
+                                      <p:tavLst>
+                                        <p:tav tm="0">
+                                          <p:val>
+                                            <p:strVal val="#ppt_x"/>
+                                          </p:val>
+                                        </p:tav>
+                                        <p:tav tm="100000">
+                                          <p:val>
+                                            <p:strVal val="#ppt_x"/>
+                                          </p:val>
+                                        </p:tav>
+                                      </p:tavLst>
+                                    </p:anim>
+                                    <p:anim calcmode="lin" valueType="num">
+                                      <p:cBhvr additive="base">
+                                        <p:cTn id="16" dur="500" fill="hold"/>
+                                        <p:tgtEl>
+                                          <p:spTgt spid="8"/>
+                                        </p:tgtEl>
+                                        <p:attrNameLst>
+                                          <p:attrName>ppt_y</p:attrName>
+                                        </p:attrNameLst>
+                                      </p:cBhvr>
+                                      <p:tavLst>
+                                        <p:tav tm="0">
+                                          <p:val>
+                                            <p:strVal val="1+#ppt_h/2"/>
+                                          </p:val>
+                                        </p:tav>
+                                        <p:tav tm="100000">
+                                          <p:val>
+                                            <p:strVal val="#ppt_y"/>
+                                          </p:val>
+                                        </p:tav>
+                                      </p:tavLst>
+                                    </p:anim>
+                                  </p:childTnLst>
+                                </p:cTn>
+                              </p:par>
+                            </p:childTnLst>
+                          </p:cTn>
+                        </p:par>
+                      </p:childTnLst>
+                    </p:cTn>
+                  </p:par>
+                </p:childTnLst>
+              </p:cTn>
+              <p:prevCondLst>
+                <p:cond evt="onPrev" delay="0">
+                  <p:tgtEl>
+                    <p:sldTgt/>
+                  </p:tgtEl>
+                </p:cond>
+              </p:prevCondLst>
+              <p:nextCondLst>
+                <p:cond evt="onNext" delay="0">
+                  <p:tgtEl>
+                    <p:sldTgt/>
+                  </p:tgtEl>
+                </p:cond>
+              </p:nextCondLst>
+            </p:seq>
+          </p:childTnLst>
+        </p:cTn>
+      </p:par>
+    </p:tnLst>
+    <p:bldLst>
+      <p:bldP spid="6" grpId="0"/>
+      <p:bldP spid="7" grpId="0"/>
+      <p:bldP spid="8" grpId="0"/>
+      <p:bldP spid="6" grpId="1"/>
+      <p:bldP spid="7" grpId="1"/>
+      <p:bldP spid="8" grpId="1"/>
+    </p:bldLst>
+  </p:timing>
 </p:sld>
 </file>
 
 <file path=ppt/slides/slide7.xml><?xml version="1.0" encoding="utf-8"?>
 <p:sld xmlns:a="http://schemas.openxmlformats.org/drawingml/2006/main" xmlns:r="http://schemas.openxmlformats.org/officeDocument/2006/relationships" xmlns:p="http://schemas.openxmlformats.org/presentationml/2006/main">
-  <p:cSld name="Slide 7">
+  <p:cSld>
     <p:bg>
       <p:bgPr>
         <a:blipFill dpi="0" rotWithShape="1">
@@ -6648,13 +6506,12 @@
             <a:avLst/>
           </a:prstGeom>
           <a:noFill/>
-          <a:ln/>
         </p:spPr>
         <p:txBody>
           <a:bodyPr wrap="square" rtlCol="0" anchor="ctr"/>
           <a:lstStyle/>
           <a:p>
-            <a:pPr algn="r" indent="0" marL="0">
+            <a:pPr marL="0" indent="0" algn="r">
               <a:buNone/>
             </a:pPr>
             <a:r>
@@ -6662,9 +6519,9 @@
                 <a:solidFill>
                   <a:srgbClr val="8A9099"/>
                 </a:solidFill>
-                <a:latin typeface="微软雅黑" pitchFamily="34" charset="0"/>
-                <a:ea typeface="微软雅黑" pitchFamily="34" charset="-122"/>
-                <a:cs typeface="微软雅黑" pitchFamily="34" charset="-120"/>
+                <a:latin typeface="微软雅黑" panose="020B0503020204020204" pitchFamily="34" charset="-122"/>
+                <a:ea typeface="微软雅黑" panose="020B0503020204020204" pitchFamily="34" charset="-122"/>
+                <a:cs typeface="微软雅黑" panose="020B0503020204020204" pitchFamily="34" charset="-120"/>
               </a:rPr>
               <a:t>7 / 16</a:t>
             </a:r>
@@ -6687,13 +6544,12 @@
             <a:avLst/>
           </a:prstGeom>
           <a:noFill/>
-          <a:ln/>
         </p:spPr>
         <p:txBody>
           <a:bodyPr wrap="square" rtlCol="0" anchor="ctr"/>
           <a:lstStyle/>
           <a:p>
-            <a:pPr algn="l" indent="0" marL="0">
+            <a:pPr marL="0" indent="0" algn="l">
               <a:buNone/>
             </a:pPr>
             <a:r>
@@ -6701,9 +6557,9 @@
                 <a:solidFill>
                   <a:srgbClr val="1F4E9C"/>
                 </a:solidFill>
-                <a:latin typeface="微软雅黑" pitchFamily="34" charset="0"/>
-                <a:ea typeface="微软雅黑" pitchFamily="34" charset="-122"/>
-                <a:cs typeface="微软雅黑" pitchFamily="34" charset="-120"/>
+                <a:latin typeface="微软雅黑" panose="020B0503020204020204" pitchFamily="34" charset="-122"/>
+                <a:ea typeface="微软雅黑" panose="020B0503020204020204" pitchFamily="34" charset="-122"/>
+                <a:cs typeface="微软雅黑" panose="020B0503020204020204" pitchFamily="34" charset="-120"/>
               </a:rPr>
               <a:t>队列 · 定义</a:t>
             </a:r>
@@ -6726,13 +6582,12 @@
             <a:avLst/>
           </a:prstGeom>
           <a:noFill/>
-          <a:ln/>
         </p:spPr>
         <p:txBody>
           <a:bodyPr wrap="square" rtlCol="0" anchor="ctr"/>
           <a:lstStyle/>
           <a:p>
-            <a:pPr algn="l" indent="0" marL="0">
+            <a:pPr marL="0" indent="0" algn="l">
               <a:buNone/>
             </a:pPr>
             <a:r>
@@ -6740,9 +6595,9 @@
                 <a:solidFill>
                   <a:srgbClr val="1F2329"/>
                 </a:solidFill>
-                <a:latin typeface="微软雅黑" pitchFamily="34" charset="0"/>
-                <a:ea typeface="微软雅黑" pitchFamily="34" charset="-122"/>
-                <a:cs typeface="微软雅黑" pitchFamily="34" charset="-120"/>
+                <a:latin typeface="微软雅黑" panose="020B0503020204020204" pitchFamily="34" charset="-122"/>
+                <a:ea typeface="微软雅黑" panose="020B0503020204020204" pitchFamily="34" charset="-122"/>
+                <a:cs typeface="微软雅黑" panose="020B0503020204020204" pitchFamily="34" charset="-120"/>
               </a:rPr>
               <a:t>循环队列与假溢出</a:t>
             </a:r>
@@ -6767,7 +6622,6 @@
           <a:solidFill>
             <a:srgbClr val="F7F9FC"/>
           </a:solidFill>
-          <a:ln/>
         </p:spPr>
       </p:sp>
       <p:sp>
@@ -6787,7 +6641,6 @@
           <a:solidFill>
             <a:srgbClr val="1F4E9C"/>
           </a:solidFill>
-          <a:ln/>
         </p:spPr>
       </p:sp>
       <p:sp>
@@ -6805,13 +6658,12 @@
             <a:avLst/>
           </a:prstGeom>
           <a:noFill/>
-          <a:ln/>
         </p:spPr>
         <p:txBody>
           <a:bodyPr wrap="square" rtlCol="0" anchor="t"/>
           <a:lstStyle/>
           <a:p>
-            <a:pPr algn="l" indent="0" marL="0">
+            <a:pPr marL="0" indent="0" algn="l">
               <a:lnSpc>
                 <a:spcPct val="125000"/>
               </a:lnSpc>
@@ -6822,9 +6674,9 @@
                 <a:solidFill>
                   <a:srgbClr val="1F2329"/>
                 </a:solidFill>
-                <a:latin typeface="Consolas" pitchFamily="34" charset="0"/>
-                <a:ea typeface="Consolas" pitchFamily="34" charset="-122"/>
-                <a:cs typeface="Consolas" pitchFamily="34" charset="-120"/>
+                <a:latin typeface="Consolas" panose="020B0609020204030204" pitchFamily="34" charset="0"/>
+                <a:ea typeface="Consolas" panose="020B0609020204030204" pitchFamily="34" charset="-122"/>
+                <a:cs typeface="Consolas" panose="020B0609020204030204" pitchFamily="34" charset="-120"/>
               </a:rPr>
               <a:t>typedef struct{ int data[MaxSize]; int rear, front; }SqQueue;
 bool InitQueue(SqQueue &amp;Q){ Q.front = 0; Q.rear = 0; return true; }
@@ -6849,13 +6701,12 @@
             <a:avLst/>
           </a:prstGeom>
           <a:noFill/>
-          <a:ln/>
         </p:spPr>
         <p:txBody>
           <a:bodyPr wrap="square" rtlCol="0" anchor="t"/>
           <a:lstStyle/>
           <a:p>
-            <a:pPr algn="l" indent="0" marL="0">
+            <a:pPr marL="0" indent="0" algn="l">
               <a:lnSpc>
                 <a:spcPct val="115000"/>
               </a:lnSpc>
@@ -6866,25 +6717,68 @@
                 <a:solidFill>
                   <a:srgbClr val="1F4E9C"/>
                 </a:solidFill>
-                <a:latin typeface="微软雅黑" pitchFamily="34" charset="0"/>
-                <a:ea typeface="微软雅黑" pitchFamily="34" charset="-122"/>
-                <a:cs typeface="微软雅黑" pitchFamily="34" charset="-120"/>
+                <a:latin typeface="微软雅黑" panose="020B0503020204020204" pitchFamily="34" charset="-122"/>
+                <a:ea typeface="微软雅黑" panose="020B0503020204020204" pitchFamily="34" charset="-122"/>
+                <a:cs typeface="微软雅黑" panose="020B0503020204020204" pitchFamily="34" charset="-120"/>
               </a:rPr>
               <a:t>•  </a:t>
             </a:r>
-            <a:pPr algn="l" indent="0" marL="0">
+            <a:r>
+              <a:rPr lang="en-US" sz="1800" dirty="0">
+                <a:solidFill>
+                  <a:srgbClr val="000000"/>
+                </a:solidFill>
+              </a:rPr>
+              <a:t>队列一端进（rear）一端出（front）；用数组存时，front 往后走会腾出前面的空间</a:t>
+            </a:r>
+            <a:endParaRPr lang="en-US" sz="1800" dirty="0"/>
+          </a:p>
+        </p:txBody>
+      </p:sp>
+      <p:sp>
+        <p:nvSpPr>
+          <p:cNvPr id="9" name="Text 7"/>
+          <p:cNvSpPr/>
+          <p:nvPr/>
+        </p:nvSpPr>
+        <p:spPr>
+          <a:xfrm>
+            <a:off x="896112" y="4443984"/>
+            <a:ext cx="10454335" cy="397764"/>
+          </a:xfrm>
+          <a:prstGeom prst="rect">
+            <a:avLst/>
+          </a:prstGeom>
+          <a:noFill/>
+        </p:spPr>
+        <p:txBody>
+          <a:bodyPr wrap="square" rtlCol="0" anchor="t"/>
+          <a:lstStyle/>
+          <a:p>
+            <a:pPr marL="0" indent="0" algn="l">
               <a:lnSpc>
                 <a:spcPct val="115000"/>
               </a:lnSpc>
               <a:buNone/>
             </a:pPr>
             <a:r>
+              <a:rPr lang="en-US" sz="1800" b="1" dirty="0">
+                <a:solidFill>
+                  <a:srgbClr val="1F4E9C"/>
+                </a:solidFill>
+                <a:latin typeface="微软雅黑" panose="020B0503020204020204" pitchFamily="34" charset="-122"/>
+                <a:ea typeface="微软雅黑" panose="020B0503020204020204" pitchFamily="34" charset="-122"/>
+                <a:cs typeface="微软雅黑" panose="020B0503020204020204" pitchFamily="34" charset="-120"/>
+              </a:rPr>
+              <a:t>•  </a:t>
+            </a:r>
+            <a:r>
               <a:rPr lang="en-US" sz="1800" dirty="0">
                 <a:solidFill>
                   <a:srgbClr val="000000"/>
                 </a:solidFill>
               </a:rPr>
-              <a:t>队列一端进（rear）一端出（front）；用数组存时，front 往后走会腾出前面的空间</a:t>
+              <a:t>假溢出：rear 走到数组末尾就以为满了，可前面出队腾出的格子还空着，用不上</a:t>
             </a:r>
             <a:endParaRPr lang="en-US" sz="1800" dirty="0"/>
           </a:p>
@@ -6892,26 +6786,25 @@
       </p:sp>
       <p:sp>
         <p:nvSpPr>
-          <p:cNvPr id="9" name="Text 7"/>
-          <p:cNvSpPr/>
-          <p:nvPr/>
-        </p:nvSpPr>
-        <p:spPr>
-          <a:xfrm>
-            <a:off x="896112" y="4443984"/>
-            <a:ext cx="10454335" cy="397764"/>
-          </a:xfrm>
-          <a:prstGeom prst="rect">
-            <a:avLst/>
-          </a:prstGeom>
-          <a:noFill/>
-          <a:ln/>
+          <p:cNvPr id="10" name="Text 8"/>
+          <p:cNvSpPr/>
+          <p:nvPr/>
+        </p:nvSpPr>
+        <p:spPr>
+          <a:xfrm>
+            <a:off x="896112" y="4914900"/>
+            <a:ext cx="10454335" cy="740664"/>
+          </a:xfrm>
+          <a:prstGeom prst="rect">
+            <a:avLst/>
+          </a:prstGeom>
+          <a:noFill/>
         </p:spPr>
         <p:txBody>
           <a:bodyPr wrap="square" rtlCol="0" anchor="t"/>
           <a:lstStyle/>
           <a:p>
-            <a:pPr algn="l" indent="0" marL="0">
+            <a:pPr marL="0" indent="0" algn="l">
               <a:lnSpc>
                 <a:spcPct val="115000"/>
               </a:lnSpc>
@@ -6922,74 +6815,12 @@
                 <a:solidFill>
                   <a:srgbClr val="1F4E9C"/>
                 </a:solidFill>
-                <a:latin typeface="微软雅黑" pitchFamily="34" charset="0"/>
-                <a:ea typeface="微软雅黑" pitchFamily="34" charset="-122"/>
-                <a:cs typeface="微软雅黑" pitchFamily="34" charset="-120"/>
+                <a:latin typeface="微软雅黑" panose="020B0503020204020204" pitchFamily="34" charset="-122"/>
+                <a:ea typeface="微软雅黑" panose="020B0503020204020204" pitchFamily="34" charset="-122"/>
+                <a:cs typeface="微软雅黑" panose="020B0503020204020204" pitchFamily="34" charset="-120"/>
               </a:rPr>
               <a:t>•  </a:t>
             </a:r>
-            <a:pPr algn="l" indent="0" marL="0">
-              <a:lnSpc>
-                <a:spcPct val="115000"/>
-              </a:lnSpc>
-              <a:buNone/>
-            </a:pPr>
-            <a:r>
-              <a:rPr lang="en-US" sz="1800" dirty="0">
-                <a:solidFill>
-                  <a:srgbClr val="000000"/>
-                </a:solidFill>
-              </a:rPr>
-              <a:t>假溢出：rear 走到数组末尾就以为满了，可前面出队腾出的格子还空着，用不上</a:t>
-            </a:r>
-            <a:endParaRPr lang="en-US" sz="1800" dirty="0"/>
-          </a:p>
-        </p:txBody>
-      </p:sp>
-      <p:sp>
-        <p:nvSpPr>
-          <p:cNvPr id="10" name="Text 8"/>
-          <p:cNvSpPr/>
-          <p:nvPr/>
-        </p:nvSpPr>
-        <p:spPr>
-          <a:xfrm>
-            <a:off x="896112" y="4914900"/>
-            <a:ext cx="10454335" cy="740664"/>
-          </a:xfrm>
-          <a:prstGeom prst="rect">
-            <a:avLst/>
-          </a:prstGeom>
-          <a:noFill/>
-          <a:ln/>
-        </p:spPr>
-        <p:txBody>
-          <a:bodyPr wrap="square" rtlCol="0" anchor="t"/>
-          <a:lstStyle/>
-          <a:p>
-            <a:pPr algn="l" indent="0" marL="0">
-              <a:lnSpc>
-                <a:spcPct val="115000"/>
-              </a:lnSpc>
-              <a:buNone/>
-            </a:pPr>
-            <a:r>
-              <a:rPr lang="en-US" sz="1800" b="1" dirty="0">
-                <a:solidFill>
-                  <a:srgbClr val="1F4E9C"/>
-                </a:solidFill>
-                <a:latin typeface="微软雅黑" pitchFamily="34" charset="0"/>
-                <a:ea typeface="微软雅黑" pitchFamily="34" charset="-122"/>
-                <a:cs typeface="微软雅黑" pitchFamily="34" charset="-120"/>
-              </a:rPr>
-              <a:t>•  </a:t>
-            </a:r>
-            <a:pPr algn="l" indent="0" marL="0">
-              <a:lnSpc>
-                <a:spcPct val="115000"/>
-              </a:lnSpc>
-              <a:buNone/>
-            </a:pPr>
             <a:r>
               <a:rPr lang="en-US" sz="1800" dirty="0">
                 <a:solidFill>
@@ -7012,7 +6843,7 @@
 
 <file path=ppt/slides/slide8.xml><?xml version="1.0" encoding="utf-8"?>
 <p:sld xmlns:a="http://schemas.openxmlformats.org/drawingml/2006/main" xmlns:r="http://schemas.openxmlformats.org/officeDocument/2006/relationships" xmlns:p="http://schemas.openxmlformats.org/presentationml/2006/main">
-  <p:cSld name="Slide 8">
+  <p:cSld>
     <p:bg>
       <p:bgPr>
         <a:blipFill dpi="0" rotWithShape="1">
@@ -7056,13 +6887,12 @@
             <a:avLst/>
           </a:prstGeom>
           <a:noFill/>
-          <a:ln/>
         </p:spPr>
         <p:txBody>
           <a:bodyPr wrap="square" rtlCol="0" anchor="ctr"/>
           <a:lstStyle/>
           <a:p>
-            <a:pPr algn="r" indent="0" marL="0">
+            <a:pPr marL="0" indent="0" algn="r">
               <a:buNone/>
             </a:pPr>
             <a:r>
@@ -7070,9 +6900,9 @@
                 <a:solidFill>
                   <a:srgbClr val="8A9099"/>
                 </a:solidFill>
-                <a:latin typeface="微软雅黑" pitchFamily="34" charset="0"/>
-                <a:ea typeface="微软雅黑" pitchFamily="34" charset="-122"/>
-                <a:cs typeface="微软雅黑" pitchFamily="34" charset="-120"/>
+                <a:latin typeface="微软雅黑" panose="020B0503020204020204" pitchFamily="34" charset="-122"/>
+                <a:ea typeface="微软雅黑" panose="020B0503020204020204" pitchFamily="34" charset="-122"/>
+                <a:cs typeface="微软雅黑" panose="020B0503020204020204" pitchFamily="34" charset="-120"/>
               </a:rPr>
               <a:t>8 / 16</a:t>
             </a:r>
@@ -7095,13 +6925,12 @@
             <a:avLst/>
           </a:prstGeom>
           <a:noFill/>
-          <a:ln/>
         </p:spPr>
         <p:txBody>
           <a:bodyPr wrap="square" rtlCol="0" anchor="ctr"/>
           <a:lstStyle/>
           <a:p>
-            <a:pPr algn="l" indent="0" marL="0">
+            <a:pPr marL="0" indent="0" algn="l">
               <a:buNone/>
             </a:pPr>
             <a:r>
@@ -7109,9 +6938,9 @@
                 <a:solidFill>
                   <a:srgbClr val="1F4E9C"/>
                 </a:solidFill>
-                <a:latin typeface="微软雅黑" pitchFamily="34" charset="0"/>
-                <a:ea typeface="微软雅黑" pitchFamily="34" charset="-122"/>
-                <a:cs typeface="微软雅黑" pitchFamily="34" charset="-120"/>
+                <a:latin typeface="微软雅黑" panose="020B0503020204020204" pitchFamily="34" charset="-122"/>
+                <a:ea typeface="微软雅黑" panose="020B0503020204020204" pitchFamily="34" charset="-122"/>
+                <a:cs typeface="微软雅黑" panose="020B0503020204020204" pitchFamily="34" charset="-120"/>
               </a:rPr>
               <a:t>循环队列 · 判满三策略</a:t>
             </a:r>
@@ -7134,13 +6963,12 @@
             <a:avLst/>
           </a:prstGeom>
           <a:noFill/>
-          <a:ln/>
         </p:spPr>
         <p:txBody>
           <a:bodyPr wrap="square" rtlCol="0" anchor="ctr"/>
           <a:lstStyle/>
           <a:p>
-            <a:pPr algn="l" indent="0" marL="0">
+            <a:pPr marL="0" indent="0" algn="l">
               <a:buNone/>
             </a:pPr>
             <a:r>
@@ -7148,9 +6976,9 @@
                 <a:solidFill>
                   <a:srgbClr val="1F2329"/>
                 </a:solidFill>
-                <a:latin typeface="微软雅黑" pitchFamily="34" charset="0"/>
-                <a:ea typeface="微软雅黑" pitchFamily="34" charset="-122"/>
-                <a:cs typeface="微软雅黑" pitchFamily="34" charset="-120"/>
+                <a:latin typeface="微软雅黑" panose="020B0503020204020204" pitchFamily="34" charset="-122"/>
+                <a:ea typeface="微软雅黑" panose="020B0503020204020204" pitchFamily="34" charset="-122"/>
+                <a:cs typeface="微软雅黑" panose="020B0503020204020204" pitchFamily="34" charset="-120"/>
               </a:rPr>
               <a:t>判满三策略：rear==front 既是空又是满，怎么分</a:t>
             </a:r>
@@ -7164,17 +6992,11 @@
           <p:cNvGraphicFramePr>
             <a:graphicFrameLocks noGrp="1"/>
           </p:cNvGraphicFramePr>
-          <p:nvPr>
-            <p:extLst>
-              <p:ext uri="{D42A27DB-BD31-4B8C-83A1-F6EECF244321}">
-                <p14:modId xmlns:p14="http://schemas.microsoft.com/office/powerpoint/2010/main" val="1579011935"/>
-              </p:ext>
-            </p:extLst>
-          </p:nvPr>
+          <p:nvPr/>
         </p:nvGraphicFramePr>
         <p:xfrm>
           <a:off x="822960" y="2395728"/>
-          <a:ext cx="10545775" cy="914400"/>
+          <a:ext cx="10545775" cy="1682496"/>
         </p:xfrm>
         <a:graphic>
           <a:graphicData uri="http://schemas.openxmlformats.org/drawingml/2006/table">
@@ -7192,7 +7014,7 @@
                     <a:bodyPr/>
                     <a:lstStyle/>
                     <a:p>
-                      <a:pPr algn="ctr" indent="0" marL="0">
+                      <a:pPr marL="0" indent="0" algn="ctr">
                         <a:buNone/>
                       </a:pPr>
                       <a:r>
@@ -7200,20 +7022,20 @@
                           <a:solidFill>
                             <a:srgbClr val="1F4E9C"/>
                           </a:solidFill>
-                          <a:latin typeface="微软雅黑" pitchFamily="34" charset="0"/>
-                          <a:ea typeface="微软雅黑" pitchFamily="34" charset="-122"/>
-                          <a:cs typeface="微软雅黑" pitchFamily="34" charset="-120"/>
+                          <a:latin typeface="微软雅黑" panose="020B0503020204020204" pitchFamily="34" charset="-122"/>
+                          <a:ea typeface="微软雅黑" panose="020B0503020204020204" pitchFamily="34" charset="-122"/>
+                          <a:cs typeface="微软雅黑" panose="020B0503020204020204" pitchFamily="34" charset="-120"/>
                         </a:rPr>
                         <a:t>策略</a:t>
                       </a:r>
                       <a:endParaRPr lang="en-US" sz="1500" dirty="0">
-                        <a:latin typeface="微软雅黑" charset="0"/>
-                        <a:ea typeface="微软雅黑" charset="0"/>
-                        <a:cs typeface="微软雅黑" charset="0"/>
+                        <a:latin typeface="微软雅黑" panose="020B0503020204020204" pitchFamily="34" charset="-122"/>
+                        <a:ea typeface="微软雅黑" panose="020B0503020204020204" pitchFamily="34" charset="-122"/>
+                        <a:cs typeface="微软雅黑" panose="020B0503020204020204" pitchFamily="34" charset="-122"/>
                       </a:endParaRPr>
                     </a:p>
                   </a:txBody>
-                  <a:tcPr marL="91440" marR="91440" marT="45720" marB="45720" anchor="ctr">
+                  <a:tcPr anchor="ctr">
                     <a:lnL w="9525" cap="flat" cmpd="sng" algn="ctr">
                       <a:solidFill>
                         <a:srgbClr val="D8DBE0"/>
@@ -7260,7 +7082,7 @@
                     <a:bodyPr/>
                     <a:lstStyle/>
                     <a:p>
-                      <a:pPr algn="ctr" indent="0" marL="0">
+                      <a:pPr marL="0" indent="0" algn="ctr">
                         <a:buNone/>
                       </a:pPr>
                       <a:r>
@@ -7268,20 +7090,20 @@
                           <a:solidFill>
                             <a:srgbClr val="1F4E9C"/>
                           </a:solidFill>
-                          <a:latin typeface="微软雅黑" pitchFamily="34" charset="0"/>
-                          <a:ea typeface="微软雅黑" pitchFamily="34" charset="-122"/>
-                          <a:cs typeface="微软雅黑" pitchFamily="34" charset="-120"/>
+                          <a:latin typeface="微软雅黑" panose="020B0503020204020204" pitchFamily="34" charset="-122"/>
+                          <a:ea typeface="微软雅黑" panose="020B0503020204020204" pitchFamily="34" charset="-122"/>
+                          <a:cs typeface="微软雅黑" panose="020B0503020204020204" pitchFamily="34" charset="-120"/>
                         </a:rPr>
                         <a:t>判空</a:t>
                       </a:r>
                       <a:endParaRPr lang="en-US" sz="1500" dirty="0">
-                        <a:latin typeface="微软雅黑" charset="0"/>
-                        <a:ea typeface="微软雅黑" charset="0"/>
-                        <a:cs typeface="微软雅黑" charset="0"/>
+                        <a:latin typeface="微软雅黑" panose="020B0503020204020204" pitchFamily="34" charset="-122"/>
+                        <a:ea typeface="微软雅黑" panose="020B0503020204020204" pitchFamily="34" charset="-122"/>
+                        <a:cs typeface="微软雅黑" panose="020B0503020204020204" pitchFamily="34" charset="-122"/>
                       </a:endParaRPr>
                     </a:p>
                   </a:txBody>
-                  <a:tcPr marL="91440" marR="91440" marT="45720" marB="45720" anchor="ctr">
+                  <a:tcPr anchor="ctr">
                     <a:lnL w="9525" cap="flat" cmpd="sng" algn="ctr">
                       <a:solidFill>
                         <a:srgbClr val="D8DBE0"/>
@@ -7328,7 +7150,7 @@
                     <a:bodyPr/>
                     <a:lstStyle/>
                     <a:p>
-                      <a:pPr algn="ctr" indent="0" marL="0">
+                      <a:pPr marL="0" indent="0" algn="ctr">
                         <a:buNone/>
                       </a:pPr>
                       <a:r>
@@ -7336,20 +7158,20 @@
                           <a:solidFill>
                             <a:srgbClr val="1F4E9C"/>
                           </a:solidFill>
-                          <a:latin typeface="微软雅黑" pitchFamily="34" charset="0"/>
-                          <a:ea typeface="微软雅黑" pitchFamily="34" charset="-122"/>
-                          <a:cs typeface="微软雅黑" pitchFamily="34" charset="-120"/>
+                          <a:latin typeface="微软雅黑" panose="020B0503020204020204" pitchFamily="34" charset="-122"/>
+                          <a:ea typeface="微软雅黑" panose="020B0503020204020204" pitchFamily="34" charset="-122"/>
+                          <a:cs typeface="微软雅黑" panose="020B0503020204020204" pitchFamily="34" charset="-120"/>
                         </a:rPr>
                         <a:t>判满</a:t>
                       </a:r>
                       <a:endParaRPr lang="en-US" sz="1500" dirty="0">
-                        <a:latin typeface="微软雅黑" charset="0"/>
-                        <a:ea typeface="微软雅黑" charset="0"/>
-                        <a:cs typeface="微软雅黑" charset="0"/>
+                        <a:latin typeface="微软雅黑" panose="020B0503020204020204" pitchFamily="34" charset="-122"/>
+                        <a:ea typeface="微软雅黑" panose="020B0503020204020204" pitchFamily="34" charset="-122"/>
+                        <a:cs typeface="微软雅黑" panose="020B0503020204020204" pitchFamily="34" charset="-122"/>
                       </a:endParaRPr>
                     </a:p>
                   </a:txBody>
-                  <a:tcPr marL="91440" marR="91440" marT="45720" marB="45720" anchor="ctr">
+                  <a:tcPr anchor="ctr">
                     <a:lnL w="9525" cap="flat" cmpd="sng" algn="ctr">
                       <a:solidFill>
                         <a:srgbClr val="D8DBE0"/>
@@ -7396,7 +7218,7 @@
                     <a:bodyPr/>
                     <a:lstStyle/>
                     <a:p>
-                      <a:pPr algn="ctr" indent="0" marL="0">
+                      <a:pPr marL="0" indent="0" algn="ctr">
                         <a:buNone/>
                       </a:pPr>
                       <a:r>
@@ -7404,20 +7226,20 @@
                           <a:solidFill>
                             <a:srgbClr val="1F4E9C"/>
                           </a:solidFill>
-                          <a:latin typeface="微软雅黑" pitchFamily="34" charset="0"/>
-                          <a:ea typeface="微软雅黑" pitchFamily="34" charset="-122"/>
-                          <a:cs typeface="微软雅黑" pitchFamily="34" charset="-120"/>
+                          <a:latin typeface="微软雅黑" panose="020B0503020204020204" pitchFamily="34" charset="-122"/>
+                          <a:ea typeface="微软雅黑" panose="020B0503020204020204" pitchFamily="34" charset="-122"/>
+                          <a:cs typeface="微软雅黑" panose="020B0503020204020204" pitchFamily="34" charset="-120"/>
                         </a:rPr>
                         <a:t>代价</a:t>
                       </a:r>
                       <a:endParaRPr lang="en-US" sz="1500" dirty="0">
-                        <a:latin typeface="微软雅黑" charset="0"/>
-                        <a:ea typeface="微软雅黑" charset="0"/>
-                        <a:cs typeface="微软雅黑" charset="0"/>
+                        <a:latin typeface="微软雅黑" panose="020B0503020204020204" pitchFamily="34" charset="-122"/>
+                        <a:ea typeface="微软雅黑" panose="020B0503020204020204" pitchFamily="34" charset="-122"/>
+                        <a:cs typeface="微软雅黑" panose="020B0503020204020204" pitchFamily="34" charset="-122"/>
                       </a:endParaRPr>
                     </a:p>
                   </a:txBody>
-                  <a:tcPr marL="91440" marR="91440" marT="45720" marB="45720" anchor="ctr">
+                  <a:tcPr anchor="ctr">
                     <a:lnL w="9525" cap="flat" cmpd="sng" algn="ctr">
                       <a:solidFill>
                         <a:srgbClr val="D8DBE0"/>
@@ -7466,7 +7288,7 @@
                     <a:bodyPr/>
                     <a:lstStyle/>
                     <a:p>
-                      <a:pPr algn="ctr" indent="0" marL="0">
+                      <a:pPr marL="0" indent="0" algn="ctr">
                         <a:buNone/>
                       </a:pPr>
                       <a:r>
@@ -7474,20 +7296,20 @@
                           <a:solidFill>
                             <a:srgbClr val="1F2329"/>
                           </a:solidFill>
-                          <a:latin typeface="微软雅黑" pitchFamily="34" charset="0"/>
-                          <a:ea typeface="微软雅黑" pitchFamily="34" charset="-122"/>
-                          <a:cs typeface="微软雅黑" pitchFamily="34" charset="-120"/>
+                          <a:latin typeface="微软雅黑" panose="020B0503020204020204" pitchFamily="34" charset="-122"/>
+                          <a:ea typeface="微软雅黑" panose="020B0503020204020204" pitchFamily="34" charset="-122"/>
+                          <a:cs typeface="微软雅黑" panose="020B0503020204020204" pitchFamily="34" charset="-120"/>
                         </a:rPr>
                         <a:t>牺牲一单元</a:t>
                       </a:r>
                       <a:endParaRPr lang="en-US" sz="1500" dirty="0">
-                        <a:latin typeface="微软雅黑" charset="0"/>
-                        <a:ea typeface="微软雅黑" charset="0"/>
-                        <a:cs typeface="微软雅黑" charset="0"/>
+                        <a:latin typeface="微软雅黑" panose="020B0503020204020204" pitchFamily="34" charset="-122"/>
+                        <a:ea typeface="微软雅黑" panose="020B0503020204020204" pitchFamily="34" charset="-122"/>
+                        <a:cs typeface="微软雅黑" panose="020B0503020204020204" pitchFamily="34" charset="-122"/>
                       </a:endParaRPr>
                     </a:p>
                   </a:txBody>
-                  <a:tcPr marL="91440" marR="91440" marT="45720" marB="45720" anchor="ctr">
+                  <a:tcPr anchor="ctr">
                     <a:lnL w="9525" cap="flat" cmpd="sng" algn="ctr">
                       <a:solidFill>
                         <a:srgbClr val="D8DBE0"/>
@@ -7534,7 +7356,7 @@
                     <a:bodyPr/>
                     <a:lstStyle/>
                     <a:p>
-                      <a:pPr algn="ctr" indent="0" marL="0">
+                      <a:pPr marL="0" indent="0" algn="ctr">
                         <a:buNone/>
                       </a:pPr>
                       <a:r>
@@ -7542,20 +7364,20 @@
                           <a:solidFill>
                             <a:srgbClr val="1F2329"/>
                           </a:solidFill>
-                          <a:latin typeface="微软雅黑" pitchFamily="34" charset="0"/>
-                          <a:ea typeface="微软雅黑" pitchFamily="34" charset="-122"/>
-                          <a:cs typeface="微软雅黑" pitchFamily="34" charset="-120"/>
+                          <a:latin typeface="微软雅黑" panose="020B0503020204020204" pitchFamily="34" charset="-122"/>
+                          <a:ea typeface="微软雅黑" panose="020B0503020204020204" pitchFamily="34" charset="-122"/>
+                          <a:cs typeface="微软雅黑" panose="020B0503020204020204" pitchFamily="34" charset="-120"/>
                         </a:rPr>
                         <a:t>rear==front</a:t>
                       </a:r>
                       <a:endParaRPr lang="en-US" sz="1500" dirty="0">
-                        <a:latin typeface="微软雅黑" charset="0"/>
-                        <a:ea typeface="微软雅黑" charset="0"/>
-                        <a:cs typeface="微软雅黑" charset="0"/>
+                        <a:latin typeface="微软雅黑" panose="020B0503020204020204" pitchFamily="34" charset="-122"/>
+                        <a:ea typeface="微软雅黑" panose="020B0503020204020204" pitchFamily="34" charset="-122"/>
+                        <a:cs typeface="微软雅黑" panose="020B0503020204020204" pitchFamily="34" charset="-122"/>
                       </a:endParaRPr>
                     </a:p>
                   </a:txBody>
-                  <a:tcPr marL="91440" marR="91440" marT="45720" marB="45720" anchor="ctr">
+                  <a:tcPr anchor="ctr">
                     <a:lnL w="9525" cap="flat" cmpd="sng" algn="ctr">
                       <a:solidFill>
                         <a:srgbClr val="D8DBE0"/>
@@ -7602,7 +7424,7 @@
                     <a:bodyPr/>
                     <a:lstStyle/>
                     <a:p>
-                      <a:pPr algn="ctr" indent="0" marL="0">
+                      <a:pPr marL="0" indent="0" algn="ctr">
                         <a:buNone/>
                       </a:pPr>
                       <a:r>
@@ -7610,20 +7432,20 @@
                           <a:solidFill>
                             <a:srgbClr val="1F2329"/>
                           </a:solidFill>
-                          <a:latin typeface="微软雅黑" pitchFamily="34" charset="0"/>
-                          <a:ea typeface="微软雅黑" pitchFamily="34" charset="-122"/>
-                          <a:cs typeface="微软雅黑" pitchFamily="34" charset="-120"/>
+                          <a:latin typeface="微软雅黑" panose="020B0503020204020204" pitchFamily="34" charset="-122"/>
+                          <a:ea typeface="微软雅黑" panose="020B0503020204020204" pitchFamily="34" charset="-122"/>
+                          <a:cs typeface="微软雅黑" panose="020B0503020204020204" pitchFamily="34" charset="-120"/>
                         </a:rPr>
                         <a:t>(rear+1)%MaxSize==front</a:t>
                       </a:r>
                       <a:endParaRPr lang="en-US" sz="1500" dirty="0">
-                        <a:latin typeface="微软雅黑" charset="0"/>
-                        <a:ea typeface="微软雅黑" charset="0"/>
-                        <a:cs typeface="微软雅黑" charset="0"/>
+                        <a:latin typeface="微软雅黑" panose="020B0503020204020204" pitchFamily="34" charset="-122"/>
+                        <a:ea typeface="微软雅黑" panose="020B0503020204020204" pitchFamily="34" charset="-122"/>
+                        <a:cs typeface="微软雅黑" panose="020B0503020204020204" pitchFamily="34" charset="-122"/>
                       </a:endParaRPr>
                     </a:p>
                   </a:txBody>
-                  <a:tcPr marL="91440" marR="91440" marT="45720" marB="45720" anchor="ctr">
+                  <a:tcPr anchor="ctr">
                     <a:lnL w="9525" cap="flat" cmpd="sng" algn="ctr">
                       <a:solidFill>
                         <a:srgbClr val="D8DBE0"/>
@@ -7670,7 +7492,7 @@
                     <a:bodyPr/>
                     <a:lstStyle/>
                     <a:p>
-                      <a:pPr algn="ctr" indent="0" marL="0">
+                      <a:pPr marL="0" indent="0" algn="ctr">
                         <a:buNone/>
                       </a:pPr>
                       <a:r>
@@ -7678,20 +7500,20 @@
                           <a:solidFill>
                             <a:srgbClr val="1F2329"/>
                           </a:solidFill>
-                          <a:latin typeface="微软雅黑" pitchFamily="34" charset="0"/>
-                          <a:ea typeface="微软雅黑" pitchFamily="34" charset="-122"/>
-                          <a:cs typeface="微软雅黑" pitchFamily="34" charset="-120"/>
+                          <a:latin typeface="微软雅黑" panose="020B0503020204020204" pitchFamily="34" charset="-122"/>
+                          <a:ea typeface="微软雅黑" panose="020B0503020204020204" pitchFamily="34" charset="-122"/>
+                          <a:cs typeface="微软雅黑" panose="020B0503020204020204" pitchFamily="34" charset="-120"/>
                         </a:rPr>
                         <a:t>少存一个</a:t>
                       </a:r>
                       <a:endParaRPr lang="en-US" sz="1500" dirty="0">
-                        <a:latin typeface="微软雅黑" charset="0"/>
-                        <a:ea typeface="微软雅黑" charset="0"/>
-                        <a:cs typeface="微软雅黑" charset="0"/>
+                        <a:latin typeface="微软雅黑" panose="020B0503020204020204" pitchFamily="34" charset="-122"/>
+                        <a:ea typeface="微软雅黑" panose="020B0503020204020204" pitchFamily="34" charset="-122"/>
+                        <a:cs typeface="微软雅黑" panose="020B0503020204020204" pitchFamily="34" charset="-122"/>
                       </a:endParaRPr>
                     </a:p>
                   </a:txBody>
-                  <a:tcPr marL="91440" marR="91440" marT="45720" marB="45720" anchor="ctr">
+                  <a:tcPr anchor="ctr">
                     <a:lnL w="9525" cap="flat" cmpd="sng" algn="ctr">
                       <a:solidFill>
                         <a:srgbClr val="D8DBE0"/>
@@ -7740,7 +7562,7 @@
                     <a:bodyPr/>
                     <a:lstStyle/>
                     <a:p>
-                      <a:pPr algn="ctr" indent="0" marL="0">
+                      <a:pPr marL="0" indent="0" algn="ctr">
                         <a:buNone/>
                       </a:pPr>
                       <a:r>
@@ -7748,20 +7570,20 @@
                           <a:solidFill>
                             <a:srgbClr val="1F2329"/>
                           </a:solidFill>
-                          <a:latin typeface="微软雅黑" pitchFamily="34" charset="0"/>
-                          <a:ea typeface="微软雅黑" pitchFamily="34" charset="-122"/>
-                          <a:cs typeface="微软雅黑" pitchFamily="34" charset="-120"/>
+                          <a:latin typeface="微软雅黑" panose="020B0503020204020204" pitchFamily="34" charset="-122"/>
+                          <a:ea typeface="微软雅黑" panose="020B0503020204020204" pitchFamily="34" charset="-122"/>
+                          <a:cs typeface="微软雅黑" panose="020B0503020204020204" pitchFamily="34" charset="-120"/>
                         </a:rPr>
                         <a:t>加 size 字段</a:t>
                       </a:r>
                       <a:endParaRPr lang="en-US" sz="1500" dirty="0">
-                        <a:latin typeface="微软雅黑" charset="0"/>
-                        <a:ea typeface="微软雅黑" charset="0"/>
-                        <a:cs typeface="微软雅黑" charset="0"/>
+                        <a:latin typeface="微软雅黑" panose="020B0503020204020204" pitchFamily="34" charset="-122"/>
+                        <a:ea typeface="微软雅黑" panose="020B0503020204020204" pitchFamily="34" charset="-122"/>
+                        <a:cs typeface="微软雅黑" panose="020B0503020204020204" pitchFamily="34" charset="-122"/>
                       </a:endParaRPr>
                     </a:p>
                   </a:txBody>
-                  <a:tcPr marL="91440" marR="91440" marT="45720" marB="45720" anchor="ctr">
+                  <a:tcPr anchor="ctr">
                     <a:lnL w="9525" cap="flat" cmpd="sng" algn="ctr">
                       <a:solidFill>
                         <a:srgbClr val="D8DBE0"/>
@@ -7808,7 +7630,7 @@
                     <a:bodyPr/>
                     <a:lstStyle/>
                     <a:p>
-                      <a:pPr algn="ctr" indent="0" marL="0">
+                      <a:pPr marL="0" indent="0" algn="ctr">
                         <a:buNone/>
                       </a:pPr>
                       <a:r>
@@ -7816,20 +7638,20 @@
                           <a:solidFill>
                             <a:srgbClr val="1F2329"/>
                           </a:solidFill>
-                          <a:latin typeface="微软雅黑" pitchFamily="34" charset="0"/>
-                          <a:ea typeface="微软雅黑" pitchFamily="34" charset="-122"/>
-                          <a:cs typeface="微软雅黑" pitchFamily="34" charset="-120"/>
+                          <a:latin typeface="微软雅黑" panose="020B0503020204020204" pitchFamily="34" charset="-122"/>
+                          <a:ea typeface="微软雅黑" panose="020B0503020204020204" pitchFamily="34" charset="-122"/>
+                          <a:cs typeface="微软雅黑" panose="020B0503020204020204" pitchFamily="34" charset="-120"/>
                         </a:rPr>
                         <a:t>size==0</a:t>
                       </a:r>
                       <a:endParaRPr lang="en-US" sz="1500" dirty="0">
-                        <a:latin typeface="微软雅黑" charset="0"/>
-                        <a:ea typeface="微软雅黑" charset="0"/>
-                        <a:cs typeface="微软雅黑" charset="0"/>
+                        <a:latin typeface="微软雅黑" panose="020B0503020204020204" pitchFamily="34" charset="-122"/>
+                        <a:ea typeface="微软雅黑" panose="020B0503020204020204" pitchFamily="34" charset="-122"/>
+                        <a:cs typeface="微软雅黑" panose="020B0503020204020204" pitchFamily="34" charset="-122"/>
                       </a:endParaRPr>
                     </a:p>
                   </a:txBody>
-                  <a:tcPr marL="91440" marR="91440" marT="45720" marB="45720" anchor="ctr">
+                  <a:tcPr anchor="ctr">
                     <a:lnL w="9525" cap="flat" cmpd="sng" algn="ctr">
                       <a:solidFill>
                         <a:srgbClr val="D8DBE0"/>
@@ -7876,7 +7698,7 @@
                     <a:bodyPr/>
                     <a:lstStyle/>
                     <a:p>
-                      <a:pPr algn="ctr" indent="0" marL="0">
+                      <a:pPr marL="0" indent="0" algn="ctr">
                         <a:buNone/>
                       </a:pPr>
                       <a:r>
@@ -7884,20 +7706,20 @@
                           <a:solidFill>
                             <a:srgbClr val="1F2329"/>
                           </a:solidFill>
-                          <a:latin typeface="微软雅黑" pitchFamily="34" charset="0"/>
-                          <a:ea typeface="微软雅黑" pitchFamily="34" charset="-122"/>
-                          <a:cs typeface="微软雅黑" pitchFamily="34" charset="-120"/>
+                          <a:latin typeface="微软雅黑" panose="020B0503020204020204" pitchFamily="34" charset="-122"/>
+                          <a:ea typeface="微软雅黑" panose="020B0503020204020204" pitchFamily="34" charset="-122"/>
+                          <a:cs typeface="微软雅黑" panose="020B0503020204020204" pitchFamily="34" charset="-120"/>
                         </a:rPr>
                         <a:t>size==MaxSize</a:t>
                       </a:r>
                       <a:endParaRPr lang="en-US" sz="1500" dirty="0">
-                        <a:latin typeface="微软雅黑" charset="0"/>
-                        <a:ea typeface="微软雅黑" charset="0"/>
-                        <a:cs typeface="微软雅黑" charset="0"/>
+                        <a:latin typeface="微软雅黑" panose="020B0503020204020204" pitchFamily="34" charset="-122"/>
+                        <a:ea typeface="微软雅黑" panose="020B0503020204020204" pitchFamily="34" charset="-122"/>
+                        <a:cs typeface="微软雅黑" panose="020B0503020204020204" pitchFamily="34" charset="-122"/>
                       </a:endParaRPr>
                     </a:p>
                   </a:txBody>
-                  <a:tcPr marL="91440" marR="91440" marT="45720" marB="45720" anchor="ctr">
+                  <a:tcPr anchor="ctr">
                     <a:lnL w="9525" cap="flat" cmpd="sng" algn="ctr">
                       <a:solidFill>
                         <a:srgbClr val="D8DBE0"/>
@@ -7944,7 +7766,7 @@
                     <a:bodyPr/>
                     <a:lstStyle/>
                     <a:p>
-                      <a:pPr algn="ctr" indent="0" marL="0">
+                      <a:pPr marL="0" indent="0" algn="ctr">
                         <a:buNone/>
                       </a:pPr>
                       <a:r>
@@ -7952,20 +7774,20 @@
                           <a:solidFill>
                             <a:srgbClr val="1F2329"/>
                           </a:solidFill>
-                          <a:latin typeface="微软雅黑" pitchFamily="34" charset="0"/>
-                          <a:ea typeface="微软雅黑" pitchFamily="34" charset="-122"/>
-                          <a:cs typeface="微软雅黑" pitchFamily="34" charset="-120"/>
+                          <a:latin typeface="微软雅黑" panose="020B0503020204020204" pitchFamily="34" charset="-122"/>
+                          <a:ea typeface="微软雅黑" panose="020B0503020204020204" pitchFamily="34" charset="-122"/>
+                          <a:cs typeface="微软雅黑" panose="020B0503020204020204" pitchFamily="34" charset="-120"/>
                         </a:rPr>
                         <a:t>入出队都维护 size</a:t>
                       </a:r>
                       <a:endParaRPr lang="en-US" sz="1500" dirty="0">
-                        <a:latin typeface="微软雅黑" charset="0"/>
-                        <a:ea typeface="微软雅黑" charset="0"/>
-                        <a:cs typeface="微软雅黑" charset="0"/>
+                        <a:latin typeface="微软雅黑" panose="020B0503020204020204" pitchFamily="34" charset="-122"/>
+                        <a:ea typeface="微软雅黑" panose="020B0503020204020204" pitchFamily="34" charset="-122"/>
+                        <a:cs typeface="微软雅黑" panose="020B0503020204020204" pitchFamily="34" charset="-122"/>
                       </a:endParaRPr>
                     </a:p>
                   </a:txBody>
-                  <a:tcPr marL="91440" marR="91440" marT="45720" marB="45720" anchor="ctr">
+                  <a:tcPr anchor="ctr">
                     <a:lnL w="9525" cap="flat" cmpd="sng" algn="ctr">
                       <a:solidFill>
                         <a:srgbClr val="D8DBE0"/>
@@ -8014,7 +7836,7 @@
                     <a:bodyPr/>
                     <a:lstStyle/>
                     <a:p>
-                      <a:pPr algn="ctr" indent="0" marL="0">
+                      <a:pPr marL="0" indent="0" algn="ctr">
                         <a:buNone/>
                       </a:pPr>
                       <a:r>
@@ -8022,20 +7844,20 @@
                           <a:solidFill>
                             <a:srgbClr val="1F2329"/>
                           </a:solidFill>
-                          <a:latin typeface="微软雅黑" pitchFamily="34" charset="0"/>
-                          <a:ea typeface="微软雅黑" pitchFamily="34" charset="-122"/>
-                          <a:cs typeface="微软雅黑" pitchFamily="34" charset="-120"/>
+                          <a:latin typeface="微软雅黑" panose="020B0503020204020204" pitchFamily="34" charset="-122"/>
+                          <a:ea typeface="微软雅黑" panose="020B0503020204020204" pitchFamily="34" charset="-122"/>
+                          <a:cs typeface="微软雅黑" panose="020B0503020204020204" pitchFamily="34" charset="-120"/>
                         </a:rPr>
                         <a:t>加 tag 字段</a:t>
                       </a:r>
                       <a:endParaRPr lang="en-US" sz="1500" dirty="0">
-                        <a:latin typeface="微软雅黑" charset="0"/>
-                        <a:ea typeface="微软雅黑" charset="0"/>
-                        <a:cs typeface="微软雅黑" charset="0"/>
+                        <a:latin typeface="微软雅黑" panose="020B0503020204020204" pitchFamily="34" charset="-122"/>
+                        <a:ea typeface="微软雅黑" panose="020B0503020204020204" pitchFamily="34" charset="-122"/>
+                        <a:cs typeface="微软雅黑" panose="020B0503020204020204" pitchFamily="34" charset="-122"/>
                       </a:endParaRPr>
                     </a:p>
                   </a:txBody>
-                  <a:tcPr marL="91440" marR="91440" marT="45720" marB="45720" anchor="ctr">
+                  <a:tcPr anchor="ctr">
                     <a:lnL w="9525" cap="flat" cmpd="sng" algn="ctr">
                       <a:solidFill>
                         <a:srgbClr val="D8DBE0"/>
@@ -8082,7 +7904,7 @@
                     <a:bodyPr/>
                     <a:lstStyle/>
                     <a:p>
-                      <a:pPr algn="ctr" indent="0" marL="0">
+                      <a:pPr marL="0" indent="0" algn="ctr">
                         <a:buNone/>
                       </a:pPr>
                       <a:r>
@@ -8090,20 +7912,20 @@
                           <a:solidFill>
                             <a:srgbClr val="1F2329"/>
                           </a:solidFill>
-                          <a:latin typeface="微软雅黑" pitchFamily="34" charset="0"/>
-                          <a:ea typeface="微软雅黑" pitchFamily="34" charset="-122"/>
-                          <a:cs typeface="微软雅黑" pitchFamily="34" charset="-120"/>
+                          <a:latin typeface="微软雅黑" panose="020B0503020204020204" pitchFamily="34" charset="-122"/>
+                          <a:ea typeface="微软雅黑" panose="020B0503020204020204" pitchFamily="34" charset="-122"/>
+                          <a:cs typeface="微软雅黑" panose="020B0503020204020204" pitchFamily="34" charset="-120"/>
                         </a:rPr>
                         <a:t>front==rear 且 tag==0</a:t>
                       </a:r>
                       <a:endParaRPr lang="en-US" sz="1500" dirty="0">
-                        <a:latin typeface="微软雅黑" charset="0"/>
-                        <a:ea typeface="微软雅黑" charset="0"/>
-                        <a:cs typeface="微软雅黑" charset="0"/>
+                        <a:latin typeface="微软雅黑" panose="020B0503020204020204" pitchFamily="34" charset="-122"/>
+                        <a:ea typeface="微软雅黑" panose="020B0503020204020204" pitchFamily="34" charset="-122"/>
+                        <a:cs typeface="微软雅黑" panose="020B0503020204020204" pitchFamily="34" charset="-122"/>
                       </a:endParaRPr>
                     </a:p>
                   </a:txBody>
-                  <a:tcPr marL="91440" marR="91440" marT="45720" marB="45720" anchor="ctr">
+                  <a:tcPr anchor="ctr">
                     <a:lnL w="9525" cap="flat" cmpd="sng" algn="ctr">
                       <a:solidFill>
                         <a:srgbClr val="D8DBE0"/>
@@ -8150,7 +7972,7 @@
                     <a:bodyPr/>
                     <a:lstStyle/>
                     <a:p>
-                      <a:pPr algn="ctr" indent="0" marL="0">
+                      <a:pPr marL="0" indent="0" algn="ctr">
                         <a:buNone/>
                       </a:pPr>
                       <a:r>
@@ -8158,20 +7980,20 @@
                           <a:solidFill>
                             <a:srgbClr val="1F2329"/>
                           </a:solidFill>
-                          <a:latin typeface="微软雅黑" pitchFamily="34" charset="0"/>
-                          <a:ea typeface="微软雅黑" pitchFamily="34" charset="-122"/>
-                          <a:cs typeface="微软雅黑" pitchFamily="34" charset="-120"/>
+                          <a:latin typeface="微软雅黑" panose="020B0503020204020204" pitchFamily="34" charset="-122"/>
+                          <a:ea typeface="微软雅黑" panose="020B0503020204020204" pitchFamily="34" charset="-122"/>
+                          <a:cs typeface="微软雅黑" panose="020B0503020204020204" pitchFamily="34" charset="-120"/>
                         </a:rPr>
                         <a:t>front==rear 且 tag==1</a:t>
                       </a:r>
                       <a:endParaRPr lang="en-US" sz="1500" dirty="0">
-                        <a:latin typeface="微软雅黑" charset="0"/>
-                        <a:ea typeface="微软雅黑" charset="0"/>
-                        <a:cs typeface="微软雅黑" charset="0"/>
+                        <a:latin typeface="微软雅黑" panose="020B0503020204020204" pitchFamily="34" charset="-122"/>
+                        <a:ea typeface="微软雅黑" panose="020B0503020204020204" pitchFamily="34" charset="-122"/>
+                        <a:cs typeface="微软雅黑" panose="020B0503020204020204" pitchFamily="34" charset="-122"/>
                       </a:endParaRPr>
                     </a:p>
                   </a:txBody>
-                  <a:tcPr marL="91440" marR="91440" marT="45720" marB="45720" anchor="ctr">
+                  <a:tcPr anchor="ctr">
                     <a:lnL w="9525" cap="flat" cmpd="sng" algn="ctr">
                       <a:solidFill>
                         <a:srgbClr val="D8DBE0"/>
@@ -8218,7 +8040,7 @@
                     <a:bodyPr/>
                     <a:lstStyle/>
                     <a:p>
-                      <a:pPr algn="ctr" indent="0" marL="0">
+                      <a:pPr marL="0" indent="0" algn="ctr">
                         <a:buNone/>
                       </a:pPr>
                       <a:r>
@@ -8226,20 +8048,20 @@
                           <a:solidFill>
                             <a:srgbClr val="1F2329"/>
                           </a:solidFill>
-                          <a:latin typeface="微软雅黑" pitchFamily="34" charset="0"/>
-                          <a:ea typeface="微软雅黑" pitchFamily="34" charset="-122"/>
-                          <a:cs typeface="微软雅黑" pitchFamily="34" charset="-120"/>
+                          <a:latin typeface="微软雅黑" panose="020B0503020204020204" pitchFamily="34" charset="-122"/>
+                          <a:ea typeface="微软雅黑" panose="020B0503020204020204" pitchFamily="34" charset="-122"/>
+                          <a:cs typeface="微软雅黑" panose="020B0503020204020204" pitchFamily="34" charset="-120"/>
                         </a:rPr>
                         <a:t>入队追上时 tag 置1</a:t>
                       </a:r>
                       <a:endParaRPr lang="en-US" sz="1500" dirty="0">
-                        <a:latin typeface="微软雅黑" charset="0"/>
-                        <a:ea typeface="微软雅黑" charset="0"/>
-                        <a:cs typeface="微软雅黑" charset="0"/>
+                        <a:latin typeface="微软雅黑" panose="020B0503020204020204" pitchFamily="34" charset="-122"/>
+                        <a:ea typeface="微软雅黑" panose="020B0503020204020204" pitchFamily="34" charset="-122"/>
+                        <a:cs typeface="微软雅黑" panose="020B0503020204020204" pitchFamily="34" charset="-122"/>
                       </a:endParaRPr>
                     </a:p>
                   </a:txBody>
-                  <a:tcPr marL="91440" marR="91440" marT="45720" marB="45720" anchor="ctr">
+                  <a:tcPr anchor="ctr">
                     <a:lnL w="9525" cap="flat" cmpd="sng" algn="ctr">
                       <a:solidFill>
                         <a:srgbClr val="D8DBE0"/>
@@ -8301,13 +8123,12 @@
             <a:avLst/>
           </a:prstGeom>
           <a:noFill/>
-          <a:ln/>
         </p:spPr>
         <p:txBody>
           <a:bodyPr wrap="square" rtlCol="0" anchor="t"/>
           <a:lstStyle/>
           <a:p>
-            <a:pPr algn="l" indent="0" marL="0">
+            <a:pPr marL="0" indent="0" algn="l">
               <a:buNone/>
             </a:pPr>
             <a:r>
@@ -8315,9 +8136,9 @@
                 <a:solidFill>
                   <a:srgbClr val="8A9099"/>
                 </a:solidFill>
-                <a:latin typeface="微软雅黑" pitchFamily="34" charset="0"/>
-                <a:ea typeface="微软雅黑" pitchFamily="34" charset="-122"/>
-                <a:cs typeface="微软雅黑" pitchFamily="34" charset="-120"/>
+                <a:latin typeface="微软雅黑" panose="020B0503020204020204" pitchFamily="34" charset="-122"/>
+                <a:ea typeface="微软雅黑" panose="020B0503020204020204" pitchFamily="34" charset="-122"/>
+                <a:cs typeface="微软雅黑" panose="020B0503020204020204" pitchFamily="34" charset="-120"/>
               </a:rPr>
               <a:t>根源是 rear==front 分不清空还是满；本课程统一用牺牲一单元，最简单、不加字段</a:t>
             </a:r>
@@ -8330,12 +8151,285 @@
   <p:clrMapOvr>
     <a:masterClrMapping/>
   </p:clrMapOvr>
+  <p:timing>
+    <p:tnLst>
+      <p:par>
+        <p:cTn id="1" dur="indefinite" restart="never" nodeType="tmRoot">
+          <p:childTnLst>
+            <p:seq concurrent="1" nextAc="seek">
+              <p:cTn id="2" dur="indefinite" nodeType="mainSeq">
+                <p:childTnLst>
+                  <p:par>
+                    <p:cTn id="3" fill="hold">
+                      <p:stCondLst>
+                        <p:cond delay="indefinite"/>
+                      </p:stCondLst>
+                      <p:childTnLst>
+                        <p:par>
+                          <p:cTn id="4" fill="hold">
+                            <p:stCondLst>
+                              <p:cond delay="0"/>
+                            </p:stCondLst>
+                            <p:childTnLst>
+                              <p:par>
+                                <p:cTn id="5" presetID="2" presetClass="entr" presetSubtype="4" fill="hold" grpId="0" nodeType="clickEffect">
+                                  <p:stCondLst>
+                                    <p:cond delay="0"/>
+                                  </p:stCondLst>
+                                  <p:childTnLst>
+                                    <p:set>
+                                      <p:cBhvr>
+                                        <p:cTn id="6" dur="1" fill="hold">
+                                          <p:stCondLst>
+                                            <p:cond delay="0"/>
+                                          </p:stCondLst>
+                                        </p:cTn>
+                                        <p:tgtEl>
+                                          <p:spTgt spid="2"/>
+                                        </p:tgtEl>
+                                        <p:attrNameLst>
+                                          <p:attrName>style.visibility</p:attrName>
+                                        </p:attrNameLst>
+                                      </p:cBhvr>
+                                      <p:to>
+                                        <p:strVal val="visible"/>
+                                      </p:to>
+                                    </p:set>
+                                    <p:anim calcmode="lin" valueType="num">
+                                      <p:cBhvr additive="base">
+                                        <p:cTn id="7" dur="500" fill="hold"/>
+                                        <p:tgtEl>
+                                          <p:spTgt spid="2"/>
+                                        </p:tgtEl>
+                                        <p:attrNameLst>
+                                          <p:attrName>ppt_x</p:attrName>
+                                        </p:attrNameLst>
+                                      </p:cBhvr>
+                                      <p:tavLst>
+                                        <p:tav tm="0">
+                                          <p:val>
+                                            <p:strVal val="#ppt_x"/>
+                                          </p:val>
+                                        </p:tav>
+                                        <p:tav tm="100000">
+                                          <p:val>
+                                            <p:strVal val="#ppt_x"/>
+                                          </p:val>
+                                        </p:tav>
+                                      </p:tavLst>
+                                    </p:anim>
+                                    <p:anim calcmode="lin" valueType="num">
+                                      <p:cBhvr additive="base">
+                                        <p:cTn id="8" dur="500" fill="hold"/>
+                                        <p:tgtEl>
+                                          <p:spTgt spid="2"/>
+                                        </p:tgtEl>
+                                        <p:attrNameLst>
+                                          <p:attrName>ppt_y</p:attrName>
+                                        </p:attrNameLst>
+                                      </p:cBhvr>
+                                      <p:tavLst>
+                                        <p:tav tm="0">
+                                          <p:val>
+                                            <p:strVal val="1+#ppt_h/2"/>
+                                          </p:val>
+                                        </p:tav>
+                                        <p:tav tm="100000">
+                                          <p:val>
+                                            <p:strVal val="#ppt_y"/>
+                                          </p:val>
+                                        </p:tav>
+                                      </p:tavLst>
+                                    </p:anim>
+                                  </p:childTnLst>
+                                </p:cTn>
+                              </p:par>
+                              <p:par>
+                                <p:cTn id="9" presetID="2" presetClass="entr" presetSubtype="4" fill="hold" nodeType="withEffect">
+                                  <p:stCondLst>
+                                    <p:cond delay="0"/>
+                                  </p:stCondLst>
+                                  <p:childTnLst>
+                                    <p:set>
+                                      <p:cBhvr>
+                                        <p:cTn id="10" dur="1" fill="hold">
+                                          <p:stCondLst>
+                                            <p:cond delay="0"/>
+                                          </p:stCondLst>
+                                        </p:cTn>
+                                        <p:tgtEl>
+                                          <p:spTgt spid="9"/>
+                                        </p:tgtEl>
+                                        <p:attrNameLst>
+                                          <p:attrName>style.visibility</p:attrName>
+                                        </p:attrNameLst>
+                                      </p:cBhvr>
+                                      <p:to>
+                                        <p:strVal val="visible"/>
+                                      </p:to>
+                                    </p:set>
+                                    <p:anim calcmode="lin" valueType="num">
+                                      <p:cBhvr additive="base">
+                                        <p:cTn id="11" dur="500" fill="hold"/>
+                                        <p:tgtEl>
+                                          <p:spTgt spid="9"/>
+                                        </p:tgtEl>
+                                        <p:attrNameLst>
+                                          <p:attrName>ppt_x</p:attrName>
+                                        </p:attrNameLst>
+                                      </p:cBhvr>
+                                      <p:tavLst>
+                                        <p:tav tm="0">
+                                          <p:val>
+                                            <p:strVal val="#ppt_x"/>
+                                          </p:val>
+                                        </p:tav>
+                                        <p:tav tm="100000">
+                                          <p:val>
+                                            <p:strVal val="#ppt_x"/>
+                                          </p:val>
+                                        </p:tav>
+                                      </p:tavLst>
+                                    </p:anim>
+                                    <p:anim calcmode="lin" valueType="num">
+                                      <p:cBhvr additive="base">
+                                        <p:cTn id="12" dur="500" fill="hold"/>
+                                        <p:tgtEl>
+                                          <p:spTgt spid="9"/>
+                                        </p:tgtEl>
+                                        <p:attrNameLst>
+                                          <p:attrName>ppt_y</p:attrName>
+                                        </p:attrNameLst>
+                                      </p:cBhvr>
+                                      <p:tavLst>
+                                        <p:tav tm="0">
+                                          <p:val>
+                                            <p:strVal val="1+#ppt_h/2"/>
+                                          </p:val>
+                                        </p:tav>
+                                        <p:tav tm="100000">
+                                          <p:val>
+                                            <p:strVal val="#ppt_y"/>
+                                          </p:val>
+                                        </p:tav>
+                                      </p:tavLst>
+                                    </p:anim>
+                                  </p:childTnLst>
+                                </p:cTn>
+                              </p:par>
+                              <p:par>
+                                <p:cTn id="13" presetID="2" presetClass="entr" presetSubtype="4" fill="hold" grpId="0" nodeType="withEffect">
+                                  <p:stCondLst>
+                                    <p:cond delay="0"/>
+                                  </p:stCondLst>
+                                  <p:childTnLst>
+                                    <p:set>
+                                      <p:cBhvr>
+                                        <p:cTn id="14" dur="1" fill="hold">
+                                          <p:stCondLst>
+                                            <p:cond delay="0"/>
+                                          </p:stCondLst>
+                                        </p:cTn>
+                                        <p:tgtEl>
+                                          <p:spTgt spid="6"/>
+                                        </p:tgtEl>
+                                        <p:attrNameLst>
+                                          <p:attrName>style.visibility</p:attrName>
+                                        </p:attrNameLst>
+                                      </p:cBhvr>
+                                      <p:to>
+                                        <p:strVal val="visible"/>
+                                      </p:to>
+                                    </p:set>
+                                    <p:anim calcmode="lin" valueType="num">
+                                      <p:cBhvr additive="base">
+                                        <p:cTn id="15" dur="500" fill="hold"/>
+                                        <p:tgtEl>
+                                          <p:spTgt spid="6"/>
+                                        </p:tgtEl>
+                                        <p:attrNameLst>
+                                          <p:attrName>ppt_x</p:attrName>
+                                        </p:attrNameLst>
+                                      </p:cBhvr>
+                                      <p:tavLst>
+                                        <p:tav tm="0">
+                                          <p:val>
+                                            <p:strVal val="#ppt_x"/>
+                                          </p:val>
+                                        </p:tav>
+                                        <p:tav tm="100000">
+                                          <p:val>
+                                            <p:strVal val="#ppt_x"/>
+                                          </p:val>
+                                        </p:tav>
+                                      </p:tavLst>
+                                    </p:anim>
+                                    <p:anim calcmode="lin" valueType="num">
+                                      <p:cBhvr additive="base">
+                                        <p:cTn id="16" dur="500" fill="hold"/>
+                                        <p:tgtEl>
+                                          <p:spTgt spid="6"/>
+                                        </p:tgtEl>
+                                        <p:attrNameLst>
+                                          <p:attrName>ppt_y</p:attrName>
+                                        </p:attrNameLst>
+                                      </p:cBhvr>
+                                      <p:tavLst>
+                                        <p:tav tm="0">
+                                          <p:val>
+                                            <p:strVal val="1+#ppt_h/2"/>
+                                          </p:val>
+                                        </p:tav>
+                                        <p:tav tm="100000">
+                                          <p:val>
+                                            <p:strVal val="#ppt_y"/>
+                                          </p:val>
+                                        </p:tav>
+                                      </p:tavLst>
+                                    </p:anim>
+                                  </p:childTnLst>
+                                </p:cTn>
+                              </p:par>
+                            </p:childTnLst>
+                          </p:cTn>
+                        </p:par>
+                      </p:childTnLst>
+                    </p:cTn>
+                  </p:par>
+                </p:childTnLst>
+              </p:cTn>
+              <p:prevCondLst>
+                <p:cond evt="onPrev" delay="0">
+                  <p:tgtEl>
+                    <p:sldTgt/>
+                  </p:tgtEl>
+                </p:cond>
+              </p:prevCondLst>
+              <p:nextCondLst>
+                <p:cond evt="onNext" delay="0">
+                  <p:tgtEl>
+                    <p:sldTgt/>
+                  </p:tgtEl>
+                </p:cond>
+              </p:nextCondLst>
+            </p:seq>
+          </p:childTnLst>
+        </p:cTn>
+      </p:par>
+    </p:tnLst>
+    <p:bldLst>
+      <p:bldP spid="2" grpId="0"/>
+      <p:bldP spid="6" grpId="0"/>
+      <p:bldP spid="2" grpId="1"/>
+      <p:bldP spid="6" grpId="1"/>
+    </p:bldLst>
+  </p:timing>
 </p:sld>
 </file>
 
 <file path=ppt/slides/slide9.xml><?xml version="1.0" encoding="utf-8"?>
 <p:sld xmlns:a="http://schemas.openxmlformats.org/drawingml/2006/main" xmlns:r="http://schemas.openxmlformats.org/officeDocument/2006/relationships" xmlns:p="http://schemas.openxmlformats.org/presentationml/2006/main">
-  <p:cSld name="Slide 9">
+  <p:cSld>
     <p:bg>
       <p:bgPr>
         <a:blipFill dpi="0" rotWithShape="1">
@@ -8379,13 +8473,12 @@
             <a:avLst/>
           </a:prstGeom>
           <a:noFill/>
-          <a:ln/>
         </p:spPr>
         <p:txBody>
           <a:bodyPr wrap="square" rtlCol="0" anchor="ctr"/>
           <a:lstStyle/>
           <a:p>
-            <a:pPr algn="r" indent="0" marL="0">
+            <a:pPr marL="0" indent="0" algn="r">
               <a:buNone/>
             </a:pPr>
             <a:r>
@@ -8393,9 +8486,9 @@
                 <a:solidFill>
                   <a:srgbClr val="8A9099"/>
                 </a:solidFill>
-                <a:latin typeface="微软雅黑" pitchFamily="34" charset="0"/>
-                <a:ea typeface="微软雅黑" pitchFamily="34" charset="-122"/>
-                <a:cs typeface="微软雅黑" pitchFamily="34" charset="-120"/>
+                <a:latin typeface="微软雅黑" panose="020B0503020204020204" pitchFamily="34" charset="-122"/>
+                <a:ea typeface="微软雅黑" panose="020B0503020204020204" pitchFamily="34" charset="-122"/>
+                <a:cs typeface="微软雅黑" panose="020B0503020204020204" pitchFamily="34" charset="-120"/>
               </a:rPr>
               <a:t>9 / 16</a:t>
             </a:r>
@@ -8418,13 +8511,12 @@
             <a:avLst/>
           </a:prstGeom>
           <a:noFill/>
-          <a:ln/>
         </p:spPr>
         <p:txBody>
           <a:bodyPr wrap="square" rtlCol="0" anchor="ctr"/>
           <a:lstStyle/>
           <a:p>
-            <a:pPr algn="l" indent="0" marL="0">
+            <a:pPr marL="0" indent="0" algn="l">
               <a:buNone/>
             </a:pPr>
             <a:r>
@@ -8432,9 +8524,9 @@
                 <a:solidFill>
                   <a:srgbClr val="1F4E9C"/>
                 </a:solidFill>
-                <a:latin typeface="微软雅黑" pitchFamily="34" charset="0"/>
-                <a:ea typeface="微软雅黑" pitchFamily="34" charset="-122"/>
-                <a:cs typeface="微软雅黑" pitchFamily="34" charset="-120"/>
+                <a:latin typeface="微软雅黑" panose="020B0503020204020204" pitchFamily="34" charset="-122"/>
+                <a:ea typeface="微软雅黑" panose="020B0503020204020204" pitchFamily="34" charset="-122"/>
+                <a:cs typeface="微软雅黑" panose="020B0503020204020204" pitchFamily="34" charset="-120"/>
               </a:rPr>
               <a:t>循环队列 · 过程页</a:t>
             </a:r>
@@ -8457,13 +8549,12 @@
             <a:avLst/>
           </a:prstGeom>
           <a:noFill/>
-          <a:ln/>
         </p:spPr>
         <p:txBody>
           <a:bodyPr wrap="square" rtlCol="0" anchor="ctr"/>
           <a:lstStyle/>
           <a:p>
-            <a:pPr algn="l" indent="0" marL="0">
+            <a:pPr marL="0" indent="0" algn="l">
               <a:buNone/>
             </a:pPr>
             <a:r>
@@ -8471,9 +8562,9 @@
                 <a:solidFill>
                   <a:srgbClr val="1F2329"/>
                 </a:solidFill>
-                <a:latin typeface="微软雅黑" pitchFamily="34" charset="0"/>
-                <a:ea typeface="微软雅黑" pitchFamily="34" charset="-122"/>
-                <a:cs typeface="微软雅黑" pitchFamily="34" charset="-120"/>
+                <a:latin typeface="微软雅黑" panose="020B0503020204020204" pitchFamily="34" charset="-122"/>
+                <a:ea typeface="微软雅黑" panose="020B0503020204020204" pitchFamily="34" charset="-122"/>
+                <a:cs typeface="微软雅黑" panose="020B0503020204020204" pitchFamily="34" charset="-120"/>
               </a:rPr>
               <a:t>MaxSize=5 的循环队列走一圈（拿纸跟着画）</a:t>
             </a:r>
@@ -8521,13 +8612,12 @@
             <a:avLst/>
           </a:prstGeom>
           <a:noFill/>
-          <a:ln/>
         </p:spPr>
         <p:txBody>
           <a:bodyPr wrap="square" rtlCol="0" anchor="ctr"/>
           <a:lstStyle/>
           <a:p>
-            <a:pPr algn="ctr" indent="0" marL="0">
+            <a:pPr marL="0" indent="0" algn="ctr">
               <a:buNone/>
             </a:pPr>
             <a:endParaRPr lang="en-US" sz="1100" dirty="0"/>
@@ -8549,13 +8639,12 @@
             <a:avLst/>
           </a:prstGeom>
           <a:noFill/>
-          <a:ln/>
         </p:spPr>
         <p:txBody>
           <a:bodyPr wrap="square" rtlCol="0" anchor="t"/>
           <a:lstStyle/>
           <a:p>
-            <a:pPr algn="ctr" indent="0" marL="0">
+            <a:pPr marL="0" indent="0" algn="ctr">
               <a:buNone/>
             </a:pPr>
             <a:r>
@@ -8563,9 +8652,9 @@
                 <a:solidFill>
                   <a:srgbClr val="8A9099"/>
                 </a:solidFill>
-                <a:latin typeface="微软雅黑" pitchFamily="34" charset="0"/>
-                <a:ea typeface="微软雅黑" pitchFamily="34" charset="-122"/>
-                <a:cs typeface="微软雅黑" pitchFamily="34" charset="-120"/>
+                <a:latin typeface="微软雅黑" panose="020B0503020204020204" pitchFamily="34" charset="-122"/>
+                <a:ea typeface="微软雅黑" panose="020B0503020204020204" pitchFamily="34" charset="-122"/>
+                <a:cs typeface="微软雅黑" panose="020B0503020204020204" pitchFamily="34" charset="-120"/>
               </a:rPr>
               <a:t>0</a:t>
             </a:r>
@@ -8613,13 +8702,12 @@
             <a:avLst/>
           </a:prstGeom>
           <a:noFill/>
-          <a:ln/>
         </p:spPr>
         <p:txBody>
           <a:bodyPr wrap="square" rtlCol="0" anchor="ctr"/>
           <a:lstStyle/>
           <a:p>
-            <a:pPr algn="ctr" indent="0" marL="0">
+            <a:pPr marL="0" indent="0" algn="ctr">
               <a:buNone/>
             </a:pPr>
             <a:endParaRPr lang="en-US" sz="1100" dirty="0"/>
@@ -8641,13 +8729,12 @@
             <a:avLst/>
           </a:prstGeom>
           <a:noFill/>
-          <a:ln/>
         </p:spPr>
         <p:txBody>
           <a:bodyPr wrap="square" rtlCol="0" anchor="t"/>
           <a:lstStyle/>
           <a:p>
-            <a:pPr algn="ctr" indent="0" marL="0">
+            <a:pPr marL="0" indent="0" algn="ctr">
               <a:buNone/>
             </a:pPr>
             <a:r>
@@ -8655,9 +8742,9 @@
                 <a:solidFill>
                   <a:srgbClr val="8A9099"/>
                 </a:solidFill>
-                <a:latin typeface="微软雅黑" pitchFamily="34" charset="0"/>
-                <a:ea typeface="微软雅黑" pitchFamily="34" charset="-122"/>
-                <a:cs typeface="微软雅黑" pitchFamily="34" charset="-120"/>
+                <a:latin typeface="微软雅黑" panose="020B0503020204020204" pitchFamily="34" charset="-122"/>
+                <a:ea typeface="微软雅黑" panose="020B0503020204020204" pitchFamily="34" charset="-122"/>
+                <a:cs typeface="微软雅黑" panose="020B0503020204020204" pitchFamily="34" charset="-120"/>
               </a:rPr>
               <a:t>1</a:t>
             </a:r>
@@ -8705,13 +8792,12 @@
             <a:avLst/>
           </a:prstGeom>
           <a:noFill/>
-          <a:ln/>
         </p:spPr>
         <p:txBody>
           <a:bodyPr wrap="square" rtlCol="0" anchor="ctr"/>
           <a:lstStyle/>
           <a:p>
-            <a:pPr algn="ctr" indent="0" marL="0">
+            <a:pPr marL="0" indent="0" algn="ctr">
               <a:buNone/>
             </a:pPr>
             <a:r>
@@ -8719,9 +8805,9 @@
                 <a:solidFill>
                   <a:srgbClr val="1F2329"/>
                 </a:solidFill>
-                <a:latin typeface="微软雅黑" pitchFamily="34" charset="0"/>
-                <a:ea typeface="微软雅黑" pitchFamily="34" charset="-122"/>
-                <a:cs typeface="微软雅黑" pitchFamily="34" charset="-120"/>
+                <a:latin typeface="微软雅黑" panose="020B0503020204020204" pitchFamily="34" charset="-122"/>
+                <a:ea typeface="微软雅黑" panose="020B0503020204020204" pitchFamily="34" charset="-122"/>
+                <a:cs typeface="微软雅黑" panose="020B0503020204020204" pitchFamily="34" charset="-120"/>
               </a:rPr>
               <a:t>c</a:t>
             </a:r>
@@ -8744,13 +8830,12 @@
             <a:avLst/>
           </a:prstGeom>
           <a:noFill/>
-          <a:ln/>
         </p:spPr>
         <p:txBody>
           <a:bodyPr wrap="square" rtlCol="0" anchor="t"/>
           <a:lstStyle/>
           <a:p>
-            <a:pPr algn="ctr" indent="0" marL="0">
+            <a:pPr marL="0" indent="0" algn="ctr">
               <a:buNone/>
             </a:pPr>
             <a:r>
@@ -8758,9 +8843,9 @@
                 <a:solidFill>
                   <a:srgbClr val="8A9099"/>
                 </a:solidFill>
-                <a:latin typeface="微软雅黑" pitchFamily="34" charset="0"/>
-                <a:ea typeface="微软雅黑" pitchFamily="34" charset="-122"/>
-                <a:cs typeface="微软雅黑" pitchFamily="34" charset="-120"/>
+                <a:latin typeface="微软雅黑" panose="020B0503020204020204" pitchFamily="34" charset="-122"/>
+                <a:ea typeface="微软雅黑" panose="020B0503020204020204" pitchFamily="34" charset="-122"/>
+                <a:cs typeface="微软雅黑" panose="020B0503020204020204" pitchFamily="34" charset="-120"/>
               </a:rPr>
               <a:t>2</a:t>
             </a:r>
@@ -8808,13 +8893,12 @@
             <a:avLst/>
           </a:prstGeom>
           <a:noFill/>
-          <a:ln/>
         </p:spPr>
         <p:txBody>
           <a:bodyPr wrap="square" rtlCol="0" anchor="ctr"/>
           <a:lstStyle/>
           <a:p>
-            <a:pPr algn="ctr" indent="0" marL="0">
+            <a:pPr marL="0" indent="0" algn="ctr">
               <a:buNone/>
             </a:pPr>
             <a:r>
@@ -8822,9 +8906,9 @@
                 <a:solidFill>
                   <a:srgbClr val="1F2329"/>
                 </a:solidFill>
-                <a:latin typeface="微软雅黑" pitchFamily="34" charset="0"/>
-                <a:ea typeface="微软雅黑" pitchFamily="34" charset="-122"/>
-                <a:cs typeface="微软雅黑" pitchFamily="34" charset="-120"/>
+                <a:latin typeface="微软雅黑" panose="020B0503020204020204" pitchFamily="34" charset="-122"/>
+                <a:ea typeface="微软雅黑" panose="020B0503020204020204" pitchFamily="34" charset="-122"/>
+                <a:cs typeface="微软雅黑" panose="020B0503020204020204" pitchFamily="34" charset="-120"/>
               </a:rPr>
               <a:t>d</a:t>
             </a:r>
@@ -8847,13 +8931,12 @@
             <a:avLst/>
           </a:prstGeom>
           <a:noFill/>
-          <a:ln/>
         </p:spPr>
         <p:txBody>
           <a:bodyPr wrap="square" rtlCol="0" anchor="t"/>
           <a:lstStyle/>
           <a:p>
-            <a:pPr algn="ctr" indent="0" marL="0">
+            <a:pPr marL="0" indent="0" algn="ctr">
               <a:buNone/>
             </a:pPr>
             <a:r>
@@ -8861,9 +8944,9 @@
                 <a:solidFill>
                   <a:srgbClr val="8A9099"/>
                 </a:solidFill>
-                <a:latin typeface="微软雅黑" pitchFamily="34" charset="0"/>
-                <a:ea typeface="微软雅黑" pitchFamily="34" charset="-122"/>
-                <a:cs typeface="微软雅黑" pitchFamily="34" charset="-120"/>
+                <a:latin typeface="微软雅黑" panose="020B0503020204020204" pitchFamily="34" charset="-122"/>
+                <a:ea typeface="微软雅黑" panose="020B0503020204020204" pitchFamily="34" charset="-122"/>
+                <a:cs typeface="微软雅黑" panose="020B0503020204020204" pitchFamily="34" charset="-120"/>
               </a:rPr>
               <a:t>3</a:t>
             </a:r>
@@ -8911,13 +8994,12 @@
             <a:avLst/>
           </a:prstGeom>
           <a:noFill/>
-          <a:ln/>
         </p:spPr>
         <p:txBody>
           <a:bodyPr wrap="square" rtlCol="0" anchor="ctr"/>
           <a:lstStyle/>
           <a:p>
-            <a:pPr algn="ctr" indent="0" marL="0">
+            <a:pPr marL="0" indent="0" algn="ctr">
               <a:buNone/>
             </a:pPr>
             <a:r>
@@ -8925,9 +9007,9 @@
                 <a:solidFill>
                   <a:srgbClr val="1F2329"/>
                 </a:solidFill>
-                <a:latin typeface="微软雅黑" pitchFamily="34" charset="0"/>
-                <a:ea typeface="微软雅黑" pitchFamily="34" charset="-122"/>
-                <a:cs typeface="微软雅黑" pitchFamily="34" charset="-120"/>
+                <a:latin typeface="微软雅黑" panose="020B0503020204020204" pitchFamily="34" charset="-122"/>
+                <a:ea typeface="微软雅黑" panose="020B0503020204020204" pitchFamily="34" charset="-122"/>
+                <a:cs typeface="微软雅黑" panose="020B0503020204020204" pitchFamily="34" charset="-120"/>
               </a:rPr>
               <a:t>e</a:t>
             </a:r>
@@ -8950,13 +9032,12 @@
             <a:avLst/>
           </a:prstGeom>
           <a:noFill/>
-          <a:ln/>
         </p:spPr>
         <p:txBody>
           <a:bodyPr wrap="square" rtlCol="0" anchor="t"/>
           <a:lstStyle/>
           <a:p>
-            <a:pPr algn="ctr" indent="0" marL="0">
+            <a:pPr marL="0" indent="0" algn="ctr">
               <a:buNone/>
             </a:pPr>
             <a:r>
@@ -8964,9 +9045,9 @@
                 <a:solidFill>
                   <a:srgbClr val="8A9099"/>
                 </a:solidFill>
-                <a:latin typeface="微软雅黑" pitchFamily="34" charset="0"/>
-                <a:ea typeface="微软雅黑" pitchFamily="34" charset="-122"/>
-                <a:cs typeface="微软雅黑" pitchFamily="34" charset="-120"/>
+                <a:latin typeface="微软雅黑" panose="020B0503020204020204" pitchFamily="34" charset="-122"/>
+                <a:ea typeface="微软雅黑" panose="020B0503020204020204" pitchFamily="34" charset="-122"/>
+                <a:cs typeface="微软雅黑" panose="020B0503020204020204" pitchFamily="34" charset="-120"/>
               </a:rPr>
               <a:t>4</a:t>
             </a:r>
@@ -9012,13 +9093,12 @@
             <a:avLst/>
           </a:prstGeom>
           <a:noFill/>
-          <a:ln/>
         </p:spPr>
         <p:txBody>
           <a:bodyPr wrap="square" rtlCol="0" anchor="ctr"/>
           <a:lstStyle/>
           <a:p>
-            <a:pPr algn="ctr" indent="0" marL="0">
+            <a:pPr marL="0" indent="0" algn="ctr">
               <a:buNone/>
             </a:pPr>
             <a:r>
@@ -9026,9 +9106,9 @@
                 <a:solidFill>
                   <a:srgbClr val="1F4E9C"/>
                 </a:solidFill>
-                <a:latin typeface="微软雅黑" pitchFamily="34" charset="0"/>
-                <a:ea typeface="微软雅黑" pitchFamily="34" charset="-122"/>
-                <a:cs typeface="微软雅黑" pitchFamily="34" charset="-120"/>
+                <a:latin typeface="微软雅黑" panose="020B0503020204020204" pitchFamily="34" charset="-122"/>
+                <a:ea typeface="微软雅黑" panose="020B0503020204020204" pitchFamily="34" charset="-122"/>
+                <a:cs typeface="微软雅黑" panose="020B0503020204020204" pitchFamily="34" charset="-120"/>
               </a:rPr>
               <a:t>front=2</a:t>
             </a:r>
@@ -9074,13 +9154,12 @@
             <a:avLst/>
           </a:prstGeom>
           <a:noFill/>
-          <a:ln/>
         </p:spPr>
         <p:txBody>
           <a:bodyPr wrap="square" rtlCol="0" anchor="ctr"/>
           <a:lstStyle/>
           <a:p>
-            <a:pPr algn="ctr" indent="0" marL="0">
+            <a:pPr marL="0" indent="0" algn="ctr">
               <a:buNone/>
             </a:pPr>
             <a:r>
@@ -9088,9 +9167,9 @@
                 <a:solidFill>
                   <a:srgbClr val="1F4E9C"/>
                 </a:solidFill>
-                <a:latin typeface="微软雅黑" pitchFamily="34" charset="0"/>
-                <a:ea typeface="微软雅黑" pitchFamily="34" charset="-122"/>
-                <a:cs typeface="微软雅黑" pitchFamily="34" charset="-120"/>
+                <a:latin typeface="微软雅黑" panose="020B0503020204020204" pitchFamily="34" charset="-122"/>
+                <a:ea typeface="微软雅黑" panose="020B0503020204020204" pitchFamily="34" charset="-122"/>
+                <a:cs typeface="微软雅黑" panose="020B0503020204020204" pitchFamily="34" charset="-120"/>
               </a:rPr>
               <a:t>rear=0</a:t>
             </a:r>
@@ -9113,13 +9192,12 @@
             <a:avLst/>
           </a:prstGeom>
           <a:noFill/>
-          <a:ln/>
         </p:spPr>
         <p:txBody>
           <a:bodyPr wrap="square" rtlCol="0" anchor="t"/>
           <a:lstStyle/>
           <a:p>
-            <a:pPr algn="l" indent="0" marL="0">
+            <a:pPr marL="0" indent="0" algn="l">
               <a:lnSpc>
                 <a:spcPct val="115000"/>
               </a:lnSpc>
@@ -9130,25 +9208,68 @@
                 <a:solidFill>
                   <a:srgbClr val="1F4E9C"/>
                 </a:solidFill>
-                <a:latin typeface="微软雅黑" pitchFamily="34" charset="0"/>
-                <a:ea typeface="微软雅黑" pitchFamily="34" charset="-122"/>
-                <a:cs typeface="微软雅黑" pitchFamily="34" charset="-120"/>
+                <a:latin typeface="微软雅黑" panose="020B0503020204020204" pitchFamily="34" charset="-122"/>
+                <a:ea typeface="微软雅黑" panose="020B0503020204020204" pitchFamily="34" charset="-122"/>
+                <a:cs typeface="微软雅黑" panose="020B0503020204020204" pitchFamily="34" charset="-120"/>
               </a:rPr>
               <a:t>•  </a:t>
             </a:r>
-            <a:pPr algn="l" indent="0" marL="0">
+            <a:r>
+              <a:rPr lang="en-US" sz="1400" dirty="0">
+                <a:solidFill>
+                  <a:srgbClr val="000000"/>
+                </a:solidFill>
+              </a:rPr>
+              <a:t>① 初始 front=rear=0，队空</a:t>
+            </a:r>
+            <a:endParaRPr lang="en-US" sz="1400" dirty="0"/>
+          </a:p>
+        </p:txBody>
+      </p:sp>
+      <p:sp>
+        <p:nvSpPr>
+          <p:cNvPr id="25" name="Text 23"/>
+          <p:cNvSpPr/>
+          <p:nvPr/>
+        </p:nvSpPr>
+        <p:spPr>
+          <a:xfrm>
+            <a:off x="896112" y="4344924"/>
+            <a:ext cx="10454335" cy="588264"/>
+          </a:xfrm>
+          <a:prstGeom prst="rect">
+            <a:avLst/>
+          </a:prstGeom>
+          <a:noFill/>
+        </p:spPr>
+        <p:txBody>
+          <a:bodyPr wrap="square" rtlCol="0" anchor="t"/>
+          <a:lstStyle/>
+          <a:p>
+            <a:pPr marL="0" indent="0" algn="l">
               <a:lnSpc>
                 <a:spcPct val="115000"/>
               </a:lnSpc>
               <a:buNone/>
             </a:pPr>
             <a:r>
+              <a:rPr lang="en-US" sz="1400" b="1" dirty="0">
+                <a:solidFill>
+                  <a:srgbClr val="1F4E9C"/>
+                </a:solidFill>
+                <a:latin typeface="微软雅黑" panose="020B0503020204020204" pitchFamily="34" charset="-122"/>
+                <a:ea typeface="微软雅黑" panose="020B0503020204020204" pitchFamily="34" charset="-122"/>
+                <a:cs typeface="微软雅黑" panose="020B0503020204020204" pitchFamily="34" charset="-120"/>
+              </a:rPr>
+              <a:t>•  </a:t>
+            </a:r>
+            <a:r>
               <a:rPr lang="en-US" sz="1400" dirty="0">
                 <a:solidFill>
                   <a:srgbClr val="000000"/>
                 </a:solidFill>
               </a:rPr>
-              <a:t>① 初始 front=rear=0，队空</a:t>
+              <a:t>② 入队 a、b、c、d，rear 移到 4，元素占下标 0到3；(rear+1)%5=0==front 判满，下标4那格空着也不能用，这就是牺牲的一单元</a:t>
             </a:r>
             <a:endParaRPr lang="en-US" sz="1400" dirty="0"/>
           </a:p>
@@ -9156,26 +9277,25 @@
       </p:sp>
       <p:sp>
         <p:nvSpPr>
-          <p:cNvPr id="25" name="Text 23"/>
-          <p:cNvSpPr/>
-          <p:nvPr/>
-        </p:nvSpPr>
-        <p:spPr>
-          <a:xfrm>
-            <a:off x="896112" y="4344924"/>
+          <p:cNvPr id="26" name="Text 24"/>
+          <p:cNvSpPr/>
+          <p:nvPr/>
+        </p:nvSpPr>
+        <p:spPr>
+          <a:xfrm>
+            <a:off x="896112" y="5006340"/>
             <a:ext cx="10454335" cy="588264"/>
           </a:xfrm>
           <a:prstGeom prst="rect">
             <a:avLst/>
           </a:prstGeom>
           <a:noFill/>
-          <a:ln/>
         </p:spPr>
         <p:txBody>
           <a:bodyPr wrap="square" rtlCol="0" anchor="t"/>
           <a:lstStyle/>
           <a:p>
-            <a:pPr algn="l" indent="0" marL="0">
+            <a:pPr marL="0" indent="0" algn="l">
               <a:lnSpc>
                 <a:spcPct val="115000"/>
               </a:lnSpc>
@@ -9186,130 +9306,61 @@
                 <a:solidFill>
                   <a:srgbClr val="1F4E9C"/>
                 </a:solidFill>
-                <a:latin typeface="微软雅黑" pitchFamily="34" charset="0"/>
-                <a:ea typeface="微软雅黑" pitchFamily="34" charset="-122"/>
-                <a:cs typeface="微软雅黑" pitchFamily="34" charset="-120"/>
+                <a:latin typeface="微软雅黑" panose="020B0503020204020204" pitchFamily="34" charset="-122"/>
+                <a:ea typeface="微软雅黑" panose="020B0503020204020204" pitchFamily="34" charset="-122"/>
+                <a:cs typeface="微软雅黑" panose="020B0503020204020204" pitchFamily="34" charset="-120"/>
               </a:rPr>
               <a:t>•  </a:t>
             </a:r>
-            <a:pPr algn="l" indent="0" marL="0">
+            <a:r>
+              <a:rPr lang="en-US" sz="1400" dirty="0">
+                <a:solidFill>
+                  <a:srgbClr val="000000"/>
+                </a:solidFill>
+              </a:rPr>
+              <a:t>③ 出队 a、b，front 移到 2，队里剩 c、d；(rear+1)%5=0≠front=2，不再满，又能入队</a:t>
+            </a:r>
+            <a:endParaRPr lang="en-US" sz="1400" dirty="0"/>
+          </a:p>
+        </p:txBody>
+      </p:sp>
+      <p:sp>
+        <p:nvSpPr>
+          <p:cNvPr id="27" name="Text 25"/>
+          <p:cNvSpPr/>
+          <p:nvPr/>
+        </p:nvSpPr>
+        <p:spPr>
+          <a:xfrm>
+            <a:off x="896112" y="5667756"/>
+            <a:ext cx="10454335" cy="588264"/>
+          </a:xfrm>
+          <a:prstGeom prst="rect">
+            <a:avLst/>
+          </a:prstGeom>
+          <a:noFill/>
+        </p:spPr>
+        <p:txBody>
+          <a:bodyPr wrap="square" rtlCol="0" anchor="t"/>
+          <a:lstStyle/>
+          <a:p>
+            <a:pPr marL="0" indent="0" algn="l">
               <a:lnSpc>
                 <a:spcPct val="115000"/>
               </a:lnSpc>
               <a:buNone/>
             </a:pPr>
             <a:r>
-              <a:rPr lang="en-US" sz="1400" dirty="0">
-                <a:solidFill>
-                  <a:srgbClr val="000000"/>
-                </a:solidFill>
-              </a:rPr>
-              <a:t>② 入队 a、b、c、d，rear 移到 4，元素占下标 0到3；(rear+1)%5=0==front 判满，下标4那格空着也不能用，这就是牺牲的一单元</a:t>
-            </a:r>
-            <a:endParaRPr lang="en-US" sz="1400" dirty="0"/>
-          </a:p>
-        </p:txBody>
-      </p:sp>
-      <p:sp>
-        <p:nvSpPr>
-          <p:cNvPr id="26" name="Text 24"/>
-          <p:cNvSpPr/>
-          <p:nvPr/>
-        </p:nvSpPr>
-        <p:spPr>
-          <a:xfrm>
-            <a:off x="896112" y="5006340"/>
-            <a:ext cx="10454335" cy="588264"/>
-          </a:xfrm>
-          <a:prstGeom prst="rect">
-            <a:avLst/>
-          </a:prstGeom>
-          <a:noFill/>
-          <a:ln/>
-        </p:spPr>
-        <p:txBody>
-          <a:bodyPr wrap="square" rtlCol="0" anchor="t"/>
-          <a:lstStyle/>
-          <a:p>
-            <a:pPr algn="l" indent="0" marL="0">
-              <a:lnSpc>
-                <a:spcPct val="115000"/>
-              </a:lnSpc>
-              <a:buNone/>
-            </a:pPr>
-            <a:r>
               <a:rPr lang="en-US" sz="1400" b="1" dirty="0">
                 <a:solidFill>
                   <a:srgbClr val="1F4E9C"/>
                 </a:solidFill>
-                <a:latin typeface="微软雅黑" pitchFamily="34" charset="0"/>
-                <a:ea typeface="微软雅黑" pitchFamily="34" charset="-122"/>
-                <a:cs typeface="微软雅黑" pitchFamily="34" charset="-120"/>
+                <a:latin typeface="微软雅黑" panose="020B0503020204020204" pitchFamily="34" charset="-122"/>
+                <a:ea typeface="微软雅黑" panose="020B0503020204020204" pitchFamily="34" charset="-122"/>
+                <a:cs typeface="微软雅黑" panose="020B0503020204020204" pitchFamily="34" charset="-120"/>
               </a:rPr>
               <a:t>•  </a:t>
             </a:r>
-            <a:pPr algn="l" indent="0" marL="0">
-              <a:lnSpc>
-                <a:spcPct val="115000"/>
-              </a:lnSpc>
-              <a:buNone/>
-            </a:pPr>
-            <a:r>
-              <a:rPr lang="en-US" sz="1400" dirty="0">
-                <a:solidFill>
-                  <a:srgbClr val="000000"/>
-                </a:solidFill>
-              </a:rPr>
-              <a:t>③ 出队 a、b，front 移到 2，队里剩 c、d；(rear+1)%5=0≠front=2，不再满，又能入队</a:t>
-            </a:r>
-            <a:endParaRPr lang="en-US" sz="1400" dirty="0"/>
-          </a:p>
-        </p:txBody>
-      </p:sp>
-      <p:sp>
-        <p:nvSpPr>
-          <p:cNvPr id="27" name="Text 25"/>
-          <p:cNvSpPr/>
-          <p:nvPr/>
-        </p:nvSpPr>
-        <p:spPr>
-          <a:xfrm>
-            <a:off x="896112" y="5667756"/>
-            <a:ext cx="10454335" cy="588264"/>
-          </a:xfrm>
-          <a:prstGeom prst="rect">
-            <a:avLst/>
-          </a:prstGeom>
-          <a:noFill/>
-          <a:ln/>
-        </p:spPr>
-        <p:txBody>
-          <a:bodyPr wrap="square" rtlCol="0" anchor="t"/>
-          <a:lstStyle/>
-          <a:p>
-            <a:pPr algn="l" indent="0" marL="0">
-              <a:lnSpc>
-                <a:spcPct val="115000"/>
-              </a:lnSpc>
-              <a:buNone/>
-            </a:pPr>
-            <a:r>
-              <a:rPr lang="en-US" sz="1400" b="1" dirty="0">
-                <a:solidFill>
-                  <a:srgbClr val="1F4E9C"/>
-                </a:solidFill>
-                <a:latin typeface="微软雅黑" pitchFamily="34" charset="0"/>
-                <a:ea typeface="微软雅黑" pitchFamily="34" charset="-122"/>
-                <a:cs typeface="微软雅黑" pitchFamily="34" charset="-120"/>
-              </a:rPr>
-              <a:t>•  </a:t>
-            </a:r>
-            <a:pPr algn="l" indent="0" marL="0">
-              <a:lnSpc>
-                <a:spcPct val="115000"/>
-              </a:lnSpc>
-              <a:buNone/>
-            </a:pPr>
             <a:r>
               <a:rPr lang="en-US" sz="1400" dirty="0">
                 <a:solidFill>
@@ -9337,13 +9388,12 @@
             <a:avLst/>
           </a:prstGeom>
           <a:noFill/>
-          <a:ln/>
         </p:spPr>
         <p:txBody>
           <a:bodyPr wrap="square" rtlCol="0" anchor="t"/>
           <a:lstStyle/>
           <a:p>
-            <a:pPr algn="l" indent="0" marL="0">
+            <a:pPr marL="0" indent="0" algn="l">
               <a:buNone/>
             </a:pPr>
             <a:r>
@@ -9351,9 +9401,9 @@
                 <a:solidFill>
                   <a:srgbClr val="8A9099"/>
                 </a:solidFill>
-                <a:latin typeface="微软雅黑" pitchFamily="34" charset="0"/>
-                <a:ea typeface="微软雅黑" pitchFamily="34" charset="-122"/>
-                <a:cs typeface="微软雅黑" pitchFamily="34" charset="-120"/>
+                <a:latin typeface="微软雅黑" panose="020B0503020204020204" pitchFamily="34" charset="-122"/>
+                <a:ea typeface="微软雅黑" panose="020B0503020204020204" pitchFamily="34" charset="-122"/>
+                <a:cs typeface="微软雅黑" panose="020B0503020204020204" pitchFamily="34" charset="-120"/>
               </a:rPr>
               <a:t>你亲眼看到三件事：rear 从 4 绕回 0；(rear+1)%5==front 时还空一格却判满（牺牲的那格）；front 追上 rear 就是空</a:t>
             </a:r>
@@ -9412,7 +9462,7 @@
     </a:clrScheme>
     <a:fontScheme name="Office">
       <a:majorFont>
-        <a:latin typeface="Calibri Light" panose="020F0302020204030204"/>
+        <a:latin typeface="Calibri Light"/>
         <a:ea typeface=""/>
         <a:cs typeface=""/>
         <a:font script="Jpan" typeface="游ゴシック Light"/>
@@ -9445,26 +9495,9 @@
         <a:font script="Viet" typeface="Times New Roman"/>
         <a:font script="Uigh" typeface="Microsoft Uighur"/>
         <a:font script="Geor" typeface="Sylfaen"/>
-        <a:font script="Armn" typeface="Arial"/>
-        <a:font script="Bugi" typeface="Leelawadee UI"/>
-        <a:font script="Bopo" typeface="Microsoft JhengHei"/>
-        <a:font script="Java" typeface="Javanese Text"/>
-        <a:font script="Lisu" typeface="Segoe UI"/>
-        <a:font script="Mymr" typeface="Myanmar Text"/>
-        <a:font script="Nkoo" typeface="Ebrima"/>
-        <a:font script="Olck" typeface="Nirmala UI"/>
-        <a:font script="Osma" typeface="Ebrima"/>
-        <a:font script="Phag" typeface="Phagspa"/>
-        <a:font script="Syrn" typeface="Estrangelo Edessa"/>
-        <a:font script="Syrj" typeface="Estrangelo Edessa"/>
-        <a:font script="Syre" typeface="Estrangelo Edessa"/>
-        <a:font script="Sora" typeface="Nirmala UI"/>
-        <a:font script="Tale" typeface="Microsoft Tai Le"/>
-        <a:font script="Talu" typeface="Microsoft New Tai Lue"/>
-        <a:font script="Tfng" typeface="Ebrima"/>
       </a:majorFont>
       <a:minorFont>
-        <a:latin typeface="Calibri" panose="020F0502020204030204"/>
+        <a:latin typeface="Calibri"/>
         <a:ea typeface=""/>
         <a:cs typeface=""/>
         <a:font script="Jpan" typeface="游ゴシック"/>
@@ -9497,23 +9530,6 @@
         <a:font script="Viet" typeface="Arial"/>
         <a:font script="Uigh" typeface="Microsoft Uighur"/>
         <a:font script="Geor" typeface="Sylfaen"/>
-        <a:font script="Armn" typeface="Arial"/>
-        <a:font script="Bugi" typeface="Leelawadee UI"/>
-        <a:font script="Bopo" typeface="Microsoft JhengHei"/>
-        <a:font script="Java" typeface="Javanese Text"/>
-        <a:font script="Lisu" typeface="Segoe UI"/>
-        <a:font script="Mymr" typeface="Myanmar Text"/>
-        <a:font script="Nkoo" typeface="Ebrima"/>
-        <a:font script="Olck" typeface="Nirmala UI"/>
-        <a:font script="Osma" typeface="Ebrima"/>
-        <a:font script="Phag" typeface="Phagspa"/>
-        <a:font script="Syrn" typeface="Estrangelo Edessa"/>
-        <a:font script="Syrj" typeface="Estrangelo Edessa"/>
-        <a:font script="Syre" typeface="Estrangelo Edessa"/>
-        <a:font script="Sora" typeface="Nirmala UI"/>
-        <a:font script="Tale" typeface="Microsoft Tai Le"/>
-        <a:font script="Talu" typeface="Microsoft New Tai Lue"/>
-        <a:font script="Tfng" typeface="Ebrima"/>
       </a:minorFont>
     </a:fontScheme>
     <a:fmtScheme name="Office">
@@ -9654,8 +9670,265 @@
       </a:bgFillStyleLst>
     </a:fmtScheme>
   </a:themeElements>
-  <a:objectDefaults/>
-  <a:extraClrSchemeLst/>
+  <a:extLst>
+    <a:ext uri="{05A4C25C-085E-4340-85A3-A5531E510DB2}">
+      <thm15:themeFamily xmlns:thm15="http://schemas.microsoft.com/office/thememl/2012/main" name="Office Theme" id="{62F939B6-93AF-4DB8-9C6B-D6C7DFDC589F}" vid="{4A3C46E8-61CC-4603-A589-7422A47A8E4A}"/>
+    </a:ext>
+  </a:extLst>
+</a:theme>
+</file>
+
+<file path=ppt/theme/theme2.xml><?xml version="1.0" encoding="utf-8"?>
+<a:theme xmlns:a="http://schemas.openxmlformats.org/drawingml/2006/main" name="Office Theme">
+  <a:themeElements>
+    <a:clrScheme name="Office">
+      <a:dk1>
+        <a:sysClr val="windowText" lastClr="000000"/>
+      </a:dk1>
+      <a:lt1>
+        <a:sysClr val="window" lastClr="FFFFFF"/>
+      </a:lt1>
+      <a:dk2>
+        <a:srgbClr val="44546A"/>
+      </a:dk2>
+      <a:lt2>
+        <a:srgbClr val="E7E6E6"/>
+      </a:lt2>
+      <a:accent1>
+        <a:srgbClr val="4472C4"/>
+      </a:accent1>
+      <a:accent2>
+        <a:srgbClr val="ED7D31"/>
+      </a:accent2>
+      <a:accent3>
+        <a:srgbClr val="A5A5A5"/>
+      </a:accent3>
+      <a:accent4>
+        <a:srgbClr val="FFC000"/>
+      </a:accent4>
+      <a:accent5>
+        <a:srgbClr val="5B9BD5"/>
+      </a:accent5>
+      <a:accent6>
+        <a:srgbClr val="70AD47"/>
+      </a:accent6>
+      <a:hlink>
+        <a:srgbClr val="0563C1"/>
+      </a:hlink>
+      <a:folHlink>
+        <a:srgbClr val="954F72"/>
+      </a:folHlink>
+    </a:clrScheme>
+    <a:fontScheme name="Office">
+      <a:majorFont>
+        <a:latin typeface="Calibri Light"/>
+        <a:ea typeface=""/>
+        <a:cs typeface=""/>
+        <a:font script="Jpan" typeface="游ゴシック Light"/>
+        <a:font script="Hang" typeface="맑은 고딕"/>
+        <a:font script="Hans" typeface="等线 Light"/>
+        <a:font script="Hant" typeface="新細明體"/>
+        <a:font script="Arab" typeface="Times New Roman"/>
+        <a:font script="Hebr" typeface="Times New Roman"/>
+        <a:font script="Thai" typeface="Angsana New"/>
+        <a:font script="Ethi" typeface="Nyala"/>
+        <a:font script="Beng" typeface="Vrinda"/>
+        <a:font script="Gujr" typeface="Shruti"/>
+        <a:font script="Khmr" typeface="MoolBoran"/>
+        <a:font script="Knda" typeface="Tunga"/>
+        <a:font script="Guru" typeface="Raavi"/>
+        <a:font script="Cans" typeface="Euphemia"/>
+        <a:font script="Cher" typeface="Plantagenet Cherokee"/>
+        <a:font script="Yiii" typeface="Microsoft Yi Baiti"/>
+        <a:font script="Tibt" typeface="Microsoft Himalaya"/>
+        <a:font script="Thaa" typeface="MV Boli"/>
+        <a:font script="Deva" typeface="Mangal"/>
+        <a:font script="Telu" typeface="Gautami"/>
+        <a:font script="Taml" typeface="Latha"/>
+        <a:font script="Syrc" typeface="Estrangelo Edessa"/>
+        <a:font script="Orya" typeface="Kalinga"/>
+        <a:font script="Mlym" typeface="Kartika"/>
+        <a:font script="Laoo" typeface="DokChampa"/>
+        <a:font script="Sinh" typeface="Iskoola Pota"/>
+        <a:font script="Mong" typeface="Mongolian Baiti"/>
+        <a:font script="Viet" typeface="Times New Roman"/>
+        <a:font script="Uigh" typeface="Microsoft Uighur"/>
+        <a:font script="Geor" typeface="Sylfaen"/>
+      </a:majorFont>
+      <a:minorFont>
+        <a:latin typeface="Calibri"/>
+        <a:ea typeface=""/>
+        <a:cs typeface=""/>
+        <a:font script="Jpan" typeface="游ゴシック"/>
+        <a:font script="Hang" typeface="맑은 고딕"/>
+        <a:font script="Hans" typeface="等线"/>
+        <a:font script="Hant" typeface="新細明體"/>
+        <a:font script="Arab" typeface="Arial"/>
+        <a:font script="Hebr" typeface="Arial"/>
+        <a:font script="Thai" typeface="Cordia New"/>
+        <a:font script="Ethi" typeface="Nyala"/>
+        <a:font script="Beng" typeface="Vrinda"/>
+        <a:font script="Gujr" typeface="Shruti"/>
+        <a:font script="Khmr" typeface="DaunPenh"/>
+        <a:font script="Knda" typeface="Tunga"/>
+        <a:font script="Guru" typeface="Raavi"/>
+        <a:font script="Cans" typeface="Euphemia"/>
+        <a:font script="Cher" typeface="Plantagenet Cherokee"/>
+        <a:font script="Yiii" typeface="Microsoft Yi Baiti"/>
+        <a:font script="Tibt" typeface="Microsoft Himalaya"/>
+        <a:font script="Thaa" typeface="MV Boli"/>
+        <a:font script="Deva" typeface="Mangal"/>
+        <a:font script="Telu" typeface="Gautami"/>
+        <a:font script="Taml" typeface="Latha"/>
+        <a:font script="Syrc" typeface="Estrangelo Edessa"/>
+        <a:font script="Orya" typeface="Kalinga"/>
+        <a:font script="Mlym" typeface="Kartika"/>
+        <a:font script="Laoo" typeface="DokChampa"/>
+        <a:font script="Sinh" typeface="Iskoola Pota"/>
+        <a:font script="Mong" typeface="Mongolian Baiti"/>
+        <a:font script="Viet" typeface="Arial"/>
+        <a:font script="Uigh" typeface="Microsoft Uighur"/>
+        <a:font script="Geor" typeface="Sylfaen"/>
+      </a:minorFont>
+    </a:fontScheme>
+    <a:fmtScheme name="Office">
+      <a:fillStyleLst>
+        <a:solidFill>
+          <a:schemeClr val="phClr"/>
+        </a:solidFill>
+        <a:gradFill rotWithShape="1">
+          <a:gsLst>
+            <a:gs pos="0">
+              <a:schemeClr val="phClr">
+                <a:lumMod val="110000"/>
+                <a:satMod val="105000"/>
+                <a:tint val="67000"/>
+              </a:schemeClr>
+            </a:gs>
+            <a:gs pos="50000">
+              <a:schemeClr val="phClr">
+                <a:lumMod val="105000"/>
+                <a:satMod val="103000"/>
+                <a:tint val="73000"/>
+              </a:schemeClr>
+            </a:gs>
+            <a:gs pos="100000">
+              <a:schemeClr val="phClr">
+                <a:lumMod val="105000"/>
+                <a:satMod val="109000"/>
+                <a:tint val="81000"/>
+              </a:schemeClr>
+            </a:gs>
+          </a:gsLst>
+          <a:lin ang="5400000" scaled="0"/>
+        </a:gradFill>
+        <a:gradFill rotWithShape="1">
+          <a:gsLst>
+            <a:gs pos="0">
+              <a:schemeClr val="phClr">
+                <a:satMod val="103000"/>
+                <a:lumMod val="102000"/>
+                <a:tint val="94000"/>
+              </a:schemeClr>
+            </a:gs>
+            <a:gs pos="50000">
+              <a:schemeClr val="phClr">
+                <a:satMod val="110000"/>
+                <a:lumMod val="100000"/>
+                <a:shade val="100000"/>
+              </a:schemeClr>
+            </a:gs>
+            <a:gs pos="100000">
+              <a:schemeClr val="phClr">
+                <a:lumMod val="99000"/>
+                <a:satMod val="120000"/>
+                <a:shade val="78000"/>
+              </a:schemeClr>
+            </a:gs>
+          </a:gsLst>
+          <a:lin ang="5400000" scaled="0"/>
+        </a:gradFill>
+      </a:fillStyleLst>
+      <a:lnStyleLst>
+        <a:ln w="6350" cap="flat" cmpd="sng" algn="ctr">
+          <a:solidFill>
+            <a:schemeClr val="phClr"/>
+          </a:solidFill>
+          <a:prstDash val="solid"/>
+          <a:miter lim="800000"/>
+        </a:ln>
+        <a:ln w="12700" cap="flat" cmpd="sng" algn="ctr">
+          <a:solidFill>
+            <a:schemeClr val="phClr"/>
+          </a:solidFill>
+          <a:prstDash val="solid"/>
+          <a:miter lim="800000"/>
+        </a:ln>
+        <a:ln w="19050" cap="flat" cmpd="sng" algn="ctr">
+          <a:solidFill>
+            <a:schemeClr val="phClr"/>
+          </a:solidFill>
+          <a:prstDash val="solid"/>
+          <a:miter lim="800000"/>
+        </a:ln>
+      </a:lnStyleLst>
+      <a:effectStyleLst>
+        <a:effectStyle>
+          <a:effectLst/>
+        </a:effectStyle>
+        <a:effectStyle>
+          <a:effectLst/>
+        </a:effectStyle>
+        <a:effectStyle>
+          <a:effectLst>
+            <a:outerShdw blurRad="57150" dist="19050" dir="5400000" algn="ctr" rotWithShape="0">
+              <a:srgbClr val="000000">
+                <a:alpha val="63000"/>
+              </a:srgbClr>
+            </a:outerShdw>
+          </a:effectLst>
+        </a:effectStyle>
+      </a:effectStyleLst>
+      <a:bgFillStyleLst>
+        <a:solidFill>
+          <a:schemeClr val="phClr"/>
+        </a:solidFill>
+        <a:solidFill>
+          <a:schemeClr val="phClr">
+            <a:tint val="95000"/>
+            <a:satMod val="170000"/>
+          </a:schemeClr>
+        </a:solidFill>
+        <a:gradFill rotWithShape="1">
+          <a:gsLst>
+            <a:gs pos="0">
+              <a:schemeClr val="phClr">
+                <a:tint val="93000"/>
+                <a:satMod val="150000"/>
+                <a:shade val="98000"/>
+                <a:lumMod val="102000"/>
+              </a:schemeClr>
+            </a:gs>
+            <a:gs pos="50000">
+              <a:schemeClr val="phClr">
+                <a:tint val="98000"/>
+                <a:satMod val="130000"/>
+                <a:shade val="90000"/>
+                <a:lumMod val="103000"/>
+              </a:schemeClr>
+            </a:gs>
+            <a:gs pos="100000">
+              <a:schemeClr val="phClr">
+                <a:shade val="63000"/>
+                <a:satMod val="120000"/>
+              </a:schemeClr>
+            </a:gs>
+          </a:gsLst>
+          <a:lin ang="5400000" scaled="0"/>
+        </a:gradFill>
+      </a:bgFillStyleLst>
+    </a:fmtScheme>
+  </a:themeElements>
   <a:extLst>
     <a:ext uri="{05A4C25C-085E-4340-85A3-A5531E510DB2}">
       <thm15:themeFamily xmlns:thm15="http://schemas.microsoft.com/office/thememl/2012/main" name="Office Theme" id="{62F939B6-93AF-4DB8-9C6B-D6C7DFDC589F}" vid="{4A3C46E8-61CC-4603-A589-7422A47A8E4A}"/>
